--- a/docs/Parish-Registry-Council-Pitch.pptx
+++ b/docs/Parish-Registry-Council-Pitch.pptx
@@ -4,6 +4,9 @@
   <p:sldMasterIdLst>
     <p:sldMasterId id="2147483648" r:id="rId1"/>
   </p:sldMasterIdLst>
+  <p:notesMasterIdLst>
+    <p:notesMasterId r:id="rId14"/>
+  </p:notesMasterIdLst>
   <p:sldIdLst>
     <p:sldId id="256" r:id="rId2"/>
     <p:sldId id="257" r:id="rId3"/>
@@ -17,11 +20,7 @@
     <p:sldId id="265" r:id="rId11"/>
     <p:sldId id="266" r:id="rId12"/>
     <p:sldId id="267" r:id="rId13"/>
-    <p:sldId id="268" r:id="rId14"/>
   </p:sldIdLst>
-  <p:notesMasterIdLst>
-    <p:notesMasterId r:id="rId15"/>
-  </p:notesMasterIdLst>
   <p:sldSz cx="12192000" cy="6858000"/>
   <p:notesSz cx="6858000" cy="12192000"/>
   <p:defaultTextStyle>
@@ -119,22 +118,22 @@
   <p:extLst>
     <p:ext uri="{521415D9-36F7-43E2-AB2F-B90AF26B5E84}">
       <p14:sectionLst xmlns:p14="http://schemas.microsoft.com/office/powerpoint/2010/main">
-        <p14:section name="Opening" id="{e550a142-d429-c6d6-51e8-b770f56bf1a9}">
+        <p14:section name="Opening" id="{E550A142-D429-C6D6-51E8-B770F56BF1A9}">
           <p14:sldIdLst>
             <p14:sldId id="256"/>
           </p14:sldIdLst>
         </p14:section>
-        <p14:section name="Why" id="{90f021c2-13ce-1f66-b5b8-df11e0fc9182}">
+        <p14:section name="Why" id="{90F021C2-13CE-1F66-B5B8-DF11E0FC9182}">
           <p14:sldIdLst>
             <p14:sldId id="257"/>
           </p14:sldIdLst>
         </p14:section>
-        <p14:section name="What it is" id="{bd3f3d45-20da-9b7e-6279-34569ad0eeec}">
+        <p14:section name="What it is" id="{BD3F3D45-20DA-9B7E-6279-34569AD0EEEC}">
           <p14:sldIdLst>
             <p14:sldId id="258"/>
           </p14:sldIdLst>
         </p14:section>
-        <p14:section name="Who it serves" id="{814dc3e3-3845-b119-b436-ce9b4caaf180}">
+        <p14:section name="Who it serves" id="{814DC3E3-3845-B119-B436-CE9B4CAAF180}">
           <p14:sldIdLst>
             <p14:sldId id="259"/>
             <p14:sldId id="260"/>
@@ -142,22 +141,21 @@
             <p14:sldId id="262"/>
           </p14:sldIdLst>
         </p14:section>
-        <p14:section name="How the census runs" id="{ddac20ab-3e2d-0417-1832-5f96371253ad}">
+        <p14:section name="How the census runs" id="{DDAC20AB-3E2D-0417-1832-5F96371253AD}">
           <p14:sldIdLst>
             <p14:sldId id="263"/>
           </p14:sldIdLst>
         </p14:section>
-        <p14:section name="Trust and cost" id="{f6a1312f-8fc8-b663-801c-07b67264e9cc}">
+        <p14:section name="Trust and cost" id="{F6A1312F-8FC8-B663-801C-07B67264E9CC}">
           <p14:sldIdLst>
             <p14:sldId id="264"/>
             <p14:sldId id="265"/>
           </p14:sldIdLst>
         </p14:section>
-        <p14:section name="Next steps" id="{9de92b71-6668-7d1d-bcc3-ab917960ea11}">
+        <p14:section name="Next steps" id="{9DE92B71-6668-7D1D-BCC3-AB917960EA11}">
           <p14:sldIdLst>
             <p14:sldId id="266"/>
             <p14:sldId id="267"/>
-            <p14:sldId id="268"/>
           </p14:sldIdLst>
         </p14:section>
       </p14:sectionLst>
@@ -191,234 +189,10 @@
           <a:chExt cx="0" cy="0"/>
         </a:xfrm>
       </p:grpSpPr>
-      <p:sp>
-        <p:nvSpPr>
-          <p:cNvPr id="2" name="Header Placeholder 1"/>
-          <p:cNvSpPr>
-            <a:spLocks noGrp="1"/>
-          </p:cNvSpPr>
-          <p:nvPr>
-            <p:ph type="hdr" sz="quarter"/>
-          </p:nvPr>
-        </p:nvSpPr>
-        <p:spPr>
-          <a:xfrm>
-            <a:off x="0" y="0"/>
-            <a:ext cx="2971800" cy="458788"/>
-          </a:xfrm>
-          <a:prstGeom prst="rect">
-            <a:avLst/>
-          </a:prstGeom>
-        </p:spPr>
-        <p:txBody>
-          <a:bodyPr vert="horz" lIns="91440" tIns="45720" rIns="91440" bIns="45720" rtlCol="0"/>
-          <a:lstStyle>
-            <a:lvl1pPr algn="l">
-              <a:defRPr sz="1200"/>
-            </a:lvl1pPr>
-          </a:lstStyle>
-          <a:p>
-            <a:endParaRPr lang="en-US"/>
-          </a:p>
-        </p:txBody>
-      </p:sp>
-      <p:sp>
-        <p:nvSpPr>
-          <p:cNvPr id="3" name="Date Placeholder 2"/>
-          <p:cNvSpPr>
-            <a:spLocks noGrp="1"/>
-          </p:cNvSpPr>
-          <p:nvPr>
-            <p:ph type="dt" idx="1"/>
-          </p:nvPr>
-        </p:nvSpPr>
-        <p:spPr>
-          <a:xfrm>
-            <a:off x="3884613" y="0"/>
-            <a:ext cx="2971800" cy="458788"/>
-          </a:xfrm>
-          <a:prstGeom prst="rect">
-            <a:avLst/>
-          </a:prstGeom>
-        </p:spPr>
-        <p:txBody>
-          <a:bodyPr vert="horz" lIns="91440" tIns="45720" rIns="91440" bIns="45720" rtlCol="0"/>
-          <a:lstStyle>
-            <a:lvl1pPr algn="r">
-              <a:defRPr sz="1200"/>
-            </a:lvl1pPr>
-          </a:lstStyle>
-          <a:p>
-            <a:fld id="{5282F153-3F37-0F45-9E97-73ACFA13230C}" type="datetimeFigureOut">
-              <a:rPr lang="en-US"/>
-              <a:t>7/23/19</a:t>
-            </a:fld>
-            <a:endParaRPr lang="en-US"/>
-          </a:p>
-        </p:txBody>
-      </p:sp>
-      <p:sp>
-        <p:nvSpPr>
-          <p:cNvPr id="4" name="Slide Image Placeholder 3"/>
-          <p:cNvSpPr>
-            <a:spLocks noGrp="1" noRot="1" noChangeAspect="1"/>
-          </p:cNvSpPr>
-          <p:nvPr>
-            <p:ph type="sldImg" idx="2"/>
-          </p:nvPr>
-        </p:nvSpPr>
-        <p:spPr>
-          <a:xfrm>
-            <a:off x="685800" y="1143000"/>
-            <a:ext cx="5486400" cy="3086100"/>
-          </a:xfrm>
-          <a:prstGeom prst="rect">
-            <a:avLst/>
-          </a:prstGeom>
-          <a:noFill/>
-          <a:ln w="12700">
-            <a:solidFill>
-              <a:prstClr val="black"/>
-            </a:solidFill>
-          </a:ln>
-        </p:spPr>
-        <p:txBody>
-          <a:bodyPr vert="horz" lIns="91440" tIns="45720" rIns="91440" bIns="45720" rtlCol="0" anchor="ctr"/>
-          <a:lstStyle/>
-          <a:p>
-            <a:endParaRPr lang="en-US"/>
-          </a:p>
-        </p:txBody>
-      </p:sp>
-      <p:sp>
-        <p:nvSpPr>
-          <p:cNvPr id="5" name="Notes Placeholder 4"/>
-          <p:cNvSpPr>
-            <a:spLocks noGrp="1"/>
-          </p:cNvSpPr>
-          <p:nvPr>
-            <p:ph type="body" sz="quarter" idx="3"/>
-          </p:nvPr>
-        </p:nvSpPr>
-        <p:spPr>
-          <a:xfrm>
-            <a:off x="685800" y="4400550"/>
-            <a:ext cx="5486400" cy="3600450"/>
-          </a:xfrm>
-          <a:prstGeom prst="rect">
-            <a:avLst/>
-          </a:prstGeom>
-        </p:spPr>
-        <p:txBody>
-          <a:bodyPr vert="horz" lIns="91440" tIns="45720" rIns="91440" bIns="45720" rtlCol="0"/>
-          <a:lstStyle/>
-          <a:p>
-            <a:pPr lvl="0"/>
-            <a:r>
-              <a:rPr lang="en-US"/>
-              <a:t>Click to edit Master text styles</a:t>
-            </a:r>
-          </a:p>
-          <a:p>
-            <a:pPr lvl="1"/>
-            <a:r>
-              <a:rPr lang="en-US"/>
-              <a:t>Second level</a:t>
-            </a:r>
-          </a:p>
-          <a:p>
-            <a:pPr lvl="2"/>
-            <a:r>
-              <a:rPr lang="en-US"/>
-              <a:t>Third level</a:t>
-            </a:r>
-          </a:p>
-          <a:p>
-            <a:pPr lvl="3"/>
-            <a:r>
-              <a:rPr lang="en-US"/>
-              <a:t>Fourth level</a:t>
-            </a:r>
-          </a:p>
-          <a:p>
-            <a:pPr lvl="4"/>
-            <a:r>
-              <a:rPr lang="en-US"/>
-              <a:t>Fifth level</a:t>
-            </a:r>
-          </a:p>
-        </p:txBody>
-      </p:sp>
-      <p:sp>
-        <p:nvSpPr>
-          <p:cNvPr id="6" name="Footer Placeholder 5"/>
-          <p:cNvSpPr>
-            <a:spLocks noGrp="1"/>
-          </p:cNvSpPr>
-          <p:nvPr>
-            <p:ph type="ftr" sz="quarter" idx="4"/>
-          </p:nvPr>
-        </p:nvSpPr>
-        <p:spPr>
-          <a:xfrm>
-            <a:off x="0" y="8685213"/>
-            <a:ext cx="2971800" cy="458787"/>
-          </a:xfrm>
-          <a:prstGeom prst="rect">
-            <a:avLst/>
-          </a:prstGeom>
-        </p:spPr>
-        <p:txBody>
-          <a:bodyPr vert="horz" lIns="91440" tIns="45720" rIns="91440" bIns="45720" rtlCol="0" anchor="b"/>
-          <a:lstStyle>
-            <a:lvl1pPr algn="l">
-              <a:defRPr sz="1200"/>
-            </a:lvl1pPr>
-          </a:lstStyle>
-          <a:p>
-            <a:endParaRPr lang="en-US"/>
-          </a:p>
-        </p:txBody>
-      </p:sp>
-      <p:sp>
-        <p:nvSpPr>
-          <p:cNvPr id="7" name="Slide Number Placeholder 6"/>
-          <p:cNvSpPr>
-            <a:spLocks noGrp="1"/>
-          </p:cNvSpPr>
-          <p:nvPr>
-            <p:ph type="sldNum" sz="quarter" idx="5"/>
-          </p:nvPr>
-        </p:nvSpPr>
-        <p:spPr>
-          <a:xfrm>
-            <a:off x="3884613" y="8685213"/>
-            <a:ext cx="2971800" cy="458787"/>
-          </a:xfrm>
-          <a:prstGeom prst="rect">
-            <a:avLst/>
-          </a:prstGeom>
-        </p:spPr>
-        <p:txBody>
-          <a:bodyPr vert="horz" lIns="91440" tIns="45720" rIns="91440" bIns="45720" rtlCol="0" anchor="b"/>
-          <a:lstStyle>
-            <a:lvl1pPr algn="r">
-              <a:defRPr sz="1200"/>
-            </a:lvl1pPr>
-          </a:lstStyle>
-          <a:p>
-            <a:fld id="{CE5E9CC1-C706-0F49-92D6-E571CC5EEA8F}" type="slidenum">
-              <a:rPr lang="en-US"/>
-              <a:t>‹#›</a:t>
-            </a:fld>
-            <a:endParaRPr lang="en-US"/>
-          </a:p>
-        </p:txBody>
-      </p:sp>
     </p:spTree>
     <p:extLst>
       <p:ext uri="{BB962C8B-B14F-4D97-AF65-F5344CB8AC3E}">
-        <p14:creationId xmlns:p14="http://schemas.microsoft.com/office/powerpoint/2010/main" val="1024086991"/>
+        <p14:creationId xmlns:p14="http://schemas.microsoft.com/office/powerpoint/2010/main" val="4012586778"/>
       </p:ext>
     </p:extLst>
   </p:cSld>
@@ -568,7 +342,6 @@
 Tonight I want to show you a tool that is already built for our parish: one registry of every family and member, together with a parish website.
 The goal is simple and pastoral: to know every family in our parish, so that we can care for every family. In the next fifteen minutes I'll show what it does for families, for the office, for our GKK leaders and for this council, what it costs (nothing), and at the end I'll ask the council for four decisions.</a:t>
             </a:r>
-            <a:endParaRPr lang="en-US" dirty="0"/>
           </a:p>
         </p:txBody>
       </p:sp>
@@ -658,7 +431,6 @@
 Free does come with honest limits. The free database goes to sleep after a week without use, so an automatic check every three days keeps it awake. There is no paid support line, which is one reason we keep our own weekly backups. And if we ever outgrow the free plans, the paid ones are about 25 and 20 US dollars a month, but we are nowhere near that today.
 The only optional cost is our own web address, guadalupemuaan.org: about 1,800 pesos for two years. That proposal is already with the Finance Council.</a:t>
             </a:r>
-            <a:endParaRPr lang="en-US" dirty="0"/>
           </a:p>
         </p:txBody>
       </p:sp>
@@ -747,7 +519,6 @@
               <a:t>This is not a plan for the future. Everything I've shown you is built, tested, and running today.
 Here are two codes you can scan with your phone right now. The first is our own live site. The second is a demo site full of sample families, where you can try anything without touching real records, including the staff side: add slash admin to the address and press "Login to Demo Site".</a:t>
             </a:r>
-            <a:endParaRPr lang="en-US" dirty="0"/>
           </a:p>
         </p:txBody>
       </p:sp>
@@ -840,7 +611,6 @@
 Four: announce it at every Mass and in the bulletin, and make sure families without a phone can register at the office.
 And, optionally, support the domain proposal when it comes to the Finance Council.</a:t>
             </a:r>
-            <a:endParaRPr lang="en-US" dirty="0"/>
           </a:p>
         </p:txBody>
       </p:sp>
@@ -862,94 +632,6 @@
             <a:fld id="{F7021451-1387-4CA6-816F-3879F97B5CBC}" type="slidenum">
               <a:rPr lang="en-US"/>
               <a:t>12</a:t>
-            </a:fld>
-            <a:endParaRPr lang="en-US"/>
-          </a:p>
-        </p:txBody>
-      </p:sp>
-    </p:spTree>
-    <p:extLst>
-      <p:ext uri="{BB962C8B-B14F-4D97-AF65-F5344CB8AC3E}">
-        <p14:creationId xmlns:p14="http://schemas.microsoft.com/office/powerpoint/2010/main" val="1024086991"/>
-      </p:ext>
-    </p:extLst>
-  </p:cSld>
-  <p:clrMapOvr>
-    <a:masterClrMapping/>
-  </p:clrMapOvr>
-</p:notes>
-</file>
-
-<file path=ppt/notesSlides/notesSlide13.xml><?xml version="1.0" encoding="utf-8"?>
-<p:notes xmlns:a="http://schemas.openxmlformats.org/drawingml/2006/main" xmlns:r="http://schemas.openxmlformats.org/officeDocument/2006/relationships" xmlns:p="http://schemas.openxmlformats.org/presentationml/2006/main">
-  <p:cSld>
-    <p:spTree>
-      <p:nvGrpSpPr>
-        <p:cNvPr id="1" name=""/>
-        <p:cNvGrpSpPr/>
-        <p:nvPr/>
-      </p:nvGrpSpPr>
-      <p:grpSpPr>
-        <a:xfrm>
-          <a:off x="0" y="0"/>
-          <a:ext cx="0" cy="0"/>
-          <a:chOff x="0" y="0"/>
-          <a:chExt cx="0" cy="0"/>
-        </a:xfrm>
-      </p:grpSpPr>
-      <p:sp>
-        <p:nvSpPr>
-          <p:cNvPr id="2" name="Slide Image Placeholder 1"/>
-          <p:cNvSpPr>
-            <a:spLocks noGrp="1" noRot="1" noChangeAspect="1"/>
-          </p:cNvSpPr>
-          <p:nvPr>
-            <p:ph type="sldImg"/>
-          </p:nvPr>
-        </p:nvSpPr>
-        <p:spPr/>
-      </p:sp>
-      <p:sp>
-        <p:nvSpPr>
-          <p:cNvPr id="3" name="Notes Placeholder 2"/>
-          <p:cNvSpPr>
-            <a:spLocks noGrp="1"/>
-          </p:cNvSpPr>
-          <p:nvPr>
-            <p:ph type="body" idx="1"/>
-          </p:nvPr>
-        </p:nvSpPr>
-        <p:spPr/>
-        <p:txBody>
-          <a:bodyPr/>
-          <a:lstStyle/>
-          <a:p>
-            <a:r>
-              <a:rPr lang="en-US" dirty="0"/>
-              <a:t>Thank you, Father, and thank you all. I'm happy to take questions, and if there's time I can show the demo live on the screen.</a:t>
-            </a:r>
-            <a:endParaRPr lang="en-US" dirty="0"/>
-          </a:p>
-        </p:txBody>
-      </p:sp>
-      <p:sp>
-        <p:nvSpPr>
-          <p:cNvPr id="4" name="Slide Number Placeholder 3"/>
-          <p:cNvSpPr>
-            <a:spLocks noGrp="1"/>
-          </p:cNvSpPr>
-          <p:nvPr>
-            <p:ph type="sldNum" sz="quarter" idx="10"/>
-          </p:nvPr>
-        </p:nvSpPr>
-        <p:spPr/>
-        <p:txBody>
-          <a:bodyPr/>
-          <a:lstStyle/>
-          <a:p>
-            <a:fld id="{F7021451-1387-4CA6-816F-3879F97B5CBC}" type="slidenum">
-              <a:rPr lang="en-US"/>
-              <a:t>13</a:t>
             </a:fld>
             <a:endParaRPr lang="en-US"/>
           </a:p>
@@ -1018,7 +700,6 @@
 Our census is done on paper and has to be retyped. Family information lives in notebooks and spreadsheets kept by different people. When Father asks a simple pastoral question, like how many young people in a GKK still need Confirmation, someone has to count by hand. And families have to come to the office for every registration or certificate.
 On the right is the same work with the registry. Nothing about our pastoral work changes; we simply stop doing the paperwork twice.</a:t>
             </a:r>
-            <a:endParaRPr lang="en-US" dirty="0"/>
           </a:p>
         </p:txBody>
       </p:sp>
@@ -1108,7 +789,6 @@
 Families use it from their phones. The parish office uses it to check and keep the records. GKK leaders see their own GKK. And Father and this council get the numbers they need to plan.
 On top of that, the same system runs the parish website, so the Mass schedule, announcements and the bulletin are always in one place that the office can update without a web designer.</a:t>
             </a:r>
-            <a:endParaRPr lang="en-US" dirty="0"/>
           </a:p>
         </p:txBody>
       </p:sp>
@@ -1198,7 +878,6 @@
 A family registers from home in five short steps and gets a reference number straight away. During the census they don't fill in a new sheet: they open the parish website, type the reference number and the code printed on their census form, and confirm or correct what we have.
 They can also ask for certificates, the Anointing of the Sick, OCIA, or send a prayer request, each with its own reference number. Families without a phone can still do all of this at the office.</a:t>
             </a:r>
-            <a:endParaRPr lang="en-US" dirty="0"/>
           </a:p>
         </p:txBody>
       </p:sp>
@@ -1288,7 +967,6 @@
 New registrations wait until staff verify them. If a family registers twice, or two records look like the same person, the system flags it. Every certificate or sacrament request moves from Received to Released, so nothing gets forgotten, and staff get a notification on their phone when something new comes in.
 And if someone deletes a record by mistake, it can be restored for 30 days. There is also a log of who changed what.</a:t>
             </a:r>
-            <a:endParaRPr lang="en-US" dirty="0"/>
           </a:p>
         </p:txBody>
       </p:sp>
@@ -1378,7 +1056,6 @@
 Each leader signs in and sees only their own GKK. They have last year's list to tick off as families register, so it's obvious who hasn't been reached yet. They help families update online first, and print the pre-filled paper forms only for families who can't do it by phone.
 They can also keep their GKK's page on the parish website up to date: the chapel, photos, history and officers.</a:t>
             </a:r>
-            <a:endParaRPr lang="en-US" dirty="0"/>
           </a:p>
         </p:txBody>
       </p:sp>
@@ -1468,7 +1145,6 @@
 How many families does each GKK really have? Who still needs Baptism, First Communion or Confirmation, so catechists know whom to invite? Which couples could still have a church wedding? And after each census, how did each GKK change compared with the last one?
 These come out as ready-made reports that can be printed or exported to a spreadsheet for the diocese. The numbers on screen are sample data from the demo site, not our parish.</a:t>
             </a:r>
-            <a:endParaRPr lang="en-US" dirty="0"/>
           </a:p>
         </p:txBody>
       </p:sp>
@@ -1558,7 +1234,6 @@
 The office opens the census and sets the dates. Families update online with the code on their form, with help from their GKK leader. Paper is only the last resort, for families who can't go online, and the forms come out of the printer already filled in with what we know.
 Staff approve each update, and at the end we get results for every GKK, compared with the census before. Each member gets a clear status: active, inactive, moved away, deceased, or left the Church. And nothing in the registry changes until staff approve it.</a:t>
             </a:r>
-            <a:endParaRPr lang="en-US" dirty="0"/>
           </a:p>
         </p:txBody>
       </p:sp>
@@ -1648,7 +1323,6 @@
 Every staff member has their own login, and each login only sees what that role needs. A GKK leader sees only their own GKK, and that rule is enforced by the database itself, not just hidden on the screen. Nothing private ever appears on the public website.
 Every change is logged with who made it. There is an encrypted backup every week. And everything is set up under the parish's own Gmail account, so the parish, not any volunteer, owns the system and the data.</a:t>
             </a:r>
-            <a:endParaRPr lang="en-US" dirty="0"/>
           </a:p>
         </p:txBody>
       </p:sp>
@@ -1726,6 +1400,7 @@
         <a:solidFill>
           <a:schemeClr val="tx2"/>
         </a:solidFill>
+        <a:effectLst/>
       </p:bgPr>
     </p:bg>
     <p:spTree>
@@ -1745,9 +1420,11 @@
       <p:sp>
         <p:nvSpPr>
           <p:cNvPr id="2" name="Text 0"/>
-          <p:cNvSpPr/>
+          <p:cNvSpPr>
+            <a:spLocks noGrp="1"/>
+          </p:cNvSpPr>
           <p:nvPr>
-            <p:ph idx="100" type="title" hasCustomPrompt="1"/>
+            <p:ph type="title" idx="100" hasCustomPrompt="1"/>
           </p:nvPr>
         </p:nvSpPr>
         <p:spPr>
@@ -1764,7 +1441,7 @@
         <p:txBody>
           <a:bodyPr wrap="square" rtlCol="0"/>
           <a:lstStyle>
-            <a:lvl1pPr algn="l" indent="0" marL="0">
+            <a:lvl1pPr marL="0" indent="0" algn="l">
               <a:buNone/>
               <a:defRPr lang="en-US" sz="4000" b="1" dirty="0">
                 <a:solidFill>
@@ -1777,7 +1454,7 @@
             </a:lvl1pPr>
           </a:lstStyle>
           <a:p>
-            <a:pPr algn="l" indent="0" marL="0">
+            <a:pPr marL="0" indent="0" algn="l">
               <a:buNone/>
             </a:pPr>
             <a:endParaRPr lang="en-US" sz="4000" dirty="0"/>
@@ -1787,9 +1464,11 @@
       <p:sp>
         <p:nvSpPr>
           <p:cNvPr id="3" name="Text 0"/>
-          <p:cNvSpPr/>
+          <p:cNvSpPr>
+            <a:spLocks noGrp="1"/>
+          </p:cNvSpPr>
           <p:nvPr>
-            <p:ph idx="101" type="body" hasCustomPrompt="1"/>
+            <p:ph type="body" idx="101" hasCustomPrompt="1"/>
           </p:nvPr>
         </p:nvSpPr>
         <p:spPr>
@@ -1806,7 +1485,7 @@
         <p:txBody>
           <a:bodyPr wrap="square" rtlCol="0"/>
           <a:lstStyle>
-            <a:lvl1pPr algn="l" indent="0" marL="0">
+            <a:lvl1pPr marL="0" indent="0" algn="l">
               <a:buNone/>
               <a:defRPr lang="en-US" sz="1800" dirty="0">
                 <a:solidFill>
@@ -1816,7 +1495,7 @@
             </a:lvl1pPr>
           </a:lstStyle>
           <a:p>
-            <a:pPr algn="l" indent="0" marL="0">
+            <a:pPr marL="0" indent="0" algn="l">
               <a:buNone/>
             </a:pPr>
             <a:endParaRPr lang="en-US" sz="1800" dirty="0"/>
@@ -1839,6 +1518,7 @@
         <a:solidFill>
           <a:schemeClr val="bg1"/>
         </a:solidFill>
+        <a:effectLst/>
       </p:bgPr>
     </p:bg>
     <p:spTree>
@@ -1876,7 +1556,7 @@
           <a:bodyPr wrap="square" lIns="0" tIns="0" rIns="0" bIns="0" rtlCol="0" anchor="ctr"/>
           <a:lstStyle/>
           <a:p>
-            <a:pPr indent="0" marL="0">
+            <a:pPr marL="0" indent="0">
               <a:buNone/>
             </a:pPr>
             <a:r>
@@ -1894,9 +1574,11 @@
       <p:sp>
         <p:nvSpPr>
           <p:cNvPr id="3" name="Text 1"/>
-          <p:cNvSpPr/>
+          <p:cNvSpPr>
+            <a:spLocks noGrp="1"/>
+          </p:cNvSpPr>
           <p:nvPr>
-            <p:ph idx="101" type="title" hasCustomPrompt="1"/>
+            <p:ph type="title" idx="101" hasCustomPrompt="1"/>
           </p:nvPr>
         </p:nvSpPr>
         <p:spPr>
@@ -1913,7 +1595,7 @@
         <p:txBody>
           <a:bodyPr wrap="square" rtlCol="0"/>
           <a:lstStyle>
-            <a:lvl1pPr algn="l" indent="0" marL="0">
+            <a:lvl1pPr marL="0" indent="0" algn="l">
               <a:buNone/>
               <a:defRPr lang="en-US" sz="3200" b="1" dirty="0">
                 <a:solidFill>
@@ -1926,7 +1608,7 @@
             </a:lvl1pPr>
           </a:lstStyle>
           <a:p>
-            <a:pPr algn="l" indent="0" marL="0">
+            <a:pPr marL="0" indent="0" algn="l">
               <a:buNone/>
             </a:pPr>
             <a:endParaRPr lang="en-US" sz="3200" dirty="0"/>
@@ -1953,7 +1635,7 @@
           </a:prstGeom>
           <a:extLst>
             <a:ext uri="{C572A759-6A51-4108-AA02-DFA0A04FC94B}">
-              <ma14:wrappingTextBoxFlag xmlns:ma14="http://schemas.microsoft.com/office/mac/drawingml/2011/main" val="0"/>
+              <ma14:wrappingTextBoxFlag xmlns:ma14="http://schemas.microsoft.com/office/mac/drawingml/2011/main" xmlns="" val="0"/>
             </a:ext>
           </a:extLst>
         </p:spPr>
@@ -1971,8 +1653,8 @@
           <a:p>
             <a:pPr algn="r"/>
             <a:fld id="{F7021451-1387-4CA6-816F-3879F97B5CBC}" type="slidenum">
-              <a:rPr b="0" lang="en-US"/>
-              <a:t>1003</a:t>
+              <a:rPr lang="en-US" b="0"/>
+              <a:t>‹#›</a:t>
             </a:fld>
             <a:endParaRPr lang="en-US"/>
           </a:p>
@@ -1994,6 +1676,7 @@
         <a:solidFill>
           <a:schemeClr val="tx2"/>
         </a:solidFill>
+        <a:effectLst/>
       </p:bgPr>
     </p:bg>
     <p:spTree>
@@ -2013,9 +1696,11 @@
       <p:sp>
         <p:nvSpPr>
           <p:cNvPr id="2" name="Text 0"/>
-          <p:cNvSpPr/>
+          <p:cNvSpPr>
+            <a:spLocks noGrp="1"/>
+          </p:cNvSpPr>
           <p:nvPr>
-            <p:ph idx="100" type="title" hasCustomPrompt="1"/>
+            <p:ph type="title" idx="100" hasCustomPrompt="1"/>
           </p:nvPr>
         </p:nvSpPr>
         <p:spPr>
@@ -2032,7 +1717,7 @@
         <p:txBody>
           <a:bodyPr wrap="square" rtlCol="0"/>
           <a:lstStyle>
-            <a:lvl1pPr algn="l" indent="0" marL="0">
+            <a:lvl1pPr marL="0" indent="0" algn="l">
               <a:buNone/>
               <a:defRPr lang="en-US" sz="3200" b="1" dirty="0">
                 <a:solidFill>
@@ -2045,7 +1730,7 @@
             </a:lvl1pPr>
           </a:lstStyle>
           <a:p>
-            <a:pPr algn="l" indent="0" marL="0">
+            <a:pPr marL="0" indent="0" algn="l">
               <a:buNone/>
             </a:pPr>
             <a:endParaRPr lang="en-US" sz="3200" dirty="0"/>
@@ -2072,7 +1757,7 @@
           </a:prstGeom>
           <a:extLst>
             <a:ext uri="{C572A759-6A51-4108-AA02-DFA0A04FC94B}">
-              <ma14:wrappingTextBoxFlag xmlns:ma14="http://schemas.microsoft.com/office/mac/drawingml/2011/main" val="0"/>
+              <ma14:wrappingTextBoxFlag xmlns:ma14="http://schemas.microsoft.com/office/mac/drawingml/2011/main" xmlns="" val="0"/>
             </a:ext>
           </a:extLst>
         </p:spPr>
@@ -2090,8 +1775,8 @@
           <a:p>
             <a:pPr algn="r"/>
             <a:fld id="{F7021451-1387-4CA6-816F-3879F97B5CBC}" type="slidenum">
-              <a:rPr b="0" lang="en-US"/>
-              <a:t>1004</a:t>
+              <a:rPr lang="en-US" b="0"/>
+              <a:t>‹#›</a:t>
             </a:fld>
             <a:endParaRPr lang="en-US"/>
           </a:p>
@@ -2108,6 +1793,11 @@
 <file path=ppt/slideMasters/slideMaster1.xml><?xml version="1.0" encoding="utf-8"?>
 <p:sldMaster xmlns:a="http://schemas.openxmlformats.org/drawingml/2006/main" xmlns:r="http://schemas.openxmlformats.org/officeDocument/2006/relationships" xmlns:p="http://schemas.openxmlformats.org/presentationml/2006/main">
   <p:cSld>
+    <p:bg>
+      <p:bgRef idx="1001">
+        <a:schemeClr val="bg1"/>
+      </p:bgRef>
+    </p:bg>
     <p:spTree>
       <p:nvGrpSpPr>
         <p:cNvPr id="1" name=""/>
@@ -2142,7 +1832,7 @@
           </a:prstGeom>
           <a:extLst>
             <a:ext uri="{C572A759-6A51-4108-AA02-DFA0A04FC94B}">
-              <ma14:wrappingTextBoxFlag xmlns:ma14="http://schemas.microsoft.com/office/mac/drawingml/2011/main" val="0"/>
+              <ma14:wrappingTextBoxFlag xmlns:ma14="http://schemas.microsoft.com/office/mac/drawingml/2011/main" xmlns="" val="0"/>
             </a:ext>
           </a:extLst>
         </p:spPr>
@@ -2160,8 +1850,8 @@
           <a:p>
             <a:pPr algn="r"/>
             <a:fld id="{F7021451-1387-4CA6-816F-3879F97B5CBC}" type="slidenum">
-              <a:rPr b="0" lang="en-US"/>
-              <a:t>null</a:t>
+              <a:rPr lang="en-US" b="0"/>
+              <a:t>‹#›</a:t>
             </a:fld>
             <a:endParaRPr lang="en-US"/>
           </a:p>
@@ -2455,7 +2145,7 @@
         </p:nvSpPr>
         <p:spPr>
           <a:xfrm>
-            <a:off x="548640" y="1234440"/>
+            <a:off x="729241" y="219841"/>
             <a:ext cx="5486400" cy="320040"/>
           </a:xfrm>
           <a:prstGeom prst="rect">
@@ -2468,160 +2158,44 @@
           <a:bodyPr wrap="square" lIns="0" tIns="0" rIns="0" bIns="0" rtlCol="0" anchor="t"/>
           <a:lstStyle/>
           <a:p>
-            <a:pPr indent="0" marL="0">
-              <a:buNone/>
-            </a:pPr>
-            <a:r>
-              <a:rPr lang="en-US" sz="1300" b="1" spc="200" kern="0" dirty="0">
+            <a:pPr marL="0" indent="0">
+              <a:buNone/>
+            </a:pPr>
+            <a:r>
+              <a:rPr lang="en-US" sz="1300" b="1" kern="0" spc="200" dirty="0">
                 <a:solidFill>
                   <a:schemeClr val="accent2"/>
                 </a:solidFill>
               </a:rPr>
-              <a:t>PARISH PASTORAL COUNCIL  ·  OCTOBER 2026</a:t>
+              <a:t>Parish Members Registry &amp; Census Presentation</a:t>
             </a:r>
             <a:endParaRPr lang="en-US" sz="1300" dirty="0"/>
-          </a:p>
-        </p:txBody>
-      </p:sp>
-      <p:sp>
-        <p:nvSpPr>
-          <p:cNvPr id="3" name="Text 0"/>
-          <p:cNvSpPr/>
-          <p:nvPr>
-            <p:ph idx="100" type="title" hasCustomPrompt="1"/>
-          </p:nvPr>
-        </p:nvSpPr>
-        <p:spPr>
-          <a:xfrm>
-            <a:off x="548640" y="1737360"/>
-            <a:ext cx="5486400" cy="1554480"/>
-          </a:xfrm>
-          <a:prstGeom prst="rect">
-            <a:avLst/>
-          </a:prstGeom>
-          <a:noFill/>
-          <a:ln/>
-        </p:spPr>
-        <p:txBody>
-          <a:bodyPr wrap="square" lIns="0" tIns="0" rIns="0" bIns="0" rtlCol="0" anchor="t"/>
-          <a:lstStyle/>
-          <a:p>
-            <a:pPr algn="l" indent="0" marL="0">
-              <a:buNone/>
-            </a:pPr>
-            <a:r>
-              <a:rPr lang="en-US" sz="4000" b="1" dirty="0">
-                <a:solidFill>
-                  <a:schemeClr val="bg1"/>
-                </a:solidFill>
-                <a:latin typeface="+mj-lt" pitchFamily="34" charset="0"/>
-                <a:ea typeface="+mj-lt" pitchFamily="34" charset="-122"/>
-                <a:cs typeface="+mj-lt" pitchFamily="34" charset="-120"/>
-              </a:rPr>
-              <a:t>Every family known, every family cared for</a:t>
-            </a:r>
-            <a:endParaRPr lang="en-US" sz="4000" dirty="0"/>
-          </a:p>
-        </p:txBody>
-      </p:sp>
-      <p:sp>
-        <p:nvSpPr>
-          <p:cNvPr id="4" name="Text 0"/>
-          <p:cNvSpPr/>
-          <p:nvPr>
-            <p:ph idx="101" type="body" hasCustomPrompt="1"/>
-          </p:nvPr>
-        </p:nvSpPr>
-        <p:spPr>
-          <a:xfrm>
-            <a:off x="548640" y="3429000"/>
-            <a:ext cx="5486400" cy="1280160"/>
-          </a:xfrm>
-          <a:prstGeom prst="rect">
-            <a:avLst/>
-          </a:prstGeom>
-          <a:noFill/>
-          <a:ln/>
-        </p:spPr>
-        <p:txBody>
-          <a:bodyPr wrap="square" lIns="0" tIns="0" rIns="0" bIns="0" rtlCol="0" anchor="t"/>
-          <a:lstStyle/>
-          <a:p>
-            <a:pPr algn="l" indent="0" marL="0">
-              <a:buNone/>
-            </a:pPr>
-            <a:r>
-              <a:rPr lang="en-US" sz="1800" dirty="0">
-                <a:solidFill>
-                  <a:schemeClr val="bg2"/>
-                </a:solidFill>
-              </a:rPr>
-              <a:t>The Parish Members Registry and Website for Our Lady of Guadalupe Quasi-Parish, Mua-an</a:t>
-            </a:r>
-            <a:endParaRPr lang="en-US" sz="1800" dirty="0"/>
           </a:p>
         </p:txBody>
       </p:sp>
       <p:pic>
         <p:nvPicPr>
-          <p:cNvPr id="5" name="Parish photo" descr="C:\Users\Dave\AppData\Local\Temp\claude\E--DEVELOPER--WEB--PARISH-MEMBERS-REGISTRY\9cfa56b2-76b0-4da3-8bb7-a6a7d55b9d8c\scratchpad\img\aerial.png">    </p:cNvPr>
+          <p:cNvPr id="5" name="Parish photo"/>
           <p:cNvPicPr>
             <a:picLocks noChangeAspect="1"/>
           </p:cNvPicPr>
           <p:nvPr/>
         </p:nvPicPr>
         <p:blipFill>
-          <a:blip r:embed="rId1"/>
-          <a:stretch>
-            <a:fillRect/>
-          </a:stretch>
+          <a:blip r:embed="rId3"/>
+          <a:srcRect/>
+          <a:stretch/>
         </p:blipFill>
         <p:spPr>
           <a:xfrm>
-            <a:off x="6355080" y="1463040"/>
-            <a:ext cx="5284791" cy="3913632"/>
+            <a:off x="729241" y="539881"/>
+            <a:ext cx="10593936" cy="6249116"/>
           </a:xfrm>
           <a:prstGeom prst="rect">
             <a:avLst/>
           </a:prstGeom>
         </p:spPr>
       </p:pic>
-      <p:sp>
-        <p:nvSpPr>
-          <p:cNvPr id="6" name="Text 3"/>
-          <p:cNvSpPr txBox="1"/>
-          <p:nvPr/>
-        </p:nvSpPr>
-        <p:spPr>
-          <a:xfrm>
-            <a:off x="6355080" y="5468112"/>
-            <a:ext cx="5285232" cy="256032"/>
-          </a:xfrm>
-          <a:prstGeom prst="rect">
-            <a:avLst/>
-          </a:prstGeom>
-          <a:noFill/>
-          <a:ln/>
-        </p:spPr>
-        <p:txBody>
-          <a:bodyPr wrap="square" lIns="0" tIns="0" rIns="0" bIns="0" rtlCol="0" anchor="t"/>
-          <a:lstStyle/>
-          <a:p>
-            <a:pPr algn="r" indent="0" marL="0">
-              <a:buNone/>
-            </a:pPr>
-            <a:r>
-              <a:rPr lang="en-US" sz="1000" i="1" dirty="0">
-                <a:solidFill>
-                  <a:schemeClr val="accent4"/>
-                </a:solidFill>
-              </a:rPr>
-              <a:t>Our Lady of Guadalupe Quasi-Parish, Brgy. Mua-an, Kidapawan City</a:t>
-            </a:r>
-            <a:endParaRPr lang="en-US" sz="1000" dirty="0"/>
-          </a:p>
-        </p:txBody>
-      </p:sp>
     </p:spTree>
   </p:cSld>
   <p:clrMapOvr>
@@ -2650,9 +2224,11 @@
       <p:sp>
         <p:nvSpPr>
           <p:cNvPr id="2" name="Text 1"/>
-          <p:cNvSpPr/>
+          <p:cNvSpPr>
+            <a:spLocks noGrp="1"/>
+          </p:cNvSpPr>
           <p:nvPr>
-            <p:ph idx="101" type="title" hasCustomPrompt="1"/>
+            <p:ph type="title" idx="101" hasCustomPrompt="1"/>
           </p:nvPr>
         </p:nvSpPr>
         <p:spPr>
@@ -2670,7 +2246,7 @@
           <a:bodyPr wrap="square" lIns="0" tIns="0" rIns="0" bIns="0" rtlCol="0" anchor="ctr"/>
           <a:lstStyle/>
           <a:p>
-            <a:pPr algn="l" indent="0" marL="0">
+            <a:pPr marL="0" indent="0" algn="l">
               <a:buNone/>
             </a:pPr>
             <a:r>
@@ -2731,7 +2307,7 @@
           <a:bodyPr wrap="square" lIns="0" tIns="0" rIns="0" bIns="0" rtlCol="0" anchor="ctr"/>
           <a:lstStyle/>
           <a:p>
-            <a:pPr indent="0" marL="0">
+            <a:pPr marL="0" indent="0">
               <a:buNone/>
             </a:pPr>
             <a:r>
@@ -2770,7 +2346,7 @@
           <a:bodyPr wrap="square" lIns="0" tIns="0" rIns="0" bIns="0" rtlCol="0" anchor="t"/>
           <a:lstStyle/>
           <a:p>
-            <a:pPr indent="0" marL="0">
+            <a:pPr marL="0" indent="0">
               <a:buNone/>
             </a:pPr>
             <a:r>
@@ -2806,7 +2382,7 @@
           <a:bodyPr wrap="square" lIns="0" tIns="0" rIns="0" bIns="0" rtlCol="0" anchor="t"/>
           <a:lstStyle/>
           <a:p>
-            <a:pPr indent="0" marL="0">
+            <a:pPr marL="0" indent="0">
               <a:buNone/>
             </a:pPr>
             <a:r>
@@ -2842,7 +2418,7 @@
           <a:bodyPr wrap="square" lIns="0" tIns="0" rIns="0" bIns="0" rtlCol="0" anchor="t"/>
           <a:lstStyle/>
           <a:p>
-            <a:pPr indent="0" marL="0">
+            <a:pPr marL="0" indent="0">
               <a:buNone/>
             </a:pPr>
             <a:r>
@@ -2882,239 +2458,7 @@
       </p:sp>
       <p:pic>
         <p:nvPicPr>
-          <p:cNvPr id="9" name="Kept awake automatically icon" descr="preencoded.png">    </p:cNvPr>
-          <p:cNvPicPr>
-            <a:picLocks noChangeAspect="1"/>
-          </p:cNvPicPr>
-          <p:nvPr/>
-        </p:nvPicPr>
-        <p:blipFill>
-          <a:blip r:embed="rId1"/>
-          <a:stretch>
-            <a:fillRect/>
-          </a:stretch>
-        </p:blipFill>
-        <p:spPr>
-          <a:xfrm>
-            <a:off x="5097780" y="2171700"/>
-            <a:ext cx="228600" cy="228600"/>
-          </a:xfrm>
-          <a:prstGeom prst="rect">
-            <a:avLst/>
-          </a:prstGeom>
-        </p:spPr>
-      </p:pic>
-      <p:sp>
-        <p:nvSpPr>
-          <p:cNvPr id="10" name="Text 7"/>
-          <p:cNvSpPr txBox="1"/>
-          <p:nvPr/>
-        </p:nvSpPr>
-        <p:spPr>
-          <a:xfrm>
-            <a:off x="5623560" y="2020824"/>
-            <a:ext cx="6019495" cy="329184"/>
-          </a:xfrm>
-          <a:prstGeom prst="rect">
-            <a:avLst/>
-          </a:prstGeom>
-          <a:noFill/>
-          <a:ln/>
-        </p:spPr>
-        <p:txBody>
-          <a:bodyPr wrap="square" lIns="0" tIns="0" rIns="0" bIns="0" rtlCol="0" anchor="t"/>
-          <a:lstStyle/>
-          <a:p>
-            <a:pPr indent="0" marL="0">
-              <a:buNone/>
-            </a:pPr>
-            <a:r>
-              <a:rPr lang="en-US" sz="1600" b="1" dirty="0">
-                <a:solidFill>
-                  <a:schemeClr val="tx2"/>
-                </a:solidFill>
-              </a:rPr>
-              <a:t>Kept awake automatically</a:t>
-            </a:r>
-            <a:endParaRPr lang="en-US" sz="1600" dirty="0"/>
-          </a:p>
-        </p:txBody>
-      </p:sp>
-      <p:sp>
-        <p:nvSpPr>
-          <p:cNvPr id="11" name="Text 8"/>
-          <p:cNvSpPr txBox="1"/>
-          <p:nvPr/>
-        </p:nvSpPr>
-        <p:spPr>
-          <a:xfrm>
-            <a:off x="5623560" y="2350008"/>
-            <a:ext cx="6019495" cy="548640"/>
-          </a:xfrm>
-          <a:prstGeom prst="rect">
-            <a:avLst/>
-          </a:prstGeom>
-          <a:noFill/>
-          <a:ln/>
-        </p:spPr>
-        <p:txBody>
-          <a:bodyPr wrap="square" lIns="0" tIns="0" rIns="0" bIns="0" rtlCol="0" anchor="t"/>
-          <a:lstStyle/>
-          <a:p>
-            <a:pPr indent="0" marL="0">
-              <a:buNone/>
-            </a:pPr>
-            <a:r>
-              <a:rPr lang="en-US" sz="1400" dirty="0">
-                <a:solidFill>
-                  <a:schemeClr val="tx1"/>
-                </a:solidFill>
-              </a:rPr>
-              <a:t>The free database pauses after a week unused; a check every 3 days prevents it.</a:t>
-            </a:r>
-            <a:endParaRPr lang="en-US" sz="1400" dirty="0"/>
-          </a:p>
-        </p:txBody>
-      </p:sp>
-      <p:sp>
-        <p:nvSpPr>
-          <p:cNvPr id="12" name="No paid support circle"/>
-          <p:cNvSpPr/>
-          <p:nvPr/>
-        </p:nvSpPr>
-        <p:spPr>
-          <a:xfrm>
-            <a:off x="4983480" y="2990088"/>
-            <a:ext cx="457200" cy="457200"/>
-          </a:xfrm>
-          <a:prstGeom prst="ellipse">
-            <a:avLst/>
-          </a:prstGeom>
-          <a:solidFill>
-            <a:schemeClr val="accent2"/>
-          </a:solidFill>
-          <a:ln/>
-        </p:spPr>
-      </p:sp>
-      <p:pic>
-        <p:nvPicPr>
-          <p:cNvPr id="13" name="No paid support icon" descr="preencoded.png">    </p:cNvPr>
-          <p:cNvPicPr>
-            <a:picLocks noChangeAspect="1"/>
-          </p:cNvPicPr>
-          <p:nvPr/>
-        </p:nvPicPr>
-        <p:blipFill>
-          <a:blip r:embed="rId2"/>
-          <a:stretch>
-            <a:fillRect/>
-          </a:stretch>
-        </p:blipFill>
-        <p:spPr>
-          <a:xfrm>
-            <a:off x="5097780" y="3104388"/>
-            <a:ext cx="228600" cy="228600"/>
-          </a:xfrm>
-          <a:prstGeom prst="rect">
-            <a:avLst/>
-          </a:prstGeom>
-        </p:spPr>
-      </p:pic>
-      <p:sp>
-        <p:nvSpPr>
-          <p:cNvPr id="14" name="Text 10"/>
-          <p:cNvSpPr txBox="1"/>
-          <p:nvPr/>
-        </p:nvSpPr>
-        <p:spPr>
-          <a:xfrm>
-            <a:off x="5623560" y="2953512"/>
-            <a:ext cx="6019495" cy="329184"/>
-          </a:xfrm>
-          <a:prstGeom prst="rect">
-            <a:avLst/>
-          </a:prstGeom>
-          <a:noFill/>
-          <a:ln/>
-        </p:spPr>
-        <p:txBody>
-          <a:bodyPr wrap="square" lIns="0" tIns="0" rIns="0" bIns="0" rtlCol="0" anchor="t"/>
-          <a:lstStyle/>
-          <a:p>
-            <a:pPr indent="0" marL="0">
-              <a:buNone/>
-            </a:pPr>
-            <a:r>
-              <a:rPr lang="en-US" sz="1600" b="1" dirty="0">
-                <a:solidFill>
-                  <a:schemeClr val="tx2"/>
-                </a:solidFill>
-              </a:rPr>
-              <a:t>No paid support</a:t>
-            </a:r>
-            <a:endParaRPr lang="en-US" sz="1600" dirty="0"/>
-          </a:p>
-        </p:txBody>
-      </p:sp>
-      <p:sp>
-        <p:nvSpPr>
-          <p:cNvPr id="15" name="Text 11"/>
-          <p:cNvSpPr txBox="1"/>
-          <p:nvPr/>
-        </p:nvSpPr>
-        <p:spPr>
-          <a:xfrm>
-            <a:off x="5623560" y="3282696"/>
-            <a:ext cx="6019495" cy="548640"/>
-          </a:xfrm>
-          <a:prstGeom prst="rect">
-            <a:avLst/>
-          </a:prstGeom>
-          <a:noFill/>
-          <a:ln/>
-        </p:spPr>
-        <p:txBody>
-          <a:bodyPr wrap="square" lIns="0" tIns="0" rIns="0" bIns="0" rtlCol="0" anchor="t"/>
-          <a:lstStyle/>
-          <a:p>
-            <a:pPr indent="0" marL="0">
-              <a:buNone/>
-            </a:pPr>
-            <a:r>
-              <a:rPr lang="en-US" sz="1400" dirty="0">
-                <a:solidFill>
-                  <a:schemeClr val="tx1"/>
-                </a:solidFill>
-              </a:rPr>
-              <a:t>Help comes from the providers’ communities, and our weekly backups protect the data.</a:t>
-            </a:r>
-            <a:endParaRPr lang="en-US" sz="1400" dirty="0"/>
-          </a:p>
-        </p:txBody>
-      </p:sp>
-      <p:sp>
-        <p:nvSpPr>
-          <p:cNvPr id="16" name="If we ever outgrow it circle"/>
-          <p:cNvSpPr/>
-          <p:nvPr/>
-        </p:nvSpPr>
-        <p:spPr>
-          <a:xfrm>
-            <a:off x="4983480" y="3922776"/>
-            <a:ext cx="457200" cy="457200"/>
-          </a:xfrm>
-          <a:prstGeom prst="ellipse">
-            <a:avLst/>
-          </a:prstGeom>
-          <a:solidFill>
-            <a:schemeClr val="accent1"/>
-          </a:solidFill>
-          <a:ln/>
-        </p:spPr>
-      </p:sp>
-      <p:pic>
-        <p:nvPicPr>
-          <p:cNvPr id="17" name="If we ever outgrow it icon" descr="preencoded.png">    </p:cNvPr>
+          <p:cNvPr id="9" name="Kept awake automatically icon" descr="preencoded.png"/>
           <p:cNvPicPr>
             <a:picLocks noChangeAspect="1"/>
           </p:cNvPicPr>
@@ -3128,7 +2472,7 @@
         </p:blipFill>
         <p:spPr>
           <a:xfrm>
-            <a:off x="5097780" y="4037076"/>
+            <a:off x="5097780" y="2171700"/>
             <a:ext cx="228600" cy="228600"/>
           </a:xfrm>
           <a:prstGeom prst="rect">
@@ -3138,13 +2482,13 @@
       </p:pic>
       <p:sp>
         <p:nvSpPr>
-          <p:cNvPr id="18" name="Text 13"/>
+          <p:cNvPr id="10" name="Text 7"/>
           <p:cNvSpPr txBox="1"/>
           <p:nvPr/>
         </p:nvSpPr>
         <p:spPr>
           <a:xfrm>
-            <a:off x="5623560" y="3886200"/>
+            <a:off x="5623560" y="2020824"/>
             <a:ext cx="6019495" cy="329184"/>
           </a:xfrm>
           <a:prstGeom prst="rect">
@@ -3157,7 +2501,7 @@
           <a:bodyPr wrap="square" lIns="0" tIns="0" rIns="0" bIns="0" rtlCol="0" anchor="t"/>
           <a:lstStyle/>
           <a:p>
-            <a:pPr indent="0" marL="0">
+            <a:pPr marL="0" indent="0">
               <a:buNone/>
             </a:pPr>
             <a:r>
@@ -3166,7 +2510,7 @@
                   <a:schemeClr val="tx2"/>
                 </a:solidFill>
               </a:rPr>
-              <a:t>If we ever outgrow it</a:t>
+              <a:t>Kept awake automatically</a:t>
             </a:r>
             <a:endParaRPr lang="en-US" sz="1600" dirty="0"/>
           </a:p>
@@ -3174,13 +2518,13 @@
       </p:sp>
       <p:sp>
         <p:nvSpPr>
-          <p:cNvPr id="19" name="Text 14"/>
+          <p:cNvPr id="11" name="Text 8"/>
           <p:cNvSpPr txBox="1"/>
           <p:nvPr/>
         </p:nvSpPr>
         <p:spPr>
           <a:xfrm>
-            <a:off x="5623560" y="4215384"/>
+            <a:off x="5623560" y="2350008"/>
             <a:ext cx="6019495" cy="548640"/>
           </a:xfrm>
           <a:prstGeom prst="rect">
@@ -3193,7 +2537,7 @@
           <a:bodyPr wrap="square" lIns="0" tIns="0" rIns="0" bIns="0" rtlCol="0" anchor="t"/>
           <a:lstStyle/>
           <a:p>
-            <a:pPr indent="0" marL="0">
+            <a:pPr marL="0" indent="0">
               <a:buNone/>
             </a:pPr>
             <a:r>
@@ -3202,7 +2546,7 @@
                   <a:schemeClr val="tx1"/>
                 </a:solidFill>
               </a:rPr>
-              <a:t>Supabase Pro is US$25 a month and Vercel Pro US$20 a month. Not needed today.</a:t>
+              <a:t>The free database pauses after a week unused; a check every 3 days prevents it.</a:t>
             </a:r>
             <a:endParaRPr lang="en-US" sz="1400" dirty="0"/>
           </a:p>
@@ -3210,38 +2554,14 @@
       </p:sp>
       <p:sp>
         <p:nvSpPr>
-          <p:cNvPr id="20" name="Domain option"/>
+          <p:cNvPr id="12" name="No paid support circle"/>
           <p:cNvSpPr/>
           <p:nvPr/>
         </p:nvSpPr>
         <p:spPr>
           <a:xfrm>
-            <a:off x="4983480" y="4983480"/>
-            <a:ext cx="6659575" cy="1051560"/>
-          </a:xfrm>
-          <a:prstGeom prst="roundRect">
-            <a:avLst>
-              <a:gd name="adj" fmla="val 10435"/>
-            </a:avLst>
-          </a:prstGeom>
-          <a:solidFill>
-            <a:schemeClr val="accent2">
-              <a:alpha val="18000"/>
-            </a:schemeClr>
-          </a:solidFill>
-          <a:ln/>
-        </p:spPr>
-      </p:sp>
-      <p:sp>
-        <p:nvSpPr>
-          <p:cNvPr id="21" name="Domain circle"/>
-          <p:cNvSpPr/>
-          <p:nvPr/>
-        </p:nvSpPr>
-        <p:spPr>
-          <a:xfrm>
-            <a:off x="5212080" y="5248656"/>
-            <a:ext cx="512064" cy="512064"/>
+            <a:off x="4983480" y="2990088"/>
+            <a:ext cx="457200" cy="457200"/>
           </a:xfrm>
           <a:prstGeom prst="ellipse">
             <a:avLst/>
@@ -3254,7 +2574,7 @@
       </p:sp>
       <p:pic>
         <p:nvPicPr>
-          <p:cNvPr id="22" name="Domain icon" descr="preencoded.png">    </p:cNvPr>
+          <p:cNvPr id="13" name="No paid support icon" descr="preencoded.png"/>
           <p:cNvPicPr>
             <a:picLocks noChangeAspect="1"/>
           </p:cNvPicPr>
@@ -3268,6 +2588,262 @@
         </p:blipFill>
         <p:spPr>
           <a:xfrm>
+            <a:off x="5097780" y="3104388"/>
+            <a:ext cx="228600" cy="228600"/>
+          </a:xfrm>
+          <a:prstGeom prst="rect">
+            <a:avLst/>
+          </a:prstGeom>
+        </p:spPr>
+      </p:pic>
+      <p:sp>
+        <p:nvSpPr>
+          <p:cNvPr id="14" name="Text 10"/>
+          <p:cNvSpPr txBox="1"/>
+          <p:nvPr/>
+        </p:nvSpPr>
+        <p:spPr>
+          <a:xfrm>
+            <a:off x="5623560" y="2953512"/>
+            <a:ext cx="6019495" cy="329184"/>
+          </a:xfrm>
+          <a:prstGeom prst="rect">
+            <a:avLst/>
+          </a:prstGeom>
+          <a:noFill/>
+          <a:ln/>
+        </p:spPr>
+        <p:txBody>
+          <a:bodyPr wrap="square" lIns="0" tIns="0" rIns="0" bIns="0" rtlCol="0" anchor="t"/>
+          <a:lstStyle/>
+          <a:p>
+            <a:pPr marL="0" indent="0">
+              <a:buNone/>
+            </a:pPr>
+            <a:r>
+              <a:rPr lang="en-US" sz="1600" b="1" dirty="0">
+                <a:solidFill>
+                  <a:schemeClr val="tx2"/>
+                </a:solidFill>
+              </a:rPr>
+              <a:t>No paid support</a:t>
+            </a:r>
+            <a:endParaRPr lang="en-US" sz="1600" dirty="0"/>
+          </a:p>
+        </p:txBody>
+      </p:sp>
+      <p:sp>
+        <p:nvSpPr>
+          <p:cNvPr id="15" name="Text 11"/>
+          <p:cNvSpPr txBox="1"/>
+          <p:nvPr/>
+        </p:nvSpPr>
+        <p:spPr>
+          <a:xfrm>
+            <a:off x="5623560" y="3282696"/>
+            <a:ext cx="6019495" cy="548640"/>
+          </a:xfrm>
+          <a:prstGeom prst="rect">
+            <a:avLst/>
+          </a:prstGeom>
+          <a:noFill/>
+          <a:ln/>
+        </p:spPr>
+        <p:txBody>
+          <a:bodyPr wrap="square" lIns="0" tIns="0" rIns="0" bIns="0" rtlCol="0" anchor="t"/>
+          <a:lstStyle/>
+          <a:p>
+            <a:pPr marL="0" indent="0">
+              <a:buNone/>
+            </a:pPr>
+            <a:r>
+              <a:rPr lang="en-US" sz="1400" dirty="0">
+                <a:solidFill>
+                  <a:schemeClr val="tx1"/>
+                </a:solidFill>
+              </a:rPr>
+              <a:t>Help comes from the providers’ communities, and our weekly backups protect the data.</a:t>
+            </a:r>
+            <a:endParaRPr lang="en-US" sz="1400" dirty="0"/>
+          </a:p>
+        </p:txBody>
+      </p:sp>
+      <p:sp>
+        <p:nvSpPr>
+          <p:cNvPr id="16" name="If we ever outgrow it circle"/>
+          <p:cNvSpPr/>
+          <p:nvPr/>
+        </p:nvSpPr>
+        <p:spPr>
+          <a:xfrm>
+            <a:off x="4983480" y="3922776"/>
+            <a:ext cx="457200" cy="457200"/>
+          </a:xfrm>
+          <a:prstGeom prst="ellipse">
+            <a:avLst/>
+          </a:prstGeom>
+          <a:solidFill>
+            <a:schemeClr val="accent1"/>
+          </a:solidFill>
+          <a:ln/>
+        </p:spPr>
+      </p:sp>
+      <p:pic>
+        <p:nvPicPr>
+          <p:cNvPr id="17" name="If we ever outgrow it icon" descr="preencoded.png"/>
+          <p:cNvPicPr>
+            <a:picLocks noChangeAspect="1"/>
+          </p:cNvPicPr>
+          <p:nvPr/>
+        </p:nvPicPr>
+        <p:blipFill>
+          <a:blip r:embed="rId5"/>
+          <a:stretch>
+            <a:fillRect/>
+          </a:stretch>
+        </p:blipFill>
+        <p:spPr>
+          <a:xfrm>
+            <a:off x="5097780" y="4037076"/>
+            <a:ext cx="228600" cy="228600"/>
+          </a:xfrm>
+          <a:prstGeom prst="rect">
+            <a:avLst/>
+          </a:prstGeom>
+        </p:spPr>
+      </p:pic>
+      <p:sp>
+        <p:nvSpPr>
+          <p:cNvPr id="18" name="Text 13"/>
+          <p:cNvSpPr txBox="1"/>
+          <p:nvPr/>
+        </p:nvSpPr>
+        <p:spPr>
+          <a:xfrm>
+            <a:off x="5623560" y="3886200"/>
+            <a:ext cx="6019495" cy="329184"/>
+          </a:xfrm>
+          <a:prstGeom prst="rect">
+            <a:avLst/>
+          </a:prstGeom>
+          <a:noFill/>
+          <a:ln/>
+        </p:spPr>
+        <p:txBody>
+          <a:bodyPr wrap="square" lIns="0" tIns="0" rIns="0" bIns="0" rtlCol="0" anchor="t"/>
+          <a:lstStyle/>
+          <a:p>
+            <a:pPr marL="0" indent="0">
+              <a:buNone/>
+            </a:pPr>
+            <a:r>
+              <a:rPr lang="en-US" sz="1600" b="1" dirty="0">
+                <a:solidFill>
+                  <a:schemeClr val="tx2"/>
+                </a:solidFill>
+              </a:rPr>
+              <a:t>If we ever outgrow it</a:t>
+            </a:r>
+            <a:endParaRPr lang="en-US" sz="1600" dirty="0"/>
+          </a:p>
+        </p:txBody>
+      </p:sp>
+      <p:sp>
+        <p:nvSpPr>
+          <p:cNvPr id="19" name="Text 14"/>
+          <p:cNvSpPr txBox="1"/>
+          <p:nvPr/>
+        </p:nvSpPr>
+        <p:spPr>
+          <a:xfrm>
+            <a:off x="5623560" y="4215384"/>
+            <a:ext cx="6019495" cy="548640"/>
+          </a:xfrm>
+          <a:prstGeom prst="rect">
+            <a:avLst/>
+          </a:prstGeom>
+          <a:noFill/>
+          <a:ln/>
+        </p:spPr>
+        <p:txBody>
+          <a:bodyPr wrap="square" lIns="0" tIns="0" rIns="0" bIns="0" rtlCol="0" anchor="t"/>
+          <a:lstStyle/>
+          <a:p>
+            <a:pPr marL="0" indent="0">
+              <a:buNone/>
+            </a:pPr>
+            <a:r>
+              <a:rPr lang="en-US" sz="1400" dirty="0">
+                <a:solidFill>
+                  <a:schemeClr val="tx1"/>
+                </a:solidFill>
+              </a:rPr>
+              <a:t>Supabase Pro is US$25 a month and Vercel Pro US$20 a month. Not needed today.</a:t>
+            </a:r>
+            <a:endParaRPr lang="en-US" sz="1400" dirty="0"/>
+          </a:p>
+        </p:txBody>
+      </p:sp>
+      <p:sp>
+        <p:nvSpPr>
+          <p:cNvPr id="20" name="Domain option"/>
+          <p:cNvSpPr/>
+          <p:nvPr/>
+        </p:nvSpPr>
+        <p:spPr>
+          <a:xfrm>
+            <a:off x="4983480" y="4983480"/>
+            <a:ext cx="6659575" cy="1051560"/>
+          </a:xfrm>
+          <a:prstGeom prst="roundRect">
+            <a:avLst>
+              <a:gd name="adj" fmla="val 10435"/>
+            </a:avLst>
+          </a:prstGeom>
+          <a:solidFill>
+            <a:schemeClr val="accent2">
+              <a:alpha val="18000"/>
+            </a:schemeClr>
+          </a:solidFill>
+          <a:ln/>
+        </p:spPr>
+      </p:sp>
+      <p:sp>
+        <p:nvSpPr>
+          <p:cNvPr id="21" name="Domain circle"/>
+          <p:cNvSpPr/>
+          <p:nvPr/>
+        </p:nvSpPr>
+        <p:spPr>
+          <a:xfrm>
+            <a:off x="5212080" y="5248656"/>
+            <a:ext cx="512064" cy="512064"/>
+          </a:xfrm>
+          <a:prstGeom prst="ellipse">
+            <a:avLst/>
+          </a:prstGeom>
+          <a:solidFill>
+            <a:schemeClr val="accent2"/>
+          </a:solidFill>
+          <a:ln/>
+        </p:spPr>
+      </p:sp>
+      <p:pic>
+        <p:nvPicPr>
+          <p:cNvPr id="22" name="Domain icon" descr="preencoded.png"/>
+          <p:cNvPicPr>
+            <a:picLocks noChangeAspect="1"/>
+          </p:cNvPicPr>
+          <p:nvPr/>
+        </p:nvPicPr>
+        <p:blipFill>
+          <a:blip r:embed="rId6"/>
+          <a:stretch>
+            <a:fillRect/>
+          </a:stretch>
+        </p:blipFill>
+        <p:spPr>
+          <a:xfrm>
             <a:off x="5340096" y="5376672"/>
             <a:ext cx="256032" cy="256032"/>
           </a:xfrm>
@@ -3297,7 +2873,7 @@
           <a:bodyPr wrap="square" lIns="0" tIns="0" rIns="0" bIns="0" rtlCol="0" anchor="ctr"/>
           <a:lstStyle/>
           <a:p>
-            <a:pPr indent="0" marL="0">
+            <a:pPr marL="0" indent="0">
               <a:buNone/>
             </a:pPr>
             <a:r>
@@ -3311,7 +2887,7 @@
             <a:endParaRPr lang="en-US" sz="1500" dirty="0"/>
           </a:p>
           <a:p>
-            <a:pPr indent="0" marL="0">
+            <a:pPr marL="0" indent="0">
               <a:buNone/>
             </a:pPr>
             <a:r>
@@ -3346,7 +2922,7 @@
           </a:prstGeom>
           <a:extLst>
             <a:ext uri="{C572A759-6A51-4108-AA02-DFA0A04FC94B}">
-              <ma14:wrappingTextBoxFlag xmlns:ma14="http://schemas.microsoft.com/office/mac/drawingml/2011/main" val="0"/>
+              <ma14:wrappingTextBoxFlag xmlns:ma14="http://schemas.microsoft.com/office/mac/drawingml/2011/main" xmlns="" val="0"/>
             </a:ext>
           </a:extLst>
         </p:spPr>
@@ -3364,7 +2940,7 @@
           <a:p>
             <a:pPr algn="r"/>
             <a:fld id="{F7021451-1387-4CA6-816F-3879F97B5CBC}" type="slidenum">
-              <a:rPr b="0" lang="en-US"/>
+              <a:rPr lang="en-US" b="0"/>
               <a:t>10</a:t>
             </a:fld>
             <a:endParaRPr lang="en-US"/>
@@ -3399,9 +2975,11 @@
       <p:sp>
         <p:nvSpPr>
           <p:cNvPr id="2" name="Text 1"/>
-          <p:cNvSpPr/>
+          <p:cNvSpPr>
+            <a:spLocks noGrp="1"/>
+          </p:cNvSpPr>
           <p:nvPr>
-            <p:ph idx="101" type="title" hasCustomPrompt="1"/>
+            <p:ph type="title" idx="101" hasCustomPrompt="1"/>
           </p:nvPr>
         </p:nvSpPr>
         <p:spPr>
@@ -3419,7 +2997,7 @@
           <a:bodyPr wrap="square" lIns="0" tIns="0" rIns="0" bIns="0" rtlCol="0" anchor="ctr"/>
           <a:lstStyle/>
           <a:p>
-            <a:pPr algn="l" indent="0" marL="0">
+            <a:pPr marL="0" indent="0" algn="l">
               <a:buNone/>
             </a:pPr>
             <a:r>
@@ -3458,7 +3036,7 @@
           <a:bodyPr wrap="square" lIns="0" tIns="0" rIns="0" bIns="0" rtlCol="0" anchor="t"/>
           <a:lstStyle/>
           <a:p>
-            <a:pPr indent="0" marL="0">
+            <a:pPr marL="0" indent="0">
               <a:buNone/>
             </a:pPr>
             <a:r>
@@ -3497,171 +3075,7 @@
       </p:sp>
       <p:pic>
         <p:nvPicPr>
-          <p:cNvPr id="5" name="Image 0" descr="preencoded.png">    </p:cNvPr>
-          <p:cNvPicPr>
-            <a:picLocks noChangeAspect="1"/>
-          </p:cNvPicPr>
-          <p:nvPr/>
-        </p:nvPicPr>
-        <p:blipFill>
-          <a:blip r:embed="rId1"/>
-          <a:stretch>
-            <a:fillRect/>
-          </a:stretch>
-        </p:blipFill>
-        <p:spPr>
-          <a:xfrm>
-            <a:off x="640080" y="2112264"/>
-            <a:ext cx="201168" cy="201168"/>
-          </a:xfrm>
-          <a:prstGeom prst="rect">
-            <a:avLst/>
-          </a:prstGeom>
-        </p:spPr>
-      </p:pic>
-      <p:sp>
-        <p:nvSpPr>
-          <p:cNvPr id="6" name="Text 3"/>
-          <p:cNvSpPr txBox="1"/>
-          <p:nvPr/>
-        </p:nvSpPr>
-        <p:spPr>
-          <a:xfrm>
-            <a:off x="1097280" y="1965960"/>
-            <a:ext cx="5120640" cy="502920"/>
-          </a:xfrm>
-          <a:prstGeom prst="rect">
-            <a:avLst/>
-          </a:prstGeom>
-          <a:noFill/>
-          <a:ln/>
-        </p:spPr>
-        <p:txBody>
-          <a:bodyPr wrap="square" lIns="0" tIns="0" rIns="0" bIns="0" rtlCol="0" anchor="ctr"/>
-          <a:lstStyle/>
-          <a:p>
-            <a:pPr indent="0" marL="0">
-              <a:buNone/>
-            </a:pPr>
-            <a:r>
-              <a:rPr lang="en-US" sz="1500" dirty="0">
-                <a:solidFill>
-                  <a:schemeClr val="tx1"/>
-                </a:solidFill>
-              </a:rPr>
-              <a:t>Online family registration in five steps, in Bisaya</a:t>
-            </a:r>
-            <a:endParaRPr lang="en-US" sz="1500" dirty="0"/>
-          </a:p>
-        </p:txBody>
-      </p:sp>
-      <p:sp>
-        <p:nvSpPr>
-          <p:cNvPr id="7" name="Shape 4"/>
-          <p:cNvSpPr/>
-          <p:nvPr/>
-        </p:nvSpPr>
-        <p:spPr>
-          <a:xfrm>
-            <a:off x="548640" y="2679192"/>
-            <a:ext cx="384048" cy="384048"/>
-          </a:xfrm>
-          <a:prstGeom prst="ellipse">
-            <a:avLst/>
-          </a:prstGeom>
-          <a:solidFill>
-            <a:schemeClr val="accent1">
-              <a:alpha val="15000"/>
-            </a:schemeClr>
-          </a:solidFill>
-          <a:ln/>
-        </p:spPr>
-      </p:sp>
-      <p:pic>
-        <p:nvPicPr>
-          <p:cNvPr id="8" name="Image 1" descr="preencoded.png">    </p:cNvPr>
-          <p:cNvPicPr>
-            <a:picLocks noChangeAspect="1"/>
-          </p:cNvPicPr>
-          <p:nvPr/>
-        </p:nvPicPr>
-        <p:blipFill>
-          <a:blip r:embed="rId2"/>
-          <a:stretch>
-            <a:fillRect/>
-          </a:stretch>
-        </p:blipFill>
-        <p:spPr>
-          <a:xfrm>
-            <a:off x="640080" y="2770632"/>
-            <a:ext cx="201168" cy="201168"/>
-          </a:xfrm>
-          <a:prstGeom prst="rect">
-            <a:avLst/>
-          </a:prstGeom>
-        </p:spPr>
-      </p:pic>
-      <p:sp>
-        <p:nvSpPr>
-          <p:cNvPr id="9" name="Text 5"/>
-          <p:cNvSpPr txBox="1"/>
-          <p:nvPr/>
-        </p:nvSpPr>
-        <p:spPr>
-          <a:xfrm>
-            <a:off x="1097280" y="2624328"/>
-            <a:ext cx="5120640" cy="502920"/>
-          </a:xfrm>
-          <a:prstGeom prst="rect">
-            <a:avLst/>
-          </a:prstGeom>
-          <a:noFill/>
-          <a:ln/>
-        </p:spPr>
-        <p:txBody>
-          <a:bodyPr wrap="square" lIns="0" tIns="0" rIns="0" bIns="0" rtlCol="0" anchor="ctr"/>
-          <a:lstStyle/>
-          <a:p>
-            <a:pPr indent="0" marL="0">
-              <a:buNone/>
-            </a:pPr>
-            <a:r>
-              <a:rPr lang="en-US" sz="1500" dirty="0">
-                <a:solidFill>
-                  <a:schemeClr val="tx1"/>
-                </a:solidFill>
-              </a:rPr>
-              <a:t>The census, with online updates and results by GKK</a:t>
-            </a:r>
-            <a:endParaRPr lang="en-US" sz="1500" dirty="0"/>
-          </a:p>
-        </p:txBody>
-      </p:sp>
-      <p:sp>
-        <p:nvSpPr>
-          <p:cNvPr id="10" name="Shape 6"/>
-          <p:cNvSpPr/>
-          <p:nvPr/>
-        </p:nvSpPr>
-        <p:spPr>
-          <a:xfrm>
-            <a:off x="548640" y="3337560"/>
-            <a:ext cx="384048" cy="384048"/>
-          </a:xfrm>
-          <a:prstGeom prst="ellipse">
-            <a:avLst/>
-          </a:prstGeom>
-          <a:solidFill>
-            <a:schemeClr val="accent1">
-              <a:alpha val="15000"/>
-            </a:schemeClr>
-          </a:solidFill>
-          <a:ln/>
-        </p:spPr>
-      </p:sp>
-      <p:pic>
-        <p:nvPicPr>
-          <p:cNvPr id="11" name="Image 2" descr="preencoded.png">    </p:cNvPr>
+          <p:cNvPr id="5" name="Image 0" descr="preencoded.png"/>
           <p:cNvPicPr>
             <a:picLocks noChangeAspect="1"/>
           </p:cNvPicPr>
@@ -3675,7 +3089,7 @@
         </p:blipFill>
         <p:spPr>
           <a:xfrm>
-            <a:off x="640080" y="3429000"/>
+            <a:off x="640080" y="2112264"/>
             <a:ext cx="201168" cy="201168"/>
           </a:xfrm>
           <a:prstGeom prst="rect">
@@ -3685,13 +3099,13 @@
       </p:pic>
       <p:sp>
         <p:nvSpPr>
-          <p:cNvPr id="12" name="Text 7"/>
+          <p:cNvPr id="6" name="Text 3"/>
           <p:cNvSpPr txBox="1"/>
           <p:nvPr/>
         </p:nvSpPr>
         <p:spPr>
           <a:xfrm>
-            <a:off x="1097280" y="3282696"/>
+            <a:off x="1097280" y="1965960"/>
             <a:ext cx="5120640" cy="502920"/>
           </a:xfrm>
           <a:prstGeom prst="rect">
@@ -3704,7 +3118,7 @@
           <a:bodyPr wrap="square" lIns="0" tIns="0" rIns="0" bIns="0" rtlCol="0" anchor="ctr"/>
           <a:lstStyle/>
           <a:p>
-            <a:pPr indent="0" marL="0">
+            <a:pPr marL="0" indent="0">
               <a:buNone/>
             </a:pPr>
             <a:r>
@@ -3713,7 +3127,7 @@
                   <a:schemeClr val="tx1"/>
                 </a:solidFill>
               </a:rPr>
-              <a:t>Parish website: Masses, announcements, bulletin, events, sacrament guides</a:t>
+              <a:t>Online family registration in five steps, in Bisaya</a:t>
             </a:r>
             <a:endParaRPr lang="en-US" sz="1500" dirty="0"/>
           </a:p>
@@ -3721,13 +3135,13 @@
       </p:sp>
       <p:sp>
         <p:nvSpPr>
-          <p:cNvPr id="13" name="Shape 8"/>
+          <p:cNvPr id="7" name="Shape 4"/>
           <p:cNvSpPr/>
           <p:nvPr/>
         </p:nvSpPr>
         <p:spPr>
           <a:xfrm>
-            <a:off x="548640" y="3995928"/>
+            <a:off x="548640" y="2679192"/>
             <a:ext cx="384048" cy="384048"/>
           </a:xfrm>
           <a:prstGeom prst="ellipse">
@@ -3743,7 +3157,417 @@
       </p:sp>
       <p:pic>
         <p:nvPicPr>
-          <p:cNvPr id="14" name="Image 3" descr="preencoded.png">    </p:cNvPr>
+          <p:cNvPr id="8" name="Image 1" descr="preencoded.png"/>
+          <p:cNvPicPr>
+            <a:picLocks noChangeAspect="1"/>
+          </p:cNvPicPr>
+          <p:nvPr/>
+        </p:nvPicPr>
+        <p:blipFill>
+          <a:blip r:embed="rId3"/>
+          <a:stretch>
+            <a:fillRect/>
+          </a:stretch>
+        </p:blipFill>
+        <p:spPr>
+          <a:xfrm>
+            <a:off x="640080" y="2770632"/>
+            <a:ext cx="201168" cy="201168"/>
+          </a:xfrm>
+          <a:prstGeom prst="rect">
+            <a:avLst/>
+          </a:prstGeom>
+        </p:spPr>
+      </p:pic>
+      <p:sp>
+        <p:nvSpPr>
+          <p:cNvPr id="9" name="Text 5"/>
+          <p:cNvSpPr txBox="1"/>
+          <p:nvPr/>
+        </p:nvSpPr>
+        <p:spPr>
+          <a:xfrm>
+            <a:off x="1097280" y="2624328"/>
+            <a:ext cx="5120640" cy="502920"/>
+          </a:xfrm>
+          <a:prstGeom prst="rect">
+            <a:avLst/>
+          </a:prstGeom>
+          <a:noFill/>
+          <a:ln/>
+        </p:spPr>
+        <p:txBody>
+          <a:bodyPr wrap="square" lIns="0" tIns="0" rIns="0" bIns="0" rtlCol="0" anchor="ctr"/>
+          <a:lstStyle/>
+          <a:p>
+            <a:pPr marL="0" indent="0">
+              <a:buNone/>
+            </a:pPr>
+            <a:r>
+              <a:rPr lang="en-US" sz="1500" dirty="0">
+                <a:solidFill>
+                  <a:schemeClr val="tx1"/>
+                </a:solidFill>
+              </a:rPr>
+              <a:t>The census, with online updates and results by GKK</a:t>
+            </a:r>
+            <a:endParaRPr lang="en-US" sz="1500" dirty="0"/>
+          </a:p>
+        </p:txBody>
+      </p:sp>
+      <p:sp>
+        <p:nvSpPr>
+          <p:cNvPr id="10" name="Shape 6"/>
+          <p:cNvSpPr/>
+          <p:nvPr/>
+        </p:nvSpPr>
+        <p:spPr>
+          <a:xfrm>
+            <a:off x="548640" y="3337560"/>
+            <a:ext cx="384048" cy="384048"/>
+          </a:xfrm>
+          <a:prstGeom prst="ellipse">
+            <a:avLst/>
+          </a:prstGeom>
+          <a:solidFill>
+            <a:schemeClr val="accent1">
+              <a:alpha val="15000"/>
+            </a:schemeClr>
+          </a:solidFill>
+          <a:ln/>
+        </p:spPr>
+      </p:sp>
+      <p:pic>
+        <p:nvPicPr>
+          <p:cNvPr id="11" name="Image 2" descr="preencoded.png"/>
+          <p:cNvPicPr>
+            <a:picLocks noChangeAspect="1"/>
+          </p:cNvPicPr>
+          <p:nvPr/>
+        </p:nvPicPr>
+        <p:blipFill>
+          <a:blip r:embed="rId3"/>
+          <a:stretch>
+            <a:fillRect/>
+          </a:stretch>
+        </p:blipFill>
+        <p:spPr>
+          <a:xfrm>
+            <a:off x="640080" y="3429000"/>
+            <a:ext cx="201168" cy="201168"/>
+          </a:xfrm>
+          <a:prstGeom prst="rect">
+            <a:avLst/>
+          </a:prstGeom>
+        </p:spPr>
+      </p:pic>
+      <p:sp>
+        <p:nvSpPr>
+          <p:cNvPr id="12" name="Text 7"/>
+          <p:cNvSpPr txBox="1"/>
+          <p:nvPr/>
+        </p:nvSpPr>
+        <p:spPr>
+          <a:xfrm>
+            <a:off x="1097280" y="3282696"/>
+            <a:ext cx="5120640" cy="502920"/>
+          </a:xfrm>
+          <a:prstGeom prst="rect">
+            <a:avLst/>
+          </a:prstGeom>
+          <a:noFill/>
+          <a:ln/>
+        </p:spPr>
+        <p:txBody>
+          <a:bodyPr wrap="square" lIns="0" tIns="0" rIns="0" bIns="0" rtlCol="0" anchor="ctr"/>
+          <a:lstStyle/>
+          <a:p>
+            <a:pPr marL="0" indent="0">
+              <a:buNone/>
+            </a:pPr>
+            <a:r>
+              <a:rPr lang="en-US" sz="1500" dirty="0">
+                <a:solidFill>
+                  <a:schemeClr val="tx1"/>
+                </a:solidFill>
+              </a:rPr>
+              <a:t>Parish website: Masses, announcements, bulletin, events, sacrament guides</a:t>
+            </a:r>
+            <a:endParaRPr lang="en-US" sz="1500" dirty="0"/>
+          </a:p>
+        </p:txBody>
+      </p:sp>
+      <p:sp>
+        <p:nvSpPr>
+          <p:cNvPr id="13" name="Shape 8"/>
+          <p:cNvSpPr/>
+          <p:nvPr/>
+        </p:nvSpPr>
+        <p:spPr>
+          <a:xfrm>
+            <a:off x="548640" y="3995928"/>
+            <a:ext cx="384048" cy="384048"/>
+          </a:xfrm>
+          <a:prstGeom prst="ellipse">
+            <a:avLst/>
+          </a:prstGeom>
+          <a:solidFill>
+            <a:schemeClr val="accent1">
+              <a:alpha val="15000"/>
+            </a:schemeClr>
+          </a:solidFill>
+          <a:ln/>
+        </p:spPr>
+      </p:sp>
+      <p:pic>
+        <p:nvPicPr>
+          <p:cNvPr id="14" name="Image 3" descr="preencoded.png"/>
+          <p:cNvPicPr>
+            <a:picLocks noChangeAspect="1"/>
+          </p:cNvPicPr>
+          <p:nvPr/>
+        </p:nvPicPr>
+        <p:blipFill>
+          <a:blip r:embed="rId3"/>
+          <a:stretch>
+            <a:fillRect/>
+          </a:stretch>
+        </p:blipFill>
+        <p:spPr>
+          <a:xfrm>
+            <a:off x="640080" y="4087368"/>
+            <a:ext cx="201168" cy="201168"/>
+          </a:xfrm>
+          <a:prstGeom prst="rect">
+            <a:avLst/>
+          </a:prstGeom>
+        </p:spPr>
+      </p:pic>
+      <p:sp>
+        <p:nvSpPr>
+          <p:cNvPr id="15" name="Text 9"/>
+          <p:cNvSpPr txBox="1"/>
+          <p:nvPr/>
+        </p:nvSpPr>
+        <p:spPr>
+          <a:xfrm>
+            <a:off x="1097280" y="3941064"/>
+            <a:ext cx="5120640" cy="502920"/>
+          </a:xfrm>
+          <a:prstGeom prst="rect">
+            <a:avLst/>
+          </a:prstGeom>
+          <a:noFill/>
+          <a:ln/>
+        </p:spPr>
+        <p:txBody>
+          <a:bodyPr wrap="square" lIns="0" tIns="0" rIns="0" bIns="0" rtlCol="0" anchor="ctr"/>
+          <a:lstStyle/>
+          <a:p>
+            <a:pPr marL="0" indent="0">
+              <a:buNone/>
+            </a:pPr>
+            <a:r>
+              <a:rPr lang="en-US" sz="1500" dirty="0">
+                <a:solidFill>
+                  <a:schemeClr val="tx1"/>
+                </a:solidFill>
+              </a:rPr>
+              <a:t>Requests: certificates, sacraments, prayers and blood donors</a:t>
+            </a:r>
+            <a:endParaRPr lang="en-US" sz="1500" dirty="0"/>
+          </a:p>
+        </p:txBody>
+      </p:sp>
+      <p:sp>
+        <p:nvSpPr>
+          <p:cNvPr id="16" name="Shape 10"/>
+          <p:cNvSpPr/>
+          <p:nvPr/>
+        </p:nvSpPr>
+        <p:spPr>
+          <a:xfrm>
+            <a:off x="548640" y="4654296"/>
+            <a:ext cx="384048" cy="384048"/>
+          </a:xfrm>
+          <a:prstGeom prst="ellipse">
+            <a:avLst/>
+          </a:prstGeom>
+          <a:solidFill>
+            <a:schemeClr val="accent1">
+              <a:alpha val="15000"/>
+            </a:schemeClr>
+          </a:solidFill>
+          <a:ln/>
+        </p:spPr>
+      </p:sp>
+      <p:pic>
+        <p:nvPicPr>
+          <p:cNvPr id="17" name="Image 4" descr="preencoded.png"/>
+          <p:cNvPicPr>
+            <a:picLocks noChangeAspect="1"/>
+          </p:cNvPicPr>
+          <p:nvPr/>
+        </p:nvPicPr>
+        <p:blipFill>
+          <a:blip r:embed="rId3"/>
+          <a:stretch>
+            <a:fillRect/>
+          </a:stretch>
+        </p:blipFill>
+        <p:spPr>
+          <a:xfrm>
+            <a:off x="640080" y="4745736"/>
+            <a:ext cx="201168" cy="201168"/>
+          </a:xfrm>
+          <a:prstGeom prst="rect">
+            <a:avLst/>
+          </a:prstGeom>
+        </p:spPr>
+      </p:pic>
+      <p:sp>
+        <p:nvSpPr>
+          <p:cNvPr id="18" name="Text 11"/>
+          <p:cNvSpPr txBox="1"/>
+          <p:nvPr/>
+        </p:nvSpPr>
+        <p:spPr>
+          <a:xfrm>
+            <a:off x="1097280" y="4599432"/>
+            <a:ext cx="5120640" cy="502920"/>
+          </a:xfrm>
+          <a:prstGeom prst="rect">
+            <a:avLst/>
+          </a:prstGeom>
+          <a:noFill/>
+          <a:ln/>
+        </p:spPr>
+        <p:txBody>
+          <a:bodyPr wrap="square" lIns="0" tIns="0" rIns="0" bIns="0" rtlCol="0" anchor="ctr"/>
+          <a:lstStyle/>
+          <a:p>
+            <a:pPr marL="0" indent="0">
+              <a:buNone/>
+            </a:pPr>
+            <a:r>
+              <a:rPr lang="en-US" sz="1500" dirty="0">
+                <a:solidFill>
+                  <a:schemeClr val="tx1"/>
+                </a:solidFill>
+              </a:rPr>
+              <a:t>Reports for the council and spreadsheet exports for the diocese</a:t>
+            </a:r>
+            <a:endParaRPr lang="en-US" sz="1500" dirty="0"/>
+          </a:p>
+        </p:txBody>
+      </p:sp>
+      <p:sp>
+        <p:nvSpPr>
+          <p:cNvPr id="19" name="Shape 12"/>
+          <p:cNvSpPr/>
+          <p:nvPr/>
+        </p:nvSpPr>
+        <p:spPr>
+          <a:xfrm>
+            <a:off x="548640" y="5312664"/>
+            <a:ext cx="384048" cy="384048"/>
+          </a:xfrm>
+          <a:prstGeom prst="ellipse">
+            <a:avLst/>
+          </a:prstGeom>
+          <a:solidFill>
+            <a:schemeClr val="accent1">
+              <a:alpha val="15000"/>
+            </a:schemeClr>
+          </a:solidFill>
+          <a:ln/>
+        </p:spPr>
+      </p:sp>
+      <p:pic>
+        <p:nvPicPr>
+          <p:cNvPr id="20" name="Image 5" descr="preencoded.png"/>
+          <p:cNvPicPr>
+            <a:picLocks noChangeAspect="1"/>
+          </p:cNvPicPr>
+          <p:nvPr/>
+        </p:nvPicPr>
+        <p:blipFill>
+          <a:blip r:embed="rId3"/>
+          <a:stretch>
+            <a:fillRect/>
+          </a:stretch>
+        </p:blipFill>
+        <p:spPr>
+          <a:xfrm>
+            <a:off x="640080" y="5404104"/>
+            <a:ext cx="201168" cy="201168"/>
+          </a:xfrm>
+          <a:prstGeom prst="rect">
+            <a:avLst/>
+          </a:prstGeom>
+        </p:spPr>
+      </p:pic>
+      <p:sp>
+        <p:nvSpPr>
+          <p:cNvPr id="21" name="Text 13"/>
+          <p:cNvSpPr txBox="1"/>
+          <p:nvPr/>
+        </p:nvSpPr>
+        <p:spPr>
+          <a:xfrm>
+            <a:off x="1097280" y="5257800"/>
+            <a:ext cx="5120640" cy="502920"/>
+          </a:xfrm>
+          <a:prstGeom prst="rect">
+            <a:avLst/>
+          </a:prstGeom>
+          <a:noFill/>
+          <a:ln/>
+        </p:spPr>
+        <p:txBody>
+          <a:bodyPr wrap="square" lIns="0" tIns="0" rIns="0" bIns="0" rtlCol="0" anchor="ctr"/>
+          <a:lstStyle/>
+          <a:p>
+            <a:pPr marL="0" indent="0">
+              <a:buNone/>
+            </a:pPr>
+            <a:r>
+              <a:rPr lang="en-US" sz="1500" dirty="0">
+                <a:solidFill>
+                  <a:schemeClr val="tx1"/>
+                </a:solidFill>
+              </a:rPr>
+              <a:t>Staff accounts, each with its own access level</a:t>
+            </a:r>
+            <a:endParaRPr lang="en-US" sz="1500" dirty="0"/>
+          </a:p>
+        </p:txBody>
+      </p:sp>
+      <p:sp>
+        <p:nvSpPr>
+          <p:cNvPr id="22" name="Our live site"/>
+          <p:cNvSpPr/>
+          <p:nvPr/>
+        </p:nvSpPr>
+        <p:spPr>
+          <a:xfrm>
+            <a:off x="6705295" y="1463040"/>
+            <a:ext cx="2331720" cy="4023360"/>
+          </a:xfrm>
+          <a:prstGeom prst="roundRect">
+            <a:avLst>
+              <a:gd name="adj" fmla="val 4706"/>
+            </a:avLst>
+          </a:prstGeom>
+          <a:solidFill>
+            <a:schemeClr val="bg2"/>
+          </a:solidFill>
+          <a:ln/>
+        </p:spPr>
+      </p:sp>
+      <p:pic>
+        <p:nvPicPr>
+          <p:cNvPr id="23" name="QR code: Our live site" descr="preencoded.png"/>
           <p:cNvPicPr>
             <a:picLocks noChangeAspect="1"/>
           </p:cNvPicPr>
@@ -3757,8 +3581,8 @@
         </p:blipFill>
         <p:spPr>
           <a:xfrm>
-            <a:off x="640080" y="4087368"/>
-            <a:ext cx="201168" cy="201168"/>
+            <a:off x="6979615" y="1737360"/>
+            <a:ext cx="1783080" cy="1783080"/>
           </a:xfrm>
           <a:prstGeom prst="rect">
             <a:avLst/>
@@ -3767,65 +3591,140 @@
       </p:pic>
       <p:sp>
         <p:nvSpPr>
-          <p:cNvPr id="15" name="Text 9"/>
+          <p:cNvPr id="24" name="Text 15"/>
           <p:cNvSpPr txBox="1"/>
           <p:nvPr/>
         </p:nvSpPr>
         <p:spPr>
           <a:xfrm>
-            <a:off x="1097280" y="3941064"/>
-            <a:ext cx="5120640" cy="502920"/>
-          </a:xfrm>
-          <a:prstGeom prst="rect">
-            <a:avLst/>
-          </a:prstGeom>
-          <a:noFill/>
-          <a:ln/>
-        </p:spPr>
-        <p:txBody>
-          <a:bodyPr wrap="square" lIns="0" tIns="0" rIns="0" bIns="0" rtlCol="0" anchor="ctr"/>
-          <a:lstStyle/>
-          <a:p>
-            <a:pPr indent="0" marL="0">
-              <a:buNone/>
-            </a:pPr>
-            <a:r>
-              <a:rPr lang="en-US" sz="1500" dirty="0">
-                <a:solidFill>
-                  <a:schemeClr val="tx1"/>
-                </a:solidFill>
-              </a:rPr>
-              <a:t>Requests: certificates, sacraments, prayers and blood donors</a:t>
-            </a:r>
-            <a:endParaRPr lang="en-US" sz="1500" dirty="0"/>
-          </a:p>
-        </p:txBody>
-      </p:sp>
-      <p:sp>
-        <p:nvSpPr>
-          <p:cNvPr id="16" name="Shape 10"/>
+            <a:off x="6888175" y="3703320"/>
+            <a:ext cx="1965960" cy="365760"/>
+          </a:xfrm>
+          <a:prstGeom prst="rect">
+            <a:avLst/>
+          </a:prstGeom>
+          <a:noFill/>
+          <a:ln/>
+        </p:spPr>
+        <p:txBody>
+          <a:bodyPr wrap="square" lIns="0" tIns="0" rIns="0" bIns="0" rtlCol="0" anchor="t"/>
+          <a:lstStyle/>
+          <a:p>
+            <a:pPr marL="0" indent="0" algn="ctr">
+              <a:buNone/>
+            </a:pPr>
+            <a:r>
+              <a:rPr lang="en-US" sz="1700" b="1" dirty="0">
+                <a:solidFill>
+                  <a:schemeClr val="tx2"/>
+                </a:solidFill>
+                <a:latin typeface="+mj-lt" pitchFamily="34" charset="0"/>
+                <a:ea typeface="+mj-lt" pitchFamily="34" charset="-122"/>
+                <a:cs typeface="+mj-lt" pitchFamily="34" charset="-120"/>
+              </a:rPr>
+              <a:t>Our live site</a:t>
+            </a:r>
+            <a:endParaRPr lang="en-US" sz="1700" dirty="0"/>
+          </a:p>
+        </p:txBody>
+      </p:sp>
+      <p:sp>
+        <p:nvSpPr>
+          <p:cNvPr id="25" name="Text 16"/>
+          <p:cNvSpPr txBox="1"/>
+          <p:nvPr/>
+        </p:nvSpPr>
+        <p:spPr>
+          <a:xfrm>
+            <a:off x="6796735" y="4096512"/>
+            <a:ext cx="2148840" cy="320040"/>
+          </a:xfrm>
+          <a:prstGeom prst="rect">
+            <a:avLst/>
+          </a:prstGeom>
+          <a:noFill/>
+          <a:ln/>
+        </p:spPr>
+        <p:txBody>
+          <a:bodyPr wrap="square" lIns="0" tIns="0" rIns="0" bIns="0" rtlCol="0" anchor="t"/>
+          <a:lstStyle/>
+          <a:p>
+            <a:pPr marL="0" indent="0" algn="ctr">
+              <a:buNone/>
+            </a:pPr>
+            <a:r>
+              <a:rPr lang="en-US" sz="1200" b="1" dirty="0">
+                <a:solidFill>
+                  <a:schemeClr val="accent1"/>
+                </a:solidFill>
+              </a:rPr>
+              <a:t>guadalupe-muaan.vercel.app</a:t>
+            </a:r>
+            <a:endParaRPr lang="en-US" sz="1200" dirty="0"/>
+          </a:p>
+        </p:txBody>
+      </p:sp>
+      <p:sp>
+        <p:nvSpPr>
+          <p:cNvPr id="26" name="Text 17"/>
+          <p:cNvSpPr txBox="1"/>
+          <p:nvPr/>
+        </p:nvSpPr>
+        <p:spPr>
+          <a:xfrm>
+            <a:off x="6933895" y="4480560"/>
+            <a:ext cx="1874520" cy="868680"/>
+          </a:xfrm>
+          <a:prstGeom prst="rect">
+            <a:avLst/>
+          </a:prstGeom>
+          <a:noFill/>
+          <a:ln/>
+        </p:spPr>
+        <p:txBody>
+          <a:bodyPr wrap="square" lIns="0" tIns="0" rIns="0" bIns="0" rtlCol="0" anchor="t"/>
+          <a:lstStyle/>
+          <a:p>
+            <a:pPr marL="0" indent="0" algn="ctr">
+              <a:buNone/>
+            </a:pPr>
+            <a:r>
+              <a:rPr lang="en-US" sz="1200" dirty="0">
+                <a:solidFill>
+                  <a:schemeClr val="accent5"/>
+                </a:solidFill>
+              </a:rPr>
+              <a:t>Where our families register and update the census</a:t>
+            </a:r>
+            <a:endParaRPr lang="en-US" sz="1200" dirty="0"/>
+          </a:p>
+        </p:txBody>
+      </p:sp>
+      <p:sp>
+        <p:nvSpPr>
+          <p:cNvPr id="27" name="Try the demo"/>
           <p:cNvSpPr/>
           <p:nvPr/>
         </p:nvSpPr>
         <p:spPr>
           <a:xfrm>
-            <a:off x="548640" y="4654296"/>
-            <a:ext cx="384048" cy="384048"/>
-          </a:xfrm>
-          <a:prstGeom prst="ellipse">
-            <a:avLst/>
+            <a:off x="9311335" y="1463040"/>
+            <a:ext cx="2331720" cy="4023360"/>
+          </a:xfrm>
+          <a:prstGeom prst="roundRect">
+            <a:avLst>
+              <a:gd name="adj" fmla="val 4706"/>
+            </a:avLst>
           </a:prstGeom>
           <a:solidFill>
-            <a:schemeClr val="accent1">
-              <a:alpha val="15000"/>
-            </a:schemeClr>
+            <a:schemeClr val="bg2"/>
           </a:solidFill>
           <a:ln/>
         </p:spPr>
       </p:sp>
       <p:pic>
         <p:nvPicPr>
-          <p:cNvPr id="17" name="Image 4" descr="preencoded.png">    </p:cNvPr>
+          <p:cNvPr id="28" name="QR code: Try the demo" descr="preencoded.png"/>
           <p:cNvPicPr>
             <a:picLocks noChangeAspect="1"/>
           </p:cNvPicPr>
@@ -3839,8 +3738,8 @@
         </p:blipFill>
         <p:spPr>
           <a:xfrm>
-            <a:off x="640080" y="4745736"/>
-            <a:ext cx="201168" cy="201168"/>
+            <a:off x="9585655" y="1737360"/>
+            <a:ext cx="1783080" cy="1783080"/>
           </a:xfrm>
           <a:prstGeom prst="rect">
             <a:avLst/>
@@ -3849,177 +3748,13 @@
       </p:pic>
       <p:sp>
         <p:nvSpPr>
-          <p:cNvPr id="18" name="Text 11"/>
+          <p:cNvPr id="29" name="Text 19"/>
           <p:cNvSpPr txBox="1"/>
           <p:nvPr/>
         </p:nvSpPr>
         <p:spPr>
           <a:xfrm>
-            <a:off x="1097280" y="4599432"/>
-            <a:ext cx="5120640" cy="502920"/>
-          </a:xfrm>
-          <a:prstGeom prst="rect">
-            <a:avLst/>
-          </a:prstGeom>
-          <a:noFill/>
-          <a:ln/>
-        </p:spPr>
-        <p:txBody>
-          <a:bodyPr wrap="square" lIns="0" tIns="0" rIns="0" bIns="0" rtlCol="0" anchor="ctr"/>
-          <a:lstStyle/>
-          <a:p>
-            <a:pPr indent="0" marL="0">
-              <a:buNone/>
-            </a:pPr>
-            <a:r>
-              <a:rPr lang="en-US" sz="1500" dirty="0">
-                <a:solidFill>
-                  <a:schemeClr val="tx1"/>
-                </a:solidFill>
-              </a:rPr>
-              <a:t>Reports for the council and spreadsheet exports for the diocese</a:t>
-            </a:r>
-            <a:endParaRPr lang="en-US" sz="1500" dirty="0"/>
-          </a:p>
-        </p:txBody>
-      </p:sp>
-      <p:sp>
-        <p:nvSpPr>
-          <p:cNvPr id="19" name="Shape 12"/>
-          <p:cNvSpPr/>
-          <p:nvPr/>
-        </p:nvSpPr>
-        <p:spPr>
-          <a:xfrm>
-            <a:off x="548640" y="5312664"/>
-            <a:ext cx="384048" cy="384048"/>
-          </a:xfrm>
-          <a:prstGeom prst="ellipse">
-            <a:avLst/>
-          </a:prstGeom>
-          <a:solidFill>
-            <a:schemeClr val="accent1">
-              <a:alpha val="15000"/>
-            </a:schemeClr>
-          </a:solidFill>
-          <a:ln/>
-        </p:spPr>
-      </p:sp>
-      <p:pic>
-        <p:nvPicPr>
-          <p:cNvPr id="20" name="Image 5" descr="preencoded.png">    </p:cNvPr>
-          <p:cNvPicPr>
-            <a:picLocks noChangeAspect="1"/>
-          </p:cNvPicPr>
-          <p:nvPr/>
-        </p:nvPicPr>
-        <p:blipFill>
-          <a:blip r:embed="rId6"/>
-          <a:stretch>
-            <a:fillRect/>
-          </a:stretch>
-        </p:blipFill>
-        <p:spPr>
-          <a:xfrm>
-            <a:off x="640080" y="5404104"/>
-            <a:ext cx="201168" cy="201168"/>
-          </a:xfrm>
-          <a:prstGeom prst="rect">
-            <a:avLst/>
-          </a:prstGeom>
-        </p:spPr>
-      </p:pic>
-      <p:sp>
-        <p:nvSpPr>
-          <p:cNvPr id="21" name="Text 13"/>
-          <p:cNvSpPr txBox="1"/>
-          <p:nvPr/>
-        </p:nvSpPr>
-        <p:spPr>
-          <a:xfrm>
-            <a:off x="1097280" y="5257800"/>
-            <a:ext cx="5120640" cy="502920"/>
-          </a:xfrm>
-          <a:prstGeom prst="rect">
-            <a:avLst/>
-          </a:prstGeom>
-          <a:noFill/>
-          <a:ln/>
-        </p:spPr>
-        <p:txBody>
-          <a:bodyPr wrap="square" lIns="0" tIns="0" rIns="0" bIns="0" rtlCol="0" anchor="ctr"/>
-          <a:lstStyle/>
-          <a:p>
-            <a:pPr indent="0" marL="0">
-              <a:buNone/>
-            </a:pPr>
-            <a:r>
-              <a:rPr lang="en-US" sz="1500" dirty="0">
-                <a:solidFill>
-                  <a:schemeClr val="tx1"/>
-                </a:solidFill>
-              </a:rPr>
-              <a:t>Staff accounts, each with its own access level</a:t>
-            </a:r>
-            <a:endParaRPr lang="en-US" sz="1500" dirty="0"/>
-          </a:p>
-        </p:txBody>
-      </p:sp>
-      <p:sp>
-        <p:nvSpPr>
-          <p:cNvPr id="22" name="Our live site"/>
-          <p:cNvSpPr/>
-          <p:nvPr/>
-        </p:nvSpPr>
-        <p:spPr>
-          <a:xfrm>
-            <a:off x="6705295" y="1463040"/>
-            <a:ext cx="2331720" cy="4023360"/>
-          </a:xfrm>
-          <a:prstGeom prst="roundRect">
-            <a:avLst>
-              <a:gd name="adj" fmla="val 4706"/>
-            </a:avLst>
-          </a:prstGeom>
-          <a:solidFill>
-            <a:schemeClr val="bg2"/>
-          </a:solidFill>
-          <a:ln/>
-        </p:spPr>
-      </p:sp>
-      <p:pic>
-        <p:nvPicPr>
-          <p:cNvPr id="23" name="QR code: Our live site" descr="preencoded.png">    </p:cNvPr>
-          <p:cNvPicPr>
-            <a:picLocks noChangeAspect="1"/>
-          </p:cNvPicPr>
-          <p:nvPr/>
-        </p:nvPicPr>
-        <p:blipFill>
-          <a:blip r:embed="rId7"/>
-          <a:stretch>
-            <a:fillRect/>
-          </a:stretch>
-        </p:blipFill>
-        <p:spPr>
-          <a:xfrm>
-            <a:off x="6979615" y="1737360"/>
-            <a:ext cx="1783080" cy="1783080"/>
-          </a:xfrm>
-          <a:prstGeom prst="rect">
-            <a:avLst/>
-          </a:prstGeom>
-        </p:spPr>
-      </p:pic>
-      <p:sp>
-        <p:nvSpPr>
-          <p:cNvPr id="24" name="Text 15"/>
-          <p:cNvSpPr txBox="1"/>
-          <p:nvPr/>
-        </p:nvSpPr>
-        <p:spPr>
-          <a:xfrm>
-            <a:off x="6888175" y="3703320"/>
+            <a:off x="9494215" y="3703320"/>
             <a:ext cx="1965960" cy="365760"/>
           </a:xfrm>
           <a:prstGeom prst="rect">
@@ -4032,7 +3767,7 @@
           <a:bodyPr wrap="square" lIns="0" tIns="0" rIns="0" bIns="0" rtlCol="0" anchor="t"/>
           <a:lstStyle/>
           <a:p>
-            <a:pPr algn="ctr" indent="0" marL="0">
+            <a:pPr marL="0" indent="0" algn="ctr">
               <a:buNone/>
             </a:pPr>
             <a:r>
@@ -4044,163 +3779,6 @@
                 <a:ea typeface="+mj-lt" pitchFamily="34" charset="-122"/>
                 <a:cs typeface="+mj-lt" pitchFamily="34" charset="-120"/>
               </a:rPr>
-              <a:t>Our live site</a:t>
-            </a:r>
-            <a:endParaRPr lang="en-US" sz="1700" dirty="0"/>
-          </a:p>
-        </p:txBody>
-      </p:sp>
-      <p:sp>
-        <p:nvSpPr>
-          <p:cNvPr id="25" name="Text 16"/>
-          <p:cNvSpPr txBox="1"/>
-          <p:nvPr/>
-        </p:nvSpPr>
-        <p:spPr>
-          <a:xfrm>
-            <a:off x="6796735" y="4096512"/>
-            <a:ext cx="2148840" cy="320040"/>
-          </a:xfrm>
-          <a:prstGeom prst="rect">
-            <a:avLst/>
-          </a:prstGeom>
-          <a:noFill/>
-          <a:ln/>
-        </p:spPr>
-        <p:txBody>
-          <a:bodyPr wrap="square" lIns="0" tIns="0" rIns="0" bIns="0" rtlCol="0" anchor="t"/>
-          <a:lstStyle/>
-          <a:p>
-            <a:pPr algn="ctr" indent="0" marL="0">
-              <a:buNone/>
-            </a:pPr>
-            <a:r>
-              <a:rPr lang="en-US" sz="1200" b="1" dirty="0">
-                <a:solidFill>
-                  <a:schemeClr val="accent1"/>
-                </a:solidFill>
-              </a:rPr>
-              <a:t>guadalupe-muaan.vercel.app</a:t>
-            </a:r>
-            <a:endParaRPr lang="en-US" sz="1200" dirty="0"/>
-          </a:p>
-        </p:txBody>
-      </p:sp>
-      <p:sp>
-        <p:nvSpPr>
-          <p:cNvPr id="26" name="Text 17"/>
-          <p:cNvSpPr txBox="1"/>
-          <p:nvPr/>
-        </p:nvSpPr>
-        <p:spPr>
-          <a:xfrm>
-            <a:off x="6933895" y="4480560"/>
-            <a:ext cx="1874520" cy="868680"/>
-          </a:xfrm>
-          <a:prstGeom prst="rect">
-            <a:avLst/>
-          </a:prstGeom>
-          <a:noFill/>
-          <a:ln/>
-        </p:spPr>
-        <p:txBody>
-          <a:bodyPr wrap="square" lIns="0" tIns="0" rIns="0" bIns="0" rtlCol="0" anchor="t"/>
-          <a:lstStyle/>
-          <a:p>
-            <a:pPr algn="ctr" indent="0" marL="0">
-              <a:buNone/>
-            </a:pPr>
-            <a:r>
-              <a:rPr lang="en-US" sz="1200" dirty="0">
-                <a:solidFill>
-                  <a:schemeClr val="accent5"/>
-                </a:solidFill>
-              </a:rPr>
-              <a:t>Where our families register and update the census</a:t>
-            </a:r>
-            <a:endParaRPr lang="en-US" sz="1200" dirty="0"/>
-          </a:p>
-        </p:txBody>
-      </p:sp>
-      <p:sp>
-        <p:nvSpPr>
-          <p:cNvPr id="27" name="Try the demo"/>
-          <p:cNvSpPr/>
-          <p:nvPr/>
-        </p:nvSpPr>
-        <p:spPr>
-          <a:xfrm>
-            <a:off x="9311335" y="1463040"/>
-            <a:ext cx="2331720" cy="4023360"/>
-          </a:xfrm>
-          <a:prstGeom prst="roundRect">
-            <a:avLst>
-              <a:gd name="adj" fmla="val 4706"/>
-            </a:avLst>
-          </a:prstGeom>
-          <a:solidFill>
-            <a:schemeClr val="bg2"/>
-          </a:solidFill>
-          <a:ln/>
-        </p:spPr>
-      </p:sp>
-      <p:pic>
-        <p:nvPicPr>
-          <p:cNvPr id="28" name="QR code: Try the demo" descr="preencoded.png">    </p:cNvPr>
-          <p:cNvPicPr>
-            <a:picLocks noChangeAspect="1"/>
-          </p:cNvPicPr>
-          <p:nvPr/>
-        </p:nvPicPr>
-        <p:blipFill>
-          <a:blip r:embed="rId8"/>
-          <a:stretch>
-            <a:fillRect/>
-          </a:stretch>
-        </p:blipFill>
-        <p:spPr>
-          <a:xfrm>
-            <a:off x="9585655" y="1737360"/>
-            <a:ext cx="1783080" cy="1783080"/>
-          </a:xfrm>
-          <a:prstGeom prst="rect">
-            <a:avLst/>
-          </a:prstGeom>
-        </p:spPr>
-      </p:pic>
-      <p:sp>
-        <p:nvSpPr>
-          <p:cNvPr id="29" name="Text 19"/>
-          <p:cNvSpPr txBox="1"/>
-          <p:nvPr/>
-        </p:nvSpPr>
-        <p:spPr>
-          <a:xfrm>
-            <a:off x="9494215" y="3703320"/>
-            <a:ext cx="1965960" cy="365760"/>
-          </a:xfrm>
-          <a:prstGeom prst="rect">
-            <a:avLst/>
-          </a:prstGeom>
-          <a:noFill/>
-          <a:ln/>
-        </p:spPr>
-        <p:txBody>
-          <a:bodyPr wrap="square" lIns="0" tIns="0" rIns="0" bIns="0" rtlCol="0" anchor="t"/>
-          <a:lstStyle/>
-          <a:p>
-            <a:pPr algn="ctr" indent="0" marL="0">
-              <a:buNone/>
-            </a:pPr>
-            <a:r>
-              <a:rPr lang="en-US" sz="1700" b="1" dirty="0">
-                <a:solidFill>
-                  <a:schemeClr val="tx2"/>
-                </a:solidFill>
-                <a:latin typeface="+mj-lt" pitchFamily="34" charset="0"/>
-                <a:ea typeface="+mj-lt" pitchFamily="34" charset="-122"/>
-                <a:cs typeface="+mj-lt" pitchFamily="34" charset="-120"/>
-              </a:rPr>
               <a:t>Try the demo</a:t>
             </a:r>
             <a:endParaRPr lang="en-US" sz="1700" dirty="0"/>
@@ -4228,7 +3806,7 @@
           <a:bodyPr wrap="square" lIns="0" tIns="0" rIns="0" bIns="0" rtlCol="0" anchor="t"/>
           <a:lstStyle/>
           <a:p>
-            <a:pPr algn="ctr" indent="0" marL="0">
+            <a:pPr marL="0" indent="0" algn="ctr">
               <a:buNone/>
             </a:pPr>
             <a:r>
@@ -4264,7 +3842,7 @@
           <a:bodyPr wrap="square" lIns="0" tIns="0" rIns="0" bIns="0" rtlCol="0" anchor="t"/>
           <a:lstStyle/>
           <a:p>
-            <a:pPr algn="ctr" indent="0" marL="0">
+            <a:pPr marL="0" indent="0" algn="ctr">
               <a:buNone/>
             </a:pPr>
             <a:r>
@@ -4281,7 +3859,7 @@
       </p:sp>
       <p:sp>
         <p:nvSpPr>
-          <p:cNvPr id="25" name="Slide Number Placeholder 0"/>
+          <p:cNvPr id="32" name="Slide Number Placeholder 0"/>
           <p:cNvSpPr>
             <a:spLocks noGrp="1"/>
           </p:cNvSpPr>
@@ -4299,7 +3877,7 @@
           </a:prstGeom>
           <a:extLst>
             <a:ext uri="{C572A759-6A51-4108-AA02-DFA0A04FC94B}">
-              <ma14:wrappingTextBoxFlag xmlns:ma14="http://schemas.microsoft.com/office/mac/drawingml/2011/main" val="0"/>
+              <ma14:wrappingTextBoxFlag xmlns:ma14="http://schemas.microsoft.com/office/mac/drawingml/2011/main" xmlns="" val="0"/>
             </a:ext>
           </a:extLst>
         </p:spPr>
@@ -4317,7 +3895,7 @@
           <a:p>
             <a:pPr algn="r"/>
             <a:fld id="{F7021451-1387-4CA6-816F-3879F97B5CBC}" type="slidenum">
-              <a:rPr b="0" lang="en-US"/>
+              <a:rPr lang="en-US" b="0"/>
               <a:t>11</a:t>
             </a:fld>
             <a:endParaRPr lang="en-US"/>
@@ -4352,9 +3930,11 @@
       <p:sp>
         <p:nvSpPr>
           <p:cNvPr id="2" name="Text 0"/>
-          <p:cNvSpPr/>
+          <p:cNvSpPr>
+            <a:spLocks noGrp="1"/>
+          </p:cNvSpPr>
           <p:nvPr>
-            <p:ph idx="100" type="title" hasCustomPrompt="1"/>
+            <p:ph type="title" idx="100" hasCustomPrompt="1"/>
           </p:nvPr>
         </p:nvSpPr>
         <p:spPr>
@@ -4372,7 +3952,7 @@
           <a:bodyPr wrap="square" lIns="0" tIns="0" rIns="0" bIns="0" rtlCol="0" anchor="ctr"/>
           <a:lstStyle/>
           <a:p>
-            <a:pPr algn="l" indent="0" marL="0">
+            <a:pPr marL="0" indent="0" algn="l">
               <a:buNone/>
             </a:pPr>
             <a:r>
@@ -4384,7 +3964,7 @@
                 <a:ea typeface="+mj-lt" pitchFamily="34" charset="-122"/>
                 <a:cs typeface="+mj-lt" pitchFamily="34" charset="-120"/>
               </a:rPr>
-              <a:t>What we ask of the council tonight</a:t>
+              <a:t>What we ask of the council</a:t>
             </a:r>
             <a:endParaRPr lang="en-US" sz="3200" dirty="0"/>
           </a:p>
@@ -4437,7 +4017,7 @@
           <a:bodyPr wrap="square" lIns="0" tIns="0" rIns="0" bIns="0" rtlCol="0" anchor="ctr"/>
           <a:lstStyle/>
           <a:p>
-            <a:pPr algn="ctr" indent="0" marL="0">
+            <a:pPr marL="0" indent="0" algn="ctr">
               <a:buNone/>
             </a:pPr>
             <a:r>
@@ -4476,7 +4056,7 @@
           <a:bodyPr wrap="square" lIns="0" tIns="0" rIns="0" bIns="0" rtlCol="0" anchor="ctr"/>
           <a:lstStyle/>
           <a:p>
-            <a:pPr indent="0" marL="0">
+            <a:pPr marL="0" indent="0">
               <a:buNone/>
             </a:pPr>
             <a:r>
@@ -4515,7 +4095,7 @@
           <a:bodyPr wrap="square" lIns="0" tIns="0" rIns="0" bIns="0" rtlCol="0" anchor="t"/>
           <a:lstStyle/>
           <a:p>
-            <a:pPr indent="0" marL="0">
+            <a:pPr marL="0" indent="0">
               <a:buNone/>
             </a:pPr>
             <a:r>
@@ -4577,7 +4157,7 @@
           <a:bodyPr wrap="square" lIns="0" tIns="0" rIns="0" bIns="0" rtlCol="0" anchor="ctr"/>
           <a:lstStyle/>
           <a:p>
-            <a:pPr algn="ctr" indent="0" marL="0">
+            <a:pPr marL="0" indent="0" algn="ctr">
               <a:buNone/>
             </a:pPr>
             <a:r>
@@ -4616,7 +4196,7 @@
           <a:bodyPr wrap="square" lIns="0" tIns="0" rIns="0" bIns="0" rtlCol="0" anchor="ctr"/>
           <a:lstStyle/>
           <a:p>
-            <a:pPr indent="0" marL="0">
+            <a:pPr marL="0" indent="0">
               <a:buNone/>
             </a:pPr>
             <a:r>
@@ -4655,7 +4235,7 @@
           <a:bodyPr wrap="square" lIns="0" tIns="0" rIns="0" bIns="0" rtlCol="0" anchor="t"/>
           <a:lstStyle/>
           <a:p>
-            <a:pPr indent="0" marL="0">
+            <a:pPr marL="0" indent="0">
               <a:buNone/>
             </a:pPr>
             <a:r>
@@ -4717,7 +4297,7 @@
           <a:bodyPr wrap="square" lIns="0" tIns="0" rIns="0" bIns="0" rtlCol="0" anchor="ctr"/>
           <a:lstStyle/>
           <a:p>
-            <a:pPr algn="ctr" indent="0" marL="0">
+            <a:pPr marL="0" indent="0" algn="ctr">
               <a:buNone/>
             </a:pPr>
             <a:r>
@@ -4756,7 +4336,7 @@
           <a:bodyPr wrap="square" lIns="0" tIns="0" rIns="0" bIns="0" rtlCol="0" anchor="ctr"/>
           <a:lstStyle/>
           <a:p>
-            <a:pPr indent="0" marL="0">
+            <a:pPr marL="0" indent="0">
               <a:buNone/>
             </a:pPr>
             <a:r>
@@ -4795,7 +4375,7 @@
           <a:bodyPr wrap="square" lIns="0" tIns="0" rIns="0" bIns="0" rtlCol="0" anchor="t"/>
           <a:lstStyle/>
           <a:p>
-            <a:pPr indent="0" marL="0">
+            <a:pPr marL="0" indent="0">
               <a:buNone/>
             </a:pPr>
             <a:r>
@@ -4857,7 +4437,7 @@
           <a:bodyPr wrap="square" lIns="0" tIns="0" rIns="0" bIns="0" rtlCol="0" anchor="ctr"/>
           <a:lstStyle/>
           <a:p>
-            <a:pPr algn="ctr" indent="0" marL="0">
+            <a:pPr marL="0" indent="0" algn="ctr">
               <a:buNone/>
             </a:pPr>
             <a:r>
@@ -4896,7 +4476,7 @@
           <a:bodyPr wrap="square" lIns="0" tIns="0" rIns="0" bIns="0" rtlCol="0" anchor="ctr"/>
           <a:lstStyle/>
           <a:p>
-            <a:pPr indent="0" marL="0">
+            <a:pPr marL="0" indent="0">
               <a:buNone/>
             </a:pPr>
             <a:r>
@@ -4935,7 +4515,7 @@
           <a:bodyPr wrap="square" lIns="0" tIns="0" rIns="0" bIns="0" rtlCol="0" anchor="t"/>
           <a:lstStyle/>
           <a:p>
-            <a:pPr indent="0" marL="0">
+            <a:pPr marL="0" indent="0">
               <a:buNone/>
             </a:pPr>
             <a:r>
@@ -4947,53 +4527,6 @@
               <a:t>At every Mass and in the bulletin, and help families without a phone register at the office.</a:t>
             </a:r>
             <a:endParaRPr lang="en-US" sz="1600" dirty="0"/>
-          </a:p>
-        </p:txBody>
-      </p:sp>
-      <p:sp>
-        <p:nvSpPr>
-          <p:cNvPr id="19" name="Text 17"/>
-          <p:cNvSpPr txBox="1"/>
-          <p:nvPr/>
-        </p:nvSpPr>
-        <p:spPr>
-          <a:xfrm>
-            <a:off x="548640" y="5943600"/>
-            <a:ext cx="10058400" cy="365760"/>
-          </a:xfrm>
-          <a:prstGeom prst="rect">
-            <a:avLst/>
-          </a:prstGeom>
-          <a:noFill/>
-          <a:ln/>
-        </p:spPr>
-        <p:txBody>
-          <a:bodyPr wrap="square" lIns="0" tIns="0" rIns="0" bIns="0" rtlCol="0" anchor="ctr"/>
-          <a:lstStyle/>
-          <a:p>
-            <a:pPr indent="0" marL="0">
-              <a:buNone/>
-            </a:pPr>
-            <a:r>
-              <a:rPr lang="en-US" sz="1500" b="1" dirty="0">
-                <a:solidFill>
-                  <a:schemeClr val="accent2"/>
-                </a:solidFill>
-              </a:rPr>
-              <a:t>Optional: </a:t>
-            </a:r>
-            <a:pPr indent="0" marL="0">
-              <a:buNone/>
-            </a:pPr>
-            <a:r>
-              <a:rPr lang="en-US" sz="1500" dirty="0">
-                <a:solidFill>
-                  <a:schemeClr val="bg2"/>
-                </a:solidFill>
-              </a:rPr>
-              <a:t>support the guadalupemuaan.org domain proposal before the Finance Council.</a:t>
-            </a:r>
-            <a:endParaRPr lang="en-US" sz="1500" dirty="0"/>
           </a:p>
         </p:txBody>
       </p:sp>
@@ -5017,7 +4550,7 @@
           </a:prstGeom>
           <a:extLst>
             <a:ext uri="{C572A759-6A51-4108-AA02-DFA0A04FC94B}">
-              <ma14:wrappingTextBoxFlag xmlns:ma14="http://schemas.microsoft.com/office/mac/drawingml/2011/main" val="0"/>
+              <ma14:wrappingTextBoxFlag xmlns:ma14="http://schemas.microsoft.com/office/mac/drawingml/2011/main" xmlns="" val="0"/>
             </a:ext>
           </a:extLst>
         </p:spPr>
@@ -5035,210 +4568,10 @@
           <a:p>
             <a:pPr algn="r"/>
             <a:fld id="{F7021451-1387-4CA6-816F-3879F97B5CBC}" type="slidenum">
-              <a:rPr b="0" lang="en-US"/>
+              <a:rPr lang="en-US" b="0"/>
               <a:t>12</a:t>
             </a:fld>
             <a:endParaRPr lang="en-US"/>
-          </a:p>
-        </p:txBody>
-      </p:sp>
-    </p:spTree>
-  </p:cSld>
-  <p:clrMapOvr>
-    <a:masterClrMapping/>
-  </p:clrMapOvr>
-</p:sld>
-</file>
-
-<file path=ppt/slides/slide13.xml><?xml version="1.0" encoding="utf-8"?>
-<p:sld xmlns:a="http://schemas.openxmlformats.org/drawingml/2006/main" xmlns:r="http://schemas.openxmlformats.org/officeDocument/2006/relationships" xmlns:p="http://schemas.openxmlformats.org/presentationml/2006/main">
-  <p:cSld name="Slide 13">
-    <p:spTree>
-      <p:nvGrpSpPr>
-        <p:cNvPr id="1" name=""/>
-        <p:cNvGrpSpPr/>
-        <p:nvPr/>
-      </p:nvGrpSpPr>
-      <p:grpSpPr>
-        <a:xfrm>
-          <a:off x="0" y="0"/>
-          <a:ext cx="0" cy="0"/>
-          <a:chOff x="0" y="0"/>
-          <a:chExt cx="0" cy="0"/>
-        </a:xfrm>
-      </p:grpSpPr>
-      <p:sp>
-        <p:nvSpPr>
-          <p:cNvPr id="2" name="Text 0"/>
-          <p:cNvSpPr txBox="1"/>
-          <p:nvPr/>
-        </p:nvSpPr>
-        <p:spPr>
-          <a:xfrm>
-            <a:off x="548640" y="1234440"/>
-            <a:ext cx="5486400" cy="320040"/>
-          </a:xfrm>
-          <a:prstGeom prst="rect">
-            <a:avLst/>
-          </a:prstGeom>
-          <a:noFill/>
-          <a:ln/>
-        </p:spPr>
-        <p:txBody>
-          <a:bodyPr wrap="square" lIns="0" tIns="0" rIns="0" bIns="0" rtlCol="0" anchor="t"/>
-          <a:lstStyle/>
-          <a:p>
-            <a:pPr indent="0" marL="0">
-              <a:buNone/>
-            </a:pPr>
-            <a:r>
-              <a:rPr lang="en-US" sz="1300" b="1" spc="200" kern="0" dirty="0">
-                <a:solidFill>
-                  <a:schemeClr val="accent2"/>
-                </a:solidFill>
-              </a:rPr>
-              <a:t>THANK YOU</a:t>
-            </a:r>
-            <a:endParaRPr lang="en-US" sz="1300" dirty="0"/>
-          </a:p>
-        </p:txBody>
-      </p:sp>
-      <p:sp>
-        <p:nvSpPr>
-          <p:cNvPr id="3" name="Text 0"/>
-          <p:cNvSpPr/>
-          <p:nvPr>
-            <p:ph idx="100" type="title" hasCustomPrompt="1"/>
-          </p:nvPr>
-        </p:nvSpPr>
-        <p:spPr>
-          <a:xfrm>
-            <a:off x="548640" y="1737360"/>
-            <a:ext cx="5486400" cy="1554480"/>
-          </a:xfrm>
-          <a:prstGeom prst="rect">
-            <a:avLst/>
-          </a:prstGeom>
-          <a:noFill/>
-          <a:ln/>
-        </p:spPr>
-        <p:txBody>
-          <a:bodyPr wrap="square" lIns="0" tIns="0" rIns="0" bIns="0" rtlCol="0" anchor="t"/>
-          <a:lstStyle/>
-          <a:p>
-            <a:pPr algn="l" indent="0" marL="0">
-              <a:buNone/>
-            </a:pPr>
-            <a:r>
-              <a:rPr lang="en-US" sz="4000" b="1" dirty="0">
-                <a:solidFill>
-                  <a:schemeClr val="bg1"/>
-                </a:solidFill>
-                <a:latin typeface="+mj-lt" pitchFamily="34" charset="0"/>
-                <a:ea typeface="+mj-lt" pitchFamily="34" charset="-122"/>
-                <a:cs typeface="+mj-lt" pitchFamily="34" charset="-120"/>
-              </a:rPr>
-              <a:t>Daghang salamat sa inyong pagpaminaw</a:t>
-            </a:r>
-            <a:endParaRPr lang="en-US" sz="4000" dirty="0"/>
-          </a:p>
-        </p:txBody>
-      </p:sp>
-      <p:sp>
-        <p:nvSpPr>
-          <p:cNvPr id="4" name="Text 0"/>
-          <p:cNvSpPr/>
-          <p:nvPr>
-            <p:ph idx="101" type="body" hasCustomPrompt="1"/>
-          </p:nvPr>
-        </p:nvSpPr>
-        <p:spPr>
-          <a:xfrm>
-            <a:off x="548640" y="3429000"/>
-            <a:ext cx="5486400" cy="1280160"/>
-          </a:xfrm>
-          <a:prstGeom prst="rect">
-            <a:avLst/>
-          </a:prstGeom>
-          <a:noFill/>
-          <a:ln/>
-        </p:spPr>
-        <p:txBody>
-          <a:bodyPr wrap="square" lIns="0" tIns="0" rIns="0" bIns="0" rtlCol="0" anchor="t"/>
-          <a:lstStyle/>
-          <a:p>
-            <a:pPr algn="l" indent="0" marL="0">
-              <a:buNone/>
-            </a:pPr>
-            <a:r>
-              <a:rPr lang="en-US" sz="1800" dirty="0">
-                <a:solidFill>
-                  <a:schemeClr val="bg2"/>
-                </a:solidFill>
-              </a:rPr>
-              <a:t>Questions, and a short live demo if there is time</a:t>
-            </a:r>
-            <a:endParaRPr lang="en-US" sz="1800" dirty="0"/>
-          </a:p>
-        </p:txBody>
-      </p:sp>
-      <p:pic>
-        <p:nvPicPr>
-          <p:cNvPr id="5" name="Parish community photo" descr="C:\Users\Dave\AppData\Local\Temp\claude\E--DEVELOPER--WEB--PARISH-MEMBERS-REGISTRY\9cfa56b2-76b0-4da3-8bb7-a6a7d55b9d8c\scratchpad\img\people.png">    </p:cNvPr>
-          <p:cNvPicPr>
-            <a:picLocks noChangeAspect="1"/>
-          </p:cNvPicPr>
-          <p:nvPr/>
-        </p:nvPicPr>
-        <p:blipFill>
-          <a:blip r:embed="rId1"/>
-          <a:stretch>
-            <a:fillRect/>
-          </a:stretch>
-        </p:blipFill>
-        <p:spPr>
-          <a:xfrm>
-            <a:off x="6355080" y="1463040"/>
-            <a:ext cx="5279180" cy="3913632"/>
-          </a:xfrm>
-          <a:prstGeom prst="rect">
-            <a:avLst/>
-          </a:prstGeom>
-        </p:spPr>
-      </p:pic>
-      <p:sp>
-        <p:nvSpPr>
-          <p:cNvPr id="6" name="Text 3"/>
-          <p:cNvSpPr txBox="1"/>
-          <p:nvPr/>
-        </p:nvSpPr>
-        <p:spPr>
-          <a:xfrm>
-            <a:off x="6355080" y="5468112"/>
-            <a:ext cx="5285232" cy="256032"/>
-          </a:xfrm>
-          <a:prstGeom prst="rect">
-            <a:avLst/>
-          </a:prstGeom>
-          <a:noFill/>
-          <a:ln/>
-        </p:spPr>
-        <p:txBody>
-          <a:bodyPr wrap="square" lIns="0" tIns="0" rIns="0" bIns="0" rtlCol="0" anchor="t"/>
-          <a:lstStyle/>
-          <a:p>
-            <a:pPr algn="r" indent="0" marL="0">
-              <a:buNone/>
-            </a:pPr>
-            <a:r>
-              <a:rPr lang="en-US" sz="1000" i="1" dirty="0">
-                <a:solidFill>
-                  <a:schemeClr val="accent4"/>
-                </a:solidFill>
-              </a:rPr>
-              <a:t>Built for our parish, and free for any parish to use</a:t>
-            </a:r>
-            <a:endParaRPr lang="en-US" sz="1000" dirty="0"/>
           </a:p>
         </p:txBody>
       </p:sp>
@@ -5270,9 +4603,11 @@
       <p:sp>
         <p:nvSpPr>
           <p:cNvPr id="2" name="Text 1"/>
-          <p:cNvSpPr/>
+          <p:cNvSpPr>
+            <a:spLocks noGrp="1"/>
+          </p:cNvSpPr>
           <p:nvPr>
-            <p:ph idx="101" type="title" hasCustomPrompt="1"/>
+            <p:ph type="title" idx="101" hasCustomPrompt="1"/>
           </p:nvPr>
         </p:nvSpPr>
         <p:spPr>
@@ -5290,7 +4625,7 @@
           <a:bodyPr wrap="square" lIns="0" tIns="0" rIns="0" bIns="0" rtlCol="0" anchor="ctr"/>
           <a:lstStyle/>
           <a:p>
-            <a:pPr algn="l" indent="0" marL="0">
+            <a:pPr marL="0" indent="0" algn="l">
               <a:buNone/>
             </a:pPr>
             <a:r>
@@ -5378,225 +4713,7 @@
       </p:sp>
       <p:pic>
         <p:nvPicPr>
-          <p:cNvPr id="6" name="Today icon" descr="preencoded.png">    </p:cNvPr>
-          <p:cNvPicPr>
-            <a:picLocks noChangeAspect="1"/>
-          </p:cNvPicPr>
-          <p:nvPr/>
-        </p:nvPicPr>
-        <p:blipFill>
-          <a:blip r:embed="rId1"/>
-          <a:stretch>
-            <a:fillRect/>
-          </a:stretch>
-        </p:blipFill>
-        <p:spPr>
-          <a:xfrm>
-            <a:off x="1005840" y="1874520"/>
-            <a:ext cx="274320" cy="274320"/>
-          </a:xfrm>
-          <a:prstGeom prst="rect">
-            <a:avLst/>
-          </a:prstGeom>
-        </p:spPr>
-      </p:pic>
-      <p:sp>
-        <p:nvSpPr>
-          <p:cNvPr id="7" name="Registry circle"/>
-          <p:cNvSpPr/>
-          <p:nvPr/>
-        </p:nvSpPr>
-        <p:spPr>
-          <a:xfrm>
-            <a:off x="6933895" y="1737360"/>
-            <a:ext cx="548640" cy="548640"/>
-          </a:xfrm>
-          <a:prstGeom prst="ellipse">
-            <a:avLst/>
-          </a:prstGeom>
-          <a:solidFill>
-            <a:schemeClr val="accent1"/>
-          </a:solidFill>
-          <a:ln/>
-        </p:spPr>
-      </p:sp>
-      <p:pic>
-        <p:nvPicPr>
-          <p:cNvPr id="8" name="Registry icon" descr="preencoded.png">    </p:cNvPr>
-          <p:cNvPicPr>
-            <a:picLocks noChangeAspect="1"/>
-          </p:cNvPicPr>
-          <p:nvPr/>
-        </p:nvPicPr>
-        <p:blipFill>
-          <a:blip r:embed="rId2"/>
-          <a:stretch>
-            <a:fillRect/>
-          </a:stretch>
-        </p:blipFill>
-        <p:spPr>
-          <a:xfrm>
-            <a:off x="7071055" y="1874520"/>
-            <a:ext cx="274320" cy="274320"/>
-          </a:xfrm>
-          <a:prstGeom prst="rect">
-            <a:avLst/>
-          </a:prstGeom>
-        </p:spPr>
-      </p:pic>
-      <p:sp>
-        <p:nvSpPr>
-          <p:cNvPr id="9" name="Text 5"/>
-          <p:cNvSpPr txBox="1"/>
-          <p:nvPr/>
-        </p:nvSpPr>
-        <p:spPr>
-          <a:xfrm>
-            <a:off x="1600200" y="1737360"/>
-            <a:ext cx="3657600" cy="548640"/>
-          </a:xfrm>
-          <a:prstGeom prst="rect">
-            <a:avLst/>
-          </a:prstGeom>
-          <a:noFill/>
-          <a:ln/>
-        </p:spPr>
-        <p:txBody>
-          <a:bodyPr wrap="square" lIns="0" tIns="0" rIns="0" bIns="0" rtlCol="0" anchor="ctr"/>
-          <a:lstStyle/>
-          <a:p>
-            <a:pPr indent="0" marL="0">
-              <a:buNone/>
-            </a:pPr>
-            <a:r>
-              <a:rPr lang="en-US" sz="2200" b="1" dirty="0">
-                <a:solidFill>
-                  <a:schemeClr val="accent3"/>
-                </a:solidFill>
-                <a:latin typeface="+mj-lt" pitchFamily="34" charset="0"/>
-                <a:ea typeface="+mj-lt" pitchFamily="34" charset="-122"/>
-                <a:cs typeface="+mj-lt" pitchFamily="34" charset="-120"/>
-              </a:rPr>
-              <a:t>Today</a:t>
-            </a:r>
-            <a:endParaRPr lang="en-US" sz="2200" dirty="0"/>
-          </a:p>
-        </p:txBody>
-      </p:sp>
-      <p:sp>
-        <p:nvSpPr>
-          <p:cNvPr id="10" name="Text 6"/>
-          <p:cNvSpPr txBox="1"/>
-          <p:nvPr/>
-        </p:nvSpPr>
-        <p:spPr>
-          <a:xfrm>
-            <a:off x="7665415" y="1737360"/>
-            <a:ext cx="3657600" cy="548640"/>
-          </a:xfrm>
-          <a:prstGeom prst="rect">
-            <a:avLst/>
-          </a:prstGeom>
-          <a:noFill/>
-          <a:ln/>
-        </p:spPr>
-        <p:txBody>
-          <a:bodyPr wrap="square" lIns="0" tIns="0" rIns="0" bIns="0" rtlCol="0" anchor="ctr"/>
-          <a:lstStyle/>
-          <a:p>
-            <a:pPr indent="0" marL="0">
-              <a:buNone/>
-            </a:pPr>
-            <a:r>
-              <a:rPr lang="en-US" sz="2200" b="1" dirty="0">
-                <a:solidFill>
-                  <a:schemeClr val="accent1"/>
-                </a:solidFill>
-                <a:latin typeface="+mj-lt" pitchFamily="34" charset="0"/>
-                <a:ea typeface="+mj-lt" pitchFamily="34" charset="-122"/>
-                <a:cs typeface="+mj-lt" pitchFamily="34" charset="-120"/>
-              </a:rPr>
-              <a:t>With the registry</a:t>
-            </a:r>
-            <a:endParaRPr lang="en-US" sz="2200" dirty="0"/>
-          </a:p>
-        </p:txBody>
-      </p:sp>
-      <p:sp>
-        <p:nvSpPr>
-          <p:cNvPr id="11" name="Text 7"/>
-          <p:cNvSpPr txBox="1"/>
-          <p:nvPr/>
-        </p:nvSpPr>
-        <p:spPr>
-          <a:xfrm>
-            <a:off x="914400" y="2560320"/>
-            <a:ext cx="4297680" cy="685800"/>
-          </a:xfrm>
-          <a:prstGeom prst="rect">
-            <a:avLst/>
-          </a:prstGeom>
-          <a:noFill/>
-          <a:ln/>
-        </p:spPr>
-        <p:txBody>
-          <a:bodyPr wrap="square" lIns="0" tIns="0" rIns="0" bIns="0" rtlCol="0" anchor="ctr"/>
-          <a:lstStyle/>
-          <a:p>
-            <a:pPr indent="0" marL="0">
-              <a:buNone/>
-            </a:pPr>
-            <a:r>
-              <a:rPr lang="en-US" sz="1500" dirty="0">
-                <a:solidFill>
-                  <a:schemeClr val="tx1"/>
-                </a:solidFill>
-              </a:rPr>
-              <a:t>Census sheets are filled in by hand and retyped every year</a:t>
-            </a:r>
-            <a:endParaRPr lang="en-US" sz="1500" dirty="0"/>
-          </a:p>
-        </p:txBody>
-      </p:sp>
-      <p:sp>
-        <p:nvSpPr>
-          <p:cNvPr id="12" name="Text 8"/>
-          <p:cNvSpPr txBox="1"/>
-          <p:nvPr/>
-        </p:nvSpPr>
-        <p:spPr>
-          <a:xfrm>
-            <a:off x="6979615" y="2560320"/>
-            <a:ext cx="4297680" cy="685800"/>
-          </a:xfrm>
-          <a:prstGeom prst="rect">
-            <a:avLst/>
-          </a:prstGeom>
-          <a:noFill/>
-          <a:ln/>
-        </p:spPr>
-        <p:txBody>
-          <a:bodyPr wrap="square" lIns="0" tIns="0" rIns="0" bIns="0" rtlCol="0" anchor="ctr"/>
-          <a:lstStyle/>
-          <a:p>
-            <a:pPr indent="0" marL="0">
-              <a:buNone/>
-            </a:pPr>
-            <a:r>
-              <a:rPr lang="en-US" sz="1500" b="1" dirty="0">
-                <a:solidFill>
-                  <a:schemeClr val="tx2"/>
-                </a:solidFill>
-              </a:rPr>
-              <a:t>Census forms print pre-filled, and families can answer online</a:t>
-            </a:r>
-            <a:endParaRPr lang="en-US" sz="1500" dirty="0"/>
-          </a:p>
-        </p:txBody>
-      </p:sp>
-      <p:pic>
-        <p:nvPicPr>
-          <p:cNvPr id="13" name="Arrow 1" descr="preencoded.png">    </p:cNvPr>
+          <p:cNvPr id="6" name="Today icon" descr="preencoded.png"/>
           <p:cNvPicPr>
             <a:picLocks noChangeAspect="1"/>
           </p:cNvPicPr>
@@ -5610,8 +4727,8 @@
         </p:blipFill>
         <p:spPr>
           <a:xfrm>
-            <a:off x="5940400" y="2743200"/>
-            <a:ext cx="310896" cy="310896"/>
+            <a:off x="1005840" y="1874520"/>
+            <a:ext cx="274320" cy="274320"/>
           </a:xfrm>
           <a:prstGeom prst="rect">
             <a:avLst/>
@@ -5620,79 +4737,27 @@
       </p:pic>
       <p:sp>
         <p:nvSpPr>
-          <p:cNvPr id="14" name="Text 9"/>
-          <p:cNvSpPr txBox="1"/>
-          <p:nvPr/>
-        </p:nvSpPr>
-        <p:spPr>
-          <a:xfrm>
-            <a:off x="914400" y="3401568"/>
-            <a:ext cx="4297680" cy="685800"/>
-          </a:xfrm>
-          <a:prstGeom prst="rect">
-            <a:avLst/>
-          </a:prstGeom>
-          <a:noFill/>
-          <a:ln/>
-        </p:spPr>
-        <p:txBody>
-          <a:bodyPr wrap="square" lIns="0" tIns="0" rIns="0" bIns="0" rtlCol="0" anchor="ctr"/>
-          <a:lstStyle/>
-          <a:p>
-            <a:pPr indent="0" marL="0">
-              <a:buNone/>
-            </a:pPr>
-            <a:r>
-              <a:rPr lang="en-US" sz="1500" dirty="0">
-                <a:solidFill>
-                  <a:schemeClr val="tx1"/>
-                </a:solidFill>
-              </a:rPr>
-              <a:t>Family records sit in notebooks and spreadsheets in different hands</a:t>
-            </a:r>
-            <a:endParaRPr lang="en-US" sz="1500" dirty="0"/>
-          </a:p>
-        </p:txBody>
-      </p:sp>
-      <p:sp>
-        <p:nvSpPr>
-          <p:cNvPr id="15" name="Text 10"/>
-          <p:cNvSpPr txBox="1"/>
-          <p:nvPr/>
-        </p:nvSpPr>
-        <p:spPr>
-          <a:xfrm>
-            <a:off x="6979615" y="3401568"/>
-            <a:ext cx="4297680" cy="685800"/>
-          </a:xfrm>
-          <a:prstGeom prst="rect">
-            <a:avLst/>
-          </a:prstGeom>
-          <a:noFill/>
-          <a:ln/>
-        </p:spPr>
-        <p:txBody>
-          <a:bodyPr wrap="square" lIns="0" tIns="0" rIns="0" bIns="0" rtlCol="0" anchor="ctr"/>
-          <a:lstStyle/>
-          <a:p>
-            <a:pPr indent="0" marL="0">
-              <a:buNone/>
-            </a:pPr>
-            <a:r>
-              <a:rPr lang="en-US" sz="1500" b="1" dirty="0">
-                <a:solidFill>
-                  <a:schemeClr val="tx2"/>
-                </a:solidFill>
-              </a:rPr>
-              <a:t>Every household and member is in one searchable registry</a:t>
-            </a:r>
-            <a:endParaRPr lang="en-US" sz="1500" dirty="0"/>
-          </a:p>
-        </p:txBody>
+          <p:cNvPr id="7" name="Registry circle"/>
+          <p:cNvSpPr/>
+          <p:nvPr/>
+        </p:nvSpPr>
+        <p:spPr>
+          <a:xfrm>
+            <a:off x="6933895" y="1737360"/>
+            <a:ext cx="548640" cy="548640"/>
+          </a:xfrm>
+          <a:prstGeom prst="ellipse">
+            <a:avLst/>
+          </a:prstGeom>
+          <a:solidFill>
+            <a:schemeClr val="accent1"/>
+          </a:solidFill>
+          <a:ln/>
+        </p:spPr>
       </p:sp>
       <p:pic>
         <p:nvPicPr>
-          <p:cNvPr id="16" name="Arrow 2" descr="preencoded.png">    </p:cNvPr>
+          <p:cNvPr id="8" name="Registry icon" descr="preencoded.png"/>
           <p:cNvPicPr>
             <a:picLocks noChangeAspect="1"/>
           </p:cNvPicPr>
@@ -5706,8 +4771,8 @@
         </p:blipFill>
         <p:spPr>
           <a:xfrm>
-            <a:off x="5940400" y="3584448"/>
-            <a:ext cx="310896" cy="310896"/>
+            <a:off x="7071055" y="1874520"/>
+            <a:ext cx="274320" cy="274320"/>
           </a:xfrm>
           <a:prstGeom prst="rect">
             <a:avLst/>
@@ -5716,13 +4781,91 @@
       </p:pic>
       <p:sp>
         <p:nvSpPr>
-          <p:cNvPr id="17" name="Text 11"/>
+          <p:cNvPr id="9" name="Text 5"/>
           <p:cNvSpPr txBox="1"/>
           <p:nvPr/>
         </p:nvSpPr>
         <p:spPr>
           <a:xfrm>
-            <a:off x="914400" y="4242816"/>
+            <a:off x="1600200" y="1737360"/>
+            <a:ext cx="3657600" cy="548640"/>
+          </a:xfrm>
+          <a:prstGeom prst="rect">
+            <a:avLst/>
+          </a:prstGeom>
+          <a:noFill/>
+          <a:ln/>
+        </p:spPr>
+        <p:txBody>
+          <a:bodyPr wrap="square" lIns="0" tIns="0" rIns="0" bIns="0" rtlCol="0" anchor="ctr"/>
+          <a:lstStyle/>
+          <a:p>
+            <a:pPr marL="0" indent="0">
+              <a:buNone/>
+            </a:pPr>
+            <a:r>
+              <a:rPr lang="en-US" sz="2200" b="1" dirty="0">
+                <a:solidFill>
+                  <a:schemeClr val="accent3"/>
+                </a:solidFill>
+                <a:latin typeface="+mj-lt" pitchFamily="34" charset="0"/>
+                <a:ea typeface="+mj-lt" pitchFamily="34" charset="-122"/>
+                <a:cs typeface="+mj-lt" pitchFamily="34" charset="-120"/>
+              </a:rPr>
+              <a:t>Today</a:t>
+            </a:r>
+            <a:endParaRPr lang="en-US" sz="2200" dirty="0"/>
+          </a:p>
+        </p:txBody>
+      </p:sp>
+      <p:sp>
+        <p:nvSpPr>
+          <p:cNvPr id="10" name="Text 6"/>
+          <p:cNvSpPr txBox="1"/>
+          <p:nvPr/>
+        </p:nvSpPr>
+        <p:spPr>
+          <a:xfrm>
+            <a:off x="7665415" y="1737360"/>
+            <a:ext cx="3657600" cy="548640"/>
+          </a:xfrm>
+          <a:prstGeom prst="rect">
+            <a:avLst/>
+          </a:prstGeom>
+          <a:noFill/>
+          <a:ln/>
+        </p:spPr>
+        <p:txBody>
+          <a:bodyPr wrap="square" lIns="0" tIns="0" rIns="0" bIns="0" rtlCol="0" anchor="ctr"/>
+          <a:lstStyle/>
+          <a:p>
+            <a:pPr marL="0" indent="0">
+              <a:buNone/>
+            </a:pPr>
+            <a:r>
+              <a:rPr lang="en-US" sz="2200" b="1" dirty="0">
+                <a:solidFill>
+                  <a:schemeClr val="accent1"/>
+                </a:solidFill>
+                <a:latin typeface="+mj-lt" pitchFamily="34" charset="0"/>
+                <a:ea typeface="+mj-lt" pitchFamily="34" charset="-122"/>
+                <a:cs typeface="+mj-lt" pitchFamily="34" charset="-120"/>
+              </a:rPr>
+              <a:t>With the registry</a:t>
+            </a:r>
+            <a:endParaRPr lang="en-US" sz="2200" dirty="0"/>
+          </a:p>
+        </p:txBody>
+      </p:sp>
+      <p:sp>
+        <p:nvSpPr>
+          <p:cNvPr id="11" name="Text 7"/>
+          <p:cNvSpPr txBox="1"/>
+          <p:nvPr/>
+        </p:nvSpPr>
+        <p:spPr>
+          <a:xfrm>
+            <a:off x="914400" y="2560320"/>
             <a:ext cx="4297680" cy="685800"/>
           </a:xfrm>
           <a:prstGeom prst="rect">
@@ -5735,7 +4878,7 @@
           <a:bodyPr wrap="square" lIns="0" tIns="0" rIns="0" bIns="0" rtlCol="0" anchor="ctr"/>
           <a:lstStyle/>
           <a:p>
-            <a:pPr indent="0" marL="0">
+            <a:pPr marL="0" indent="0">
               <a:buNone/>
             </a:pPr>
             <a:r>
@@ -5744,7 +4887,7 @@
                   <a:schemeClr val="tx1"/>
                 </a:solidFill>
               </a:rPr>
-              <a:t>"Who still needs Confirmation?" takes days of counting</a:t>
+              <a:t>Census sheets are filled in by hand and retyped every year</a:t>
             </a:r>
             <a:endParaRPr lang="en-US" sz="1500" dirty="0"/>
           </a:p>
@@ -5752,13 +4895,13 @@
       </p:sp>
       <p:sp>
         <p:nvSpPr>
-          <p:cNvPr id="18" name="Text 12"/>
+          <p:cNvPr id="12" name="Text 8"/>
           <p:cNvSpPr txBox="1"/>
           <p:nvPr/>
         </p:nvSpPr>
         <p:spPr>
           <a:xfrm>
-            <a:off x="6979615" y="4242816"/>
+            <a:off x="6979615" y="2560320"/>
             <a:ext cx="4297680" cy="685800"/>
           </a:xfrm>
           <a:prstGeom prst="rect">
@@ -5771,7 +4914,7 @@
           <a:bodyPr wrap="square" lIns="0" tIns="0" rIns="0" bIns="0" rtlCol="0" anchor="ctr"/>
           <a:lstStyle/>
           <a:p>
-            <a:pPr indent="0" marL="0">
+            <a:pPr marL="0" indent="0">
               <a:buNone/>
             </a:pPr>
             <a:r>
@@ -5780,7 +4923,7 @@
                   <a:schemeClr val="tx2"/>
                 </a:solidFill>
               </a:rPr>
-              <a:t>The answer takes seconds, GKK by GKK</a:t>
+              <a:t>Census forms print pre-filled, and families can answer online</a:t>
             </a:r>
             <a:endParaRPr lang="en-US" sz="1500" dirty="0"/>
           </a:p>
@@ -5788,7 +4931,7 @@
       </p:sp>
       <p:pic>
         <p:nvPicPr>
-          <p:cNvPr id="19" name="Arrow 3" descr="preencoded.png">    </p:cNvPr>
+          <p:cNvPr id="13" name="Arrow 1" descr="preencoded.png"/>
           <p:cNvPicPr>
             <a:picLocks noChangeAspect="1"/>
           </p:cNvPicPr>
@@ -5802,7 +4945,7 @@
         </p:blipFill>
         <p:spPr>
           <a:xfrm>
-            <a:off x="5940400" y="4425696"/>
+            <a:off x="5940400" y="2743200"/>
             <a:ext cx="310896" cy="310896"/>
           </a:xfrm>
           <a:prstGeom prst="rect">
@@ -5812,13 +4955,13 @@
       </p:pic>
       <p:sp>
         <p:nvSpPr>
-          <p:cNvPr id="20" name="Text 13"/>
+          <p:cNvPr id="14" name="Text 9"/>
           <p:cNvSpPr txBox="1"/>
           <p:nvPr/>
         </p:nvSpPr>
         <p:spPr>
           <a:xfrm>
-            <a:off x="914400" y="5084064"/>
+            <a:off x="914400" y="3401568"/>
             <a:ext cx="4297680" cy="685800"/>
           </a:xfrm>
           <a:prstGeom prst="rect">
@@ -5831,7 +4974,7 @@
           <a:bodyPr wrap="square" lIns="0" tIns="0" rIns="0" bIns="0" rtlCol="0" anchor="ctr"/>
           <a:lstStyle/>
           <a:p>
-            <a:pPr indent="0" marL="0">
+            <a:pPr marL="0" indent="0">
               <a:buNone/>
             </a:pPr>
             <a:r>
@@ -5840,7 +4983,7 @@
                   <a:schemeClr val="tx1"/>
                 </a:solidFill>
               </a:rPr>
-              <a:t>Families must come to the office to register or ask for a certificate</a:t>
+              <a:t>Family records sit in notebooks and spreadsheets in different hands</a:t>
             </a:r>
             <a:endParaRPr lang="en-US" sz="1500" dirty="0"/>
           </a:p>
@@ -5848,13 +4991,13 @@
       </p:sp>
       <p:sp>
         <p:nvSpPr>
-          <p:cNvPr id="21" name="Text 14"/>
+          <p:cNvPr id="15" name="Text 10"/>
           <p:cNvSpPr txBox="1"/>
           <p:nvPr/>
         </p:nvSpPr>
         <p:spPr>
           <a:xfrm>
-            <a:off x="6979615" y="5084064"/>
+            <a:off x="6979615" y="3401568"/>
             <a:ext cx="4297680" cy="685800"/>
           </a:xfrm>
           <a:prstGeom prst="rect">
@@ -5867,7 +5010,7 @@
           <a:bodyPr wrap="square" lIns="0" tIns="0" rIns="0" bIns="0" rtlCol="0" anchor="ctr"/>
           <a:lstStyle/>
           <a:p>
-            <a:pPr indent="0" marL="0">
+            <a:pPr marL="0" indent="0">
               <a:buNone/>
             </a:pPr>
             <a:r>
@@ -5876,7 +5019,7 @@
                   <a:schemeClr val="tx2"/>
                 </a:solidFill>
               </a:rPr>
-              <a:t>They register and send requests from a phone, with a reference number</a:t>
+              <a:t>Every household and member is in one searchable registry</a:t>
             </a:r>
             <a:endParaRPr lang="en-US" sz="1500" dirty="0"/>
           </a:p>
@@ -5884,14 +5027,206 @@
       </p:sp>
       <p:pic>
         <p:nvPicPr>
-          <p:cNvPr id="22" name="Arrow 4" descr="preencoded.png">    </p:cNvPr>
+          <p:cNvPr id="16" name="Arrow 2" descr="preencoded.png"/>
           <p:cNvPicPr>
             <a:picLocks noChangeAspect="1"/>
           </p:cNvPicPr>
           <p:nvPr/>
         </p:nvPicPr>
         <p:blipFill>
-          <a:blip r:embed="rId6"/>
+          <a:blip r:embed="rId5"/>
+          <a:stretch>
+            <a:fillRect/>
+          </a:stretch>
+        </p:blipFill>
+        <p:spPr>
+          <a:xfrm>
+            <a:off x="5940400" y="3584448"/>
+            <a:ext cx="310896" cy="310896"/>
+          </a:xfrm>
+          <a:prstGeom prst="rect">
+            <a:avLst/>
+          </a:prstGeom>
+        </p:spPr>
+      </p:pic>
+      <p:sp>
+        <p:nvSpPr>
+          <p:cNvPr id="17" name="Text 11"/>
+          <p:cNvSpPr txBox="1"/>
+          <p:nvPr/>
+        </p:nvSpPr>
+        <p:spPr>
+          <a:xfrm>
+            <a:off x="914400" y="4242816"/>
+            <a:ext cx="4297680" cy="685800"/>
+          </a:xfrm>
+          <a:prstGeom prst="rect">
+            <a:avLst/>
+          </a:prstGeom>
+          <a:noFill/>
+          <a:ln/>
+        </p:spPr>
+        <p:txBody>
+          <a:bodyPr wrap="square" lIns="0" tIns="0" rIns="0" bIns="0" rtlCol="0" anchor="ctr"/>
+          <a:lstStyle/>
+          <a:p>
+            <a:pPr marL="0" indent="0">
+              <a:buNone/>
+            </a:pPr>
+            <a:r>
+              <a:rPr lang="en-US" sz="1500" dirty="0">
+                <a:solidFill>
+                  <a:schemeClr val="tx1"/>
+                </a:solidFill>
+              </a:rPr>
+              <a:t>"Who still needs Confirmation?" takes days of counting</a:t>
+            </a:r>
+            <a:endParaRPr lang="en-US" sz="1500" dirty="0"/>
+          </a:p>
+        </p:txBody>
+      </p:sp>
+      <p:sp>
+        <p:nvSpPr>
+          <p:cNvPr id="18" name="Text 12"/>
+          <p:cNvSpPr txBox="1"/>
+          <p:nvPr/>
+        </p:nvSpPr>
+        <p:spPr>
+          <a:xfrm>
+            <a:off x="6979615" y="4242816"/>
+            <a:ext cx="4297680" cy="685800"/>
+          </a:xfrm>
+          <a:prstGeom prst="rect">
+            <a:avLst/>
+          </a:prstGeom>
+          <a:noFill/>
+          <a:ln/>
+        </p:spPr>
+        <p:txBody>
+          <a:bodyPr wrap="square" lIns="0" tIns="0" rIns="0" bIns="0" rtlCol="0" anchor="ctr"/>
+          <a:lstStyle/>
+          <a:p>
+            <a:pPr marL="0" indent="0">
+              <a:buNone/>
+            </a:pPr>
+            <a:r>
+              <a:rPr lang="en-US" sz="1500" b="1" dirty="0">
+                <a:solidFill>
+                  <a:schemeClr val="tx2"/>
+                </a:solidFill>
+              </a:rPr>
+              <a:t>The answer takes seconds, GKK by GKK</a:t>
+            </a:r>
+            <a:endParaRPr lang="en-US" sz="1500" dirty="0"/>
+          </a:p>
+        </p:txBody>
+      </p:sp>
+      <p:pic>
+        <p:nvPicPr>
+          <p:cNvPr id="19" name="Arrow 3" descr="preencoded.png"/>
+          <p:cNvPicPr>
+            <a:picLocks noChangeAspect="1"/>
+          </p:cNvPicPr>
+          <p:nvPr/>
+        </p:nvPicPr>
+        <p:blipFill>
+          <a:blip r:embed="rId5"/>
+          <a:stretch>
+            <a:fillRect/>
+          </a:stretch>
+        </p:blipFill>
+        <p:spPr>
+          <a:xfrm>
+            <a:off x="5940400" y="4425696"/>
+            <a:ext cx="310896" cy="310896"/>
+          </a:xfrm>
+          <a:prstGeom prst="rect">
+            <a:avLst/>
+          </a:prstGeom>
+        </p:spPr>
+      </p:pic>
+      <p:sp>
+        <p:nvSpPr>
+          <p:cNvPr id="20" name="Text 13"/>
+          <p:cNvSpPr txBox="1"/>
+          <p:nvPr/>
+        </p:nvSpPr>
+        <p:spPr>
+          <a:xfrm>
+            <a:off x="914400" y="5084064"/>
+            <a:ext cx="4297680" cy="685800"/>
+          </a:xfrm>
+          <a:prstGeom prst="rect">
+            <a:avLst/>
+          </a:prstGeom>
+          <a:noFill/>
+          <a:ln/>
+        </p:spPr>
+        <p:txBody>
+          <a:bodyPr wrap="square" lIns="0" tIns="0" rIns="0" bIns="0" rtlCol="0" anchor="ctr"/>
+          <a:lstStyle/>
+          <a:p>
+            <a:pPr marL="0" indent="0">
+              <a:buNone/>
+            </a:pPr>
+            <a:r>
+              <a:rPr lang="en-US" sz="1500" dirty="0">
+                <a:solidFill>
+                  <a:schemeClr val="tx1"/>
+                </a:solidFill>
+              </a:rPr>
+              <a:t>Families must come to the office to register or ask for a certificate</a:t>
+            </a:r>
+            <a:endParaRPr lang="en-US" sz="1500" dirty="0"/>
+          </a:p>
+        </p:txBody>
+      </p:sp>
+      <p:sp>
+        <p:nvSpPr>
+          <p:cNvPr id="21" name="Text 14"/>
+          <p:cNvSpPr txBox="1"/>
+          <p:nvPr/>
+        </p:nvSpPr>
+        <p:spPr>
+          <a:xfrm>
+            <a:off x="6979615" y="5084064"/>
+            <a:ext cx="4297680" cy="685800"/>
+          </a:xfrm>
+          <a:prstGeom prst="rect">
+            <a:avLst/>
+          </a:prstGeom>
+          <a:noFill/>
+          <a:ln/>
+        </p:spPr>
+        <p:txBody>
+          <a:bodyPr wrap="square" lIns="0" tIns="0" rIns="0" bIns="0" rtlCol="0" anchor="ctr"/>
+          <a:lstStyle/>
+          <a:p>
+            <a:pPr marL="0" indent="0">
+              <a:buNone/>
+            </a:pPr>
+            <a:r>
+              <a:rPr lang="en-US" sz="1500" b="1" dirty="0">
+                <a:solidFill>
+                  <a:schemeClr val="tx2"/>
+                </a:solidFill>
+              </a:rPr>
+              <a:t>They register and send requests from a phone, with a reference number</a:t>
+            </a:r>
+            <a:endParaRPr lang="en-US" sz="1500" dirty="0"/>
+          </a:p>
+        </p:txBody>
+      </p:sp>
+      <p:pic>
+        <p:nvPicPr>
+          <p:cNvPr id="22" name="Arrow 4" descr="preencoded.png"/>
+          <p:cNvPicPr>
+            <a:picLocks noChangeAspect="1"/>
+          </p:cNvPicPr>
+          <p:nvPr/>
+        </p:nvPicPr>
+        <p:blipFill>
+          <a:blip r:embed="rId5"/>
           <a:stretch>
             <a:fillRect/>
           </a:stretch>
@@ -5926,7 +5261,7 @@
           </a:prstGeom>
           <a:extLst>
             <a:ext uri="{C572A759-6A51-4108-AA02-DFA0A04FC94B}">
-              <ma14:wrappingTextBoxFlag xmlns:ma14="http://schemas.microsoft.com/office/mac/drawingml/2011/main" val="0"/>
+              <ma14:wrappingTextBoxFlag xmlns:ma14="http://schemas.microsoft.com/office/mac/drawingml/2011/main" xmlns="" val="0"/>
             </a:ext>
           </a:extLst>
         </p:spPr>
@@ -5944,7 +5279,7 @@
           <a:p>
             <a:pPr algn="r"/>
             <a:fld id="{F7021451-1387-4CA6-816F-3879F97B5CBC}" type="slidenum">
-              <a:rPr b="0" lang="en-US"/>
+              <a:rPr lang="en-US" b="0"/>
               <a:t>2</a:t>
             </a:fld>
             <a:endParaRPr lang="en-US"/>
@@ -5979,9 +5314,11 @@
       <p:sp>
         <p:nvSpPr>
           <p:cNvPr id="2" name="Text 1"/>
-          <p:cNvSpPr/>
+          <p:cNvSpPr>
+            <a:spLocks noGrp="1"/>
+          </p:cNvSpPr>
           <p:nvPr>
-            <p:ph idx="101" type="title" hasCustomPrompt="1"/>
+            <p:ph type="title" idx="101" hasCustomPrompt="1"/>
           </p:nvPr>
         </p:nvSpPr>
         <p:spPr>
@@ -5999,7 +5336,7 @@
           <a:bodyPr wrap="square" lIns="0" tIns="0" rIns="0" bIns="0" rtlCol="0" anchor="ctr"/>
           <a:lstStyle/>
           <a:p>
-            <a:pPr algn="l" indent="0" marL="0">
+            <a:pPr marL="0" indent="0" algn="l">
               <a:buNone/>
             </a:pPr>
             <a:r>
@@ -6136,7 +5473,7 @@
           <a:bodyPr wrap="square" lIns="1905" tIns="1905" rIns="1905" bIns="1905" rtlCol="0" anchor="ctr"/>
           <a:lstStyle/>
           <a:p>
-            <a:pPr algn="ctr" indent="0" marL="0">
+            <a:pPr marL="0" indent="0" algn="ctr">
               <a:buNone/>
             </a:pPr>
             <a:r>
@@ -6198,289 +5535,7 @@
       </p:sp>
       <p:pic>
         <p:nvPicPr>
-          <p:cNvPr id="10" name="Families icon" descr="preencoded.png">    </p:cNvPr>
-          <p:cNvPicPr>
-            <a:picLocks noChangeAspect="1"/>
-          </p:cNvPicPr>
-          <p:nvPr/>
-        </p:nvPicPr>
-        <p:blipFill>
-          <a:blip r:embed="rId1"/>
-          <a:stretch>
-            <a:fillRect/>
-          </a:stretch>
-        </p:blipFill>
-        <p:spPr>
-          <a:xfrm>
-            <a:off x="973836" y="1906524"/>
-            <a:ext cx="301752" cy="301752"/>
-          </a:xfrm>
-          <a:prstGeom prst="rect">
-            <a:avLst/>
-          </a:prstGeom>
-        </p:spPr>
-      </p:pic>
-      <p:sp>
-        <p:nvSpPr>
-          <p:cNvPr id="11" name="Text 8"/>
-          <p:cNvSpPr txBox="1"/>
-          <p:nvPr/>
-        </p:nvSpPr>
-        <p:spPr>
-          <a:xfrm>
-            <a:off x="1600200" y="1737360"/>
-            <a:ext cx="2788920" cy="411480"/>
-          </a:xfrm>
-          <a:prstGeom prst="rect">
-            <a:avLst/>
-          </a:prstGeom>
-          <a:noFill/>
-          <a:ln/>
-        </p:spPr>
-        <p:txBody>
-          <a:bodyPr wrap="square" lIns="0" tIns="0" rIns="0" bIns="0" rtlCol="0" anchor="t"/>
-          <a:lstStyle/>
-          <a:p>
-            <a:pPr indent="0" marL="0">
-              <a:buNone/>
-            </a:pPr>
-            <a:r>
-              <a:rPr lang="en-US" sz="1900" b="1" dirty="0">
-                <a:solidFill>
-                  <a:schemeClr val="tx2"/>
-                </a:solidFill>
-                <a:latin typeface="+mj-lt" pitchFamily="34" charset="0"/>
-                <a:ea typeface="+mj-lt" pitchFamily="34" charset="-122"/>
-                <a:cs typeface="+mj-lt" pitchFamily="34" charset="-120"/>
-              </a:rPr>
-              <a:t>Families</a:t>
-            </a:r>
-            <a:endParaRPr lang="en-US" sz="1900" dirty="0"/>
-          </a:p>
-        </p:txBody>
-      </p:sp>
-      <p:sp>
-        <p:nvSpPr>
-          <p:cNvPr id="12" name="Text 9"/>
-          <p:cNvSpPr txBox="1"/>
-          <p:nvPr/>
-        </p:nvSpPr>
-        <p:spPr>
-          <a:xfrm>
-            <a:off x="1600200" y="2194560"/>
-            <a:ext cx="2788920" cy="777240"/>
-          </a:xfrm>
-          <a:prstGeom prst="rect">
-            <a:avLst/>
-          </a:prstGeom>
-          <a:noFill/>
-          <a:ln/>
-        </p:spPr>
-        <p:txBody>
-          <a:bodyPr wrap="square" lIns="0" tIns="0" rIns="0" bIns="0" rtlCol="0" anchor="t"/>
-          <a:lstStyle/>
-          <a:p>
-            <a:pPr indent="0" marL="0">
-              <a:buNone/>
-            </a:pPr>
-            <a:r>
-              <a:rPr lang="en-US" sz="1500" dirty="0">
-                <a:solidFill>
-                  <a:schemeClr val="tx1"/>
-                </a:solidFill>
-              </a:rPr>
-              <a:t>Register, update the census and send requests from a phone, in Bisaya</a:t>
-            </a:r>
-            <a:endParaRPr lang="en-US" sz="1500" dirty="0"/>
-          </a:p>
-        </p:txBody>
-      </p:sp>
-      <p:sp>
-        <p:nvSpPr>
-          <p:cNvPr id="13" name="Parish office card"/>
-          <p:cNvSpPr/>
-          <p:nvPr/>
-        </p:nvSpPr>
-        <p:spPr>
-          <a:xfrm>
-            <a:off x="7573975" y="1463040"/>
-            <a:ext cx="4069080" cy="1645920"/>
-          </a:xfrm>
-          <a:prstGeom prst="roundRect">
-            <a:avLst>
-              <a:gd name="adj" fmla="val 6667"/>
-            </a:avLst>
-          </a:prstGeom>
-          <a:solidFill>
-            <a:schemeClr val="bg2"/>
-          </a:solidFill>
-          <a:ln/>
-        </p:spPr>
-      </p:sp>
-      <p:sp>
-        <p:nvSpPr>
-          <p:cNvPr id="14" name="Parish office circle"/>
-          <p:cNvSpPr/>
-          <p:nvPr/>
-        </p:nvSpPr>
-        <p:spPr>
-          <a:xfrm>
-            <a:off x="7848295" y="1755648"/>
-            <a:ext cx="603504" cy="603504"/>
-          </a:xfrm>
-          <a:prstGeom prst="ellipse">
-            <a:avLst/>
-          </a:prstGeom>
-          <a:solidFill>
-            <a:schemeClr val="accent1"/>
-          </a:solidFill>
-          <a:ln/>
-        </p:spPr>
-      </p:sp>
-      <p:pic>
-        <p:nvPicPr>
-          <p:cNvPr id="15" name="Parish office icon" descr="preencoded.png">    </p:cNvPr>
-          <p:cNvPicPr>
-            <a:picLocks noChangeAspect="1"/>
-          </p:cNvPicPr>
-          <p:nvPr/>
-        </p:nvPicPr>
-        <p:blipFill>
-          <a:blip r:embed="rId2"/>
-          <a:stretch>
-            <a:fillRect/>
-          </a:stretch>
-        </p:blipFill>
-        <p:spPr>
-          <a:xfrm>
-            <a:off x="7999171" y="1906524"/>
-            <a:ext cx="301752" cy="301752"/>
-          </a:xfrm>
-          <a:prstGeom prst="rect">
-            <a:avLst/>
-          </a:prstGeom>
-        </p:spPr>
-      </p:pic>
-      <p:sp>
-        <p:nvSpPr>
-          <p:cNvPr id="16" name="Text 12"/>
-          <p:cNvSpPr txBox="1"/>
-          <p:nvPr/>
-        </p:nvSpPr>
-        <p:spPr>
-          <a:xfrm>
-            <a:off x="8625535" y="1737360"/>
-            <a:ext cx="2788920" cy="411480"/>
-          </a:xfrm>
-          <a:prstGeom prst="rect">
-            <a:avLst/>
-          </a:prstGeom>
-          <a:noFill/>
-          <a:ln/>
-        </p:spPr>
-        <p:txBody>
-          <a:bodyPr wrap="square" lIns="0" tIns="0" rIns="0" bIns="0" rtlCol="0" anchor="t"/>
-          <a:lstStyle/>
-          <a:p>
-            <a:pPr indent="0" marL="0">
-              <a:buNone/>
-            </a:pPr>
-            <a:r>
-              <a:rPr lang="en-US" sz="1900" b="1" dirty="0">
-                <a:solidFill>
-                  <a:schemeClr val="tx2"/>
-                </a:solidFill>
-                <a:latin typeface="+mj-lt" pitchFamily="34" charset="0"/>
-                <a:ea typeface="+mj-lt" pitchFamily="34" charset="-122"/>
-                <a:cs typeface="+mj-lt" pitchFamily="34" charset="-120"/>
-              </a:rPr>
-              <a:t>Parish office</a:t>
-            </a:r>
-            <a:endParaRPr lang="en-US" sz="1900" dirty="0"/>
-          </a:p>
-        </p:txBody>
-      </p:sp>
-      <p:sp>
-        <p:nvSpPr>
-          <p:cNvPr id="17" name="Text 13"/>
-          <p:cNvSpPr txBox="1"/>
-          <p:nvPr/>
-        </p:nvSpPr>
-        <p:spPr>
-          <a:xfrm>
-            <a:off x="8625535" y="2194560"/>
-            <a:ext cx="2788920" cy="777240"/>
-          </a:xfrm>
-          <a:prstGeom prst="rect">
-            <a:avLst/>
-          </a:prstGeom>
-          <a:noFill/>
-          <a:ln/>
-        </p:spPr>
-        <p:txBody>
-          <a:bodyPr wrap="square" lIns="0" tIns="0" rIns="0" bIns="0" rtlCol="0" anchor="t"/>
-          <a:lstStyle/>
-          <a:p>
-            <a:pPr indent="0" marL="0">
-              <a:buNone/>
-            </a:pPr>
-            <a:r>
-              <a:rPr lang="en-US" sz="1500" dirty="0">
-                <a:solidFill>
-                  <a:schemeClr val="tx1"/>
-                </a:solidFill>
-              </a:rPr>
-              <a:t>Verify families, track requests, print forms and export lists</a:t>
-            </a:r>
-            <a:endParaRPr lang="en-US" sz="1500" dirty="0"/>
-          </a:p>
-        </p:txBody>
-      </p:sp>
-      <p:sp>
-        <p:nvSpPr>
-          <p:cNvPr id="18" name="GKK leaders card"/>
-          <p:cNvSpPr/>
-          <p:nvPr/>
-        </p:nvSpPr>
-        <p:spPr>
-          <a:xfrm>
-            <a:off x="548640" y="3931920"/>
-            <a:ext cx="4069080" cy="1645920"/>
-          </a:xfrm>
-          <a:prstGeom prst="roundRect">
-            <a:avLst>
-              <a:gd name="adj" fmla="val 6667"/>
-            </a:avLst>
-          </a:prstGeom>
-          <a:solidFill>
-            <a:schemeClr val="bg2"/>
-          </a:solidFill>
-          <a:ln/>
-        </p:spPr>
-      </p:sp>
-      <p:sp>
-        <p:nvSpPr>
-          <p:cNvPr id="19" name="GKK leaders circle"/>
-          <p:cNvSpPr/>
-          <p:nvPr/>
-        </p:nvSpPr>
-        <p:spPr>
-          <a:xfrm>
-            <a:off x="822960" y="4224528"/>
-            <a:ext cx="603504" cy="603504"/>
-          </a:xfrm>
-          <a:prstGeom prst="ellipse">
-            <a:avLst/>
-          </a:prstGeom>
-          <a:solidFill>
-            <a:schemeClr val="accent1"/>
-          </a:solidFill>
-          <a:ln/>
-        </p:spPr>
-      </p:sp>
-      <p:pic>
-        <p:nvPicPr>
-          <p:cNvPr id="20" name="GKK leaders icon" descr="preencoded.png">    </p:cNvPr>
+          <p:cNvPr id="10" name="Families icon" descr="preencoded.png"/>
           <p:cNvPicPr>
             <a:picLocks noChangeAspect="1"/>
           </p:cNvPicPr>
@@ -6494,7 +5549,7 @@
         </p:blipFill>
         <p:spPr>
           <a:xfrm>
-            <a:off x="973836" y="4375404"/>
+            <a:off x="973836" y="1906524"/>
             <a:ext cx="301752" cy="301752"/>
           </a:xfrm>
           <a:prstGeom prst="rect">
@@ -6504,13 +5559,13 @@
       </p:pic>
       <p:sp>
         <p:nvSpPr>
-          <p:cNvPr id="21" name="Text 16"/>
+          <p:cNvPr id="11" name="Text 8"/>
           <p:cNvSpPr txBox="1"/>
           <p:nvPr/>
         </p:nvSpPr>
         <p:spPr>
           <a:xfrm>
-            <a:off x="1600200" y="4206240"/>
+            <a:off x="1600200" y="1737360"/>
             <a:ext cx="2788920" cy="411480"/>
           </a:xfrm>
           <a:prstGeom prst="rect">
@@ -6523,7 +5578,7 @@
           <a:bodyPr wrap="square" lIns="0" tIns="0" rIns="0" bIns="0" rtlCol="0" anchor="t"/>
           <a:lstStyle/>
           <a:p>
-            <a:pPr indent="0" marL="0">
+            <a:pPr marL="0" indent="0">
               <a:buNone/>
             </a:pPr>
             <a:r>
@@ -6535,7 +5590,7 @@
                 <a:ea typeface="+mj-lt" pitchFamily="34" charset="-122"/>
                 <a:cs typeface="+mj-lt" pitchFamily="34" charset="-120"/>
               </a:rPr>
-              <a:t>GKK leaders</a:t>
+              <a:t>Families</a:t>
             </a:r>
             <a:endParaRPr lang="en-US" sz="1900" dirty="0"/>
           </a:p>
@@ -6543,13 +5598,13 @@
       </p:sp>
       <p:sp>
         <p:nvSpPr>
-          <p:cNvPr id="22" name="Text 17"/>
+          <p:cNvPr id="12" name="Text 9"/>
           <p:cNvSpPr txBox="1"/>
           <p:nvPr/>
         </p:nvSpPr>
         <p:spPr>
           <a:xfrm>
-            <a:off x="1600200" y="4663440"/>
+            <a:off x="1600200" y="2194560"/>
             <a:ext cx="2788920" cy="777240"/>
           </a:xfrm>
           <a:prstGeom prst="rect">
@@ -6562,7 +5617,7 @@
           <a:bodyPr wrap="square" lIns="0" tIns="0" rIns="0" bIns="0" rtlCol="0" anchor="t"/>
           <a:lstStyle/>
           <a:p>
-            <a:pPr indent="0" marL="0">
+            <a:pPr marL="0" indent="0">
               <a:buNone/>
             </a:pPr>
             <a:r>
@@ -6571,7 +5626,7 @@
                   <a:schemeClr val="tx1"/>
                 </a:solidFill>
               </a:rPr>
-              <a:t>Their own GKK’s families and census, and nothing else</a:t>
+              <a:t>Register, update the census and send requests from a phone, in Bisaya</a:t>
             </a:r>
             <a:endParaRPr lang="en-US" sz="1500" dirty="0"/>
           </a:p>
@@ -6579,13 +5634,13 @@
       </p:sp>
       <p:sp>
         <p:nvSpPr>
-          <p:cNvPr id="23" name="Priest and council card"/>
+          <p:cNvPr id="13" name="Parish office card"/>
           <p:cNvSpPr/>
           <p:nvPr/>
         </p:nvSpPr>
         <p:spPr>
           <a:xfrm>
-            <a:off x="7573975" y="3931920"/>
+            <a:off x="7573975" y="1463040"/>
             <a:ext cx="4069080" cy="1645920"/>
           </a:xfrm>
           <a:prstGeom prst="roundRect">
@@ -6601,13 +5656,13 @@
       </p:sp>
       <p:sp>
         <p:nvSpPr>
-          <p:cNvPr id="24" name="Priest and council circle"/>
+          <p:cNvPr id="14" name="Parish office circle"/>
           <p:cNvSpPr/>
           <p:nvPr/>
         </p:nvSpPr>
         <p:spPr>
           <a:xfrm>
-            <a:off x="7848295" y="4224528"/>
+            <a:off x="7848295" y="1755648"/>
             <a:ext cx="603504" cy="603504"/>
           </a:xfrm>
           <a:prstGeom prst="ellipse">
@@ -6621,7 +5676,7 @@
       </p:sp>
       <p:pic>
         <p:nvPicPr>
-          <p:cNvPr id="25" name="Priest and council icon" descr="preencoded.png">    </p:cNvPr>
+          <p:cNvPr id="15" name="Parish office icon" descr="preencoded.png"/>
           <p:cNvPicPr>
             <a:picLocks noChangeAspect="1"/>
           </p:cNvPicPr>
@@ -6635,7 +5690,7 @@
         </p:blipFill>
         <p:spPr>
           <a:xfrm>
-            <a:off x="7999171" y="4375404"/>
+            <a:off x="7999171" y="1906524"/>
             <a:ext cx="301752" cy="301752"/>
           </a:xfrm>
           <a:prstGeom prst="rect">
@@ -6645,13 +5700,13 @@
       </p:pic>
       <p:sp>
         <p:nvSpPr>
-          <p:cNvPr id="26" name="Text 20"/>
+          <p:cNvPr id="16" name="Text 12"/>
           <p:cNvSpPr txBox="1"/>
           <p:nvPr/>
         </p:nvSpPr>
         <p:spPr>
           <a:xfrm>
-            <a:off x="8625535" y="4206240"/>
+            <a:off x="8625535" y="1737360"/>
             <a:ext cx="2788920" cy="411480"/>
           </a:xfrm>
           <a:prstGeom prst="rect">
@@ -6664,7 +5719,7 @@
           <a:bodyPr wrap="square" lIns="0" tIns="0" rIns="0" bIns="0" rtlCol="0" anchor="t"/>
           <a:lstStyle/>
           <a:p>
-            <a:pPr indent="0" marL="0">
+            <a:pPr marL="0" indent="0">
               <a:buNone/>
             </a:pPr>
             <a:r>
@@ -6676,7 +5731,7 @@
                 <a:ea typeface="+mj-lt" pitchFamily="34" charset="-122"/>
                 <a:cs typeface="+mj-lt" pitchFamily="34" charset="-120"/>
               </a:rPr>
-              <a:t>Priest and council</a:t>
+              <a:t>Parish office</a:t>
             </a:r>
             <a:endParaRPr lang="en-US" sz="1900" dirty="0"/>
           </a:p>
@@ -6684,13 +5739,13 @@
       </p:sp>
       <p:sp>
         <p:nvSpPr>
-          <p:cNvPr id="27" name="Text 21"/>
+          <p:cNvPr id="17" name="Text 13"/>
           <p:cNvSpPr txBox="1"/>
           <p:nvPr/>
         </p:nvSpPr>
         <p:spPr>
           <a:xfrm>
-            <a:off x="8625535" y="4663440"/>
+            <a:off x="8625535" y="2194560"/>
             <a:ext cx="2788920" cy="777240"/>
           </a:xfrm>
           <a:prstGeom prst="rect">
@@ -6703,7 +5758,7 @@
           <a:bodyPr wrap="square" lIns="0" tIns="0" rIns="0" bIns="0" rtlCol="0" anchor="t"/>
           <a:lstStyle/>
           <a:p>
-            <a:pPr indent="0" marL="0">
+            <a:pPr marL="0" indent="0">
               <a:buNone/>
             </a:pPr>
             <a:r>
@@ -6712,7 +5767,7 @@
                   <a:schemeClr val="tx1"/>
                 </a:solidFill>
               </a:rPr>
-              <a:t>Clear numbers by GKK, for pastoral planning</a:t>
+              <a:t>Verify families, track requests, print forms and export lists</a:t>
             </a:r>
             <a:endParaRPr lang="en-US" sz="1500" dirty="0"/>
           </a:p>
@@ -6720,27 +5775,49 @@
       </p:sp>
       <p:sp>
         <p:nvSpPr>
-          <p:cNvPr id="28" name="Website circle"/>
+          <p:cNvPr id="18" name="GKK leaders card"/>
           <p:cNvSpPr/>
           <p:nvPr/>
         </p:nvSpPr>
         <p:spPr>
           <a:xfrm>
-            <a:off x="548640" y="5788152"/>
-            <a:ext cx="420624" cy="420624"/>
+            <a:off x="548640" y="3931920"/>
+            <a:ext cx="4069080" cy="1645920"/>
+          </a:xfrm>
+          <a:prstGeom prst="roundRect">
+            <a:avLst>
+              <a:gd name="adj" fmla="val 6667"/>
+            </a:avLst>
+          </a:prstGeom>
+          <a:solidFill>
+            <a:schemeClr val="bg2"/>
+          </a:solidFill>
+          <a:ln/>
+        </p:spPr>
+      </p:sp>
+      <p:sp>
+        <p:nvSpPr>
+          <p:cNvPr id="19" name="GKK leaders circle"/>
+          <p:cNvSpPr/>
+          <p:nvPr/>
+        </p:nvSpPr>
+        <p:spPr>
+          <a:xfrm>
+            <a:off x="822960" y="4224528"/>
+            <a:ext cx="603504" cy="603504"/>
           </a:xfrm>
           <a:prstGeom prst="ellipse">
             <a:avLst/>
           </a:prstGeom>
           <a:solidFill>
-            <a:schemeClr val="accent2"/>
+            <a:schemeClr val="accent1"/>
           </a:solidFill>
           <a:ln/>
         </p:spPr>
       </p:sp>
       <p:pic>
         <p:nvPicPr>
-          <p:cNvPr id="29" name="Website icon" descr="preencoded.png">    </p:cNvPr>
+          <p:cNvPr id="20" name="GKK leaders icon" descr="preencoded.png"/>
           <p:cNvPicPr>
             <a:picLocks noChangeAspect="1"/>
           </p:cNvPicPr>
@@ -6754,6 +5831,266 @@
         </p:blipFill>
         <p:spPr>
           <a:xfrm>
+            <a:off x="973836" y="4375404"/>
+            <a:ext cx="301752" cy="301752"/>
+          </a:xfrm>
+          <a:prstGeom prst="rect">
+            <a:avLst/>
+          </a:prstGeom>
+        </p:spPr>
+      </p:pic>
+      <p:sp>
+        <p:nvSpPr>
+          <p:cNvPr id="21" name="Text 16"/>
+          <p:cNvSpPr txBox="1"/>
+          <p:nvPr/>
+        </p:nvSpPr>
+        <p:spPr>
+          <a:xfrm>
+            <a:off x="1600200" y="4206240"/>
+            <a:ext cx="2788920" cy="411480"/>
+          </a:xfrm>
+          <a:prstGeom prst="rect">
+            <a:avLst/>
+          </a:prstGeom>
+          <a:noFill/>
+          <a:ln/>
+        </p:spPr>
+        <p:txBody>
+          <a:bodyPr wrap="square" lIns="0" tIns="0" rIns="0" bIns="0" rtlCol="0" anchor="t"/>
+          <a:lstStyle/>
+          <a:p>
+            <a:pPr marL="0" indent="0">
+              <a:buNone/>
+            </a:pPr>
+            <a:r>
+              <a:rPr lang="en-US" sz="1900" b="1" dirty="0">
+                <a:solidFill>
+                  <a:schemeClr val="tx2"/>
+                </a:solidFill>
+                <a:latin typeface="+mj-lt" pitchFamily="34" charset="0"/>
+                <a:ea typeface="+mj-lt" pitchFamily="34" charset="-122"/>
+                <a:cs typeface="+mj-lt" pitchFamily="34" charset="-120"/>
+              </a:rPr>
+              <a:t>GKK leaders</a:t>
+            </a:r>
+            <a:endParaRPr lang="en-US" sz="1900" dirty="0"/>
+          </a:p>
+        </p:txBody>
+      </p:sp>
+      <p:sp>
+        <p:nvSpPr>
+          <p:cNvPr id="22" name="Text 17"/>
+          <p:cNvSpPr txBox="1"/>
+          <p:nvPr/>
+        </p:nvSpPr>
+        <p:spPr>
+          <a:xfrm>
+            <a:off x="1600200" y="4663440"/>
+            <a:ext cx="2788920" cy="777240"/>
+          </a:xfrm>
+          <a:prstGeom prst="rect">
+            <a:avLst/>
+          </a:prstGeom>
+          <a:noFill/>
+          <a:ln/>
+        </p:spPr>
+        <p:txBody>
+          <a:bodyPr wrap="square" lIns="0" tIns="0" rIns="0" bIns="0" rtlCol="0" anchor="t"/>
+          <a:lstStyle/>
+          <a:p>
+            <a:pPr marL="0" indent="0">
+              <a:buNone/>
+            </a:pPr>
+            <a:r>
+              <a:rPr lang="en-US" sz="1500" dirty="0">
+                <a:solidFill>
+                  <a:schemeClr val="tx1"/>
+                </a:solidFill>
+              </a:rPr>
+              <a:t>Their own GKK’s families and census, and nothing else</a:t>
+            </a:r>
+            <a:endParaRPr lang="en-US" sz="1500" dirty="0"/>
+          </a:p>
+        </p:txBody>
+      </p:sp>
+      <p:sp>
+        <p:nvSpPr>
+          <p:cNvPr id="23" name="Priest and council card"/>
+          <p:cNvSpPr/>
+          <p:nvPr/>
+        </p:nvSpPr>
+        <p:spPr>
+          <a:xfrm>
+            <a:off x="7573975" y="3931920"/>
+            <a:ext cx="4069080" cy="1645920"/>
+          </a:xfrm>
+          <a:prstGeom prst="roundRect">
+            <a:avLst>
+              <a:gd name="adj" fmla="val 6667"/>
+            </a:avLst>
+          </a:prstGeom>
+          <a:solidFill>
+            <a:schemeClr val="bg2"/>
+          </a:solidFill>
+          <a:ln/>
+        </p:spPr>
+      </p:sp>
+      <p:sp>
+        <p:nvSpPr>
+          <p:cNvPr id="24" name="Priest and council circle"/>
+          <p:cNvSpPr/>
+          <p:nvPr/>
+        </p:nvSpPr>
+        <p:spPr>
+          <a:xfrm>
+            <a:off x="7848295" y="4224528"/>
+            <a:ext cx="603504" cy="603504"/>
+          </a:xfrm>
+          <a:prstGeom prst="ellipse">
+            <a:avLst/>
+          </a:prstGeom>
+          <a:solidFill>
+            <a:schemeClr val="accent1"/>
+          </a:solidFill>
+          <a:ln/>
+        </p:spPr>
+      </p:sp>
+      <p:pic>
+        <p:nvPicPr>
+          <p:cNvPr id="25" name="Priest and council icon" descr="preencoded.png"/>
+          <p:cNvPicPr>
+            <a:picLocks noChangeAspect="1"/>
+          </p:cNvPicPr>
+          <p:nvPr/>
+        </p:nvPicPr>
+        <p:blipFill>
+          <a:blip r:embed="rId6"/>
+          <a:stretch>
+            <a:fillRect/>
+          </a:stretch>
+        </p:blipFill>
+        <p:spPr>
+          <a:xfrm>
+            <a:off x="7999171" y="4375404"/>
+            <a:ext cx="301752" cy="301752"/>
+          </a:xfrm>
+          <a:prstGeom prst="rect">
+            <a:avLst/>
+          </a:prstGeom>
+        </p:spPr>
+      </p:pic>
+      <p:sp>
+        <p:nvSpPr>
+          <p:cNvPr id="26" name="Text 20"/>
+          <p:cNvSpPr txBox="1"/>
+          <p:nvPr/>
+        </p:nvSpPr>
+        <p:spPr>
+          <a:xfrm>
+            <a:off x="8625535" y="4206240"/>
+            <a:ext cx="2788920" cy="411480"/>
+          </a:xfrm>
+          <a:prstGeom prst="rect">
+            <a:avLst/>
+          </a:prstGeom>
+          <a:noFill/>
+          <a:ln/>
+        </p:spPr>
+        <p:txBody>
+          <a:bodyPr wrap="square" lIns="0" tIns="0" rIns="0" bIns="0" rtlCol="0" anchor="t"/>
+          <a:lstStyle/>
+          <a:p>
+            <a:pPr marL="0" indent="0">
+              <a:buNone/>
+            </a:pPr>
+            <a:r>
+              <a:rPr lang="en-US" sz="1900" b="1" dirty="0">
+                <a:solidFill>
+                  <a:schemeClr val="tx2"/>
+                </a:solidFill>
+                <a:latin typeface="+mj-lt" pitchFamily="34" charset="0"/>
+                <a:ea typeface="+mj-lt" pitchFamily="34" charset="-122"/>
+                <a:cs typeface="+mj-lt" pitchFamily="34" charset="-120"/>
+              </a:rPr>
+              <a:t>Priest and council</a:t>
+            </a:r>
+            <a:endParaRPr lang="en-US" sz="1900" dirty="0"/>
+          </a:p>
+        </p:txBody>
+      </p:sp>
+      <p:sp>
+        <p:nvSpPr>
+          <p:cNvPr id="27" name="Text 21"/>
+          <p:cNvSpPr txBox="1"/>
+          <p:nvPr/>
+        </p:nvSpPr>
+        <p:spPr>
+          <a:xfrm>
+            <a:off x="8625535" y="4663440"/>
+            <a:ext cx="2788920" cy="777240"/>
+          </a:xfrm>
+          <a:prstGeom prst="rect">
+            <a:avLst/>
+          </a:prstGeom>
+          <a:noFill/>
+          <a:ln/>
+        </p:spPr>
+        <p:txBody>
+          <a:bodyPr wrap="square" lIns="0" tIns="0" rIns="0" bIns="0" rtlCol="0" anchor="t"/>
+          <a:lstStyle/>
+          <a:p>
+            <a:pPr marL="0" indent="0">
+              <a:buNone/>
+            </a:pPr>
+            <a:r>
+              <a:rPr lang="en-US" sz="1500" dirty="0">
+                <a:solidFill>
+                  <a:schemeClr val="tx1"/>
+                </a:solidFill>
+              </a:rPr>
+              <a:t>Clear numbers by GKK, for pastoral planning</a:t>
+            </a:r>
+            <a:endParaRPr lang="en-US" sz="1500" dirty="0"/>
+          </a:p>
+        </p:txBody>
+      </p:sp>
+      <p:sp>
+        <p:nvSpPr>
+          <p:cNvPr id="28" name="Website circle"/>
+          <p:cNvSpPr/>
+          <p:nvPr/>
+        </p:nvSpPr>
+        <p:spPr>
+          <a:xfrm>
+            <a:off x="548640" y="5788152"/>
+            <a:ext cx="420624" cy="420624"/>
+          </a:xfrm>
+          <a:prstGeom prst="ellipse">
+            <a:avLst/>
+          </a:prstGeom>
+          <a:solidFill>
+            <a:schemeClr val="accent2"/>
+          </a:solidFill>
+          <a:ln/>
+        </p:spPr>
+      </p:sp>
+      <p:pic>
+        <p:nvPicPr>
+          <p:cNvPr id="29" name="Website icon" descr="preencoded.png"/>
+          <p:cNvPicPr>
+            <a:picLocks noChangeAspect="1"/>
+          </p:cNvPicPr>
+          <p:nvPr/>
+        </p:nvPicPr>
+        <p:blipFill>
+          <a:blip r:embed="rId7"/>
+          <a:stretch>
+            <a:fillRect/>
+          </a:stretch>
+        </p:blipFill>
+        <p:spPr>
+          <a:xfrm>
             <a:off x="653796" y="5893308"/>
             <a:ext cx="210312" cy="210312"/>
           </a:xfrm>
@@ -6783,7 +6120,7 @@
           <a:bodyPr wrap="square" lIns="0" tIns="0" rIns="0" bIns="0" rtlCol="0" anchor="ctr"/>
           <a:lstStyle/>
           <a:p>
-            <a:pPr indent="0" marL="0">
+            <a:pPr marL="0" indent="0">
               <a:buNone/>
             </a:pPr>
             <a:r>
@@ -6794,9 +6131,6 @@
               </a:rPr>
               <a:t>Also included: </a:t>
             </a:r>
-            <a:pPr indent="0" marL="0">
-              <a:buNone/>
-            </a:pPr>
             <a:r>
               <a:rPr lang="en-US" sz="1500" dirty="0">
                 <a:solidFill>
@@ -6811,7 +6145,7 @@
       </p:sp>
       <p:sp>
         <p:nvSpPr>
-          <p:cNvPr id="25" name="Slide Number Placeholder 0"/>
+          <p:cNvPr id="31" name="Slide Number Placeholder 0"/>
           <p:cNvSpPr>
             <a:spLocks noGrp="1"/>
           </p:cNvSpPr>
@@ -6829,7 +6163,7 @@
           </a:prstGeom>
           <a:extLst>
             <a:ext uri="{C572A759-6A51-4108-AA02-DFA0A04FC94B}">
-              <ma14:wrappingTextBoxFlag xmlns:ma14="http://schemas.microsoft.com/office/mac/drawingml/2011/main" val="0"/>
+              <ma14:wrappingTextBoxFlag xmlns:ma14="http://schemas.microsoft.com/office/mac/drawingml/2011/main" xmlns="" val="0"/>
             </a:ext>
           </a:extLst>
         </p:spPr>
@@ -6847,7 +6181,7 @@
           <a:p>
             <a:pPr algn="r"/>
             <a:fld id="{F7021451-1387-4CA6-816F-3879F97B5CBC}" type="slidenum">
-              <a:rPr b="0" lang="en-US"/>
+              <a:rPr lang="en-US" b="0"/>
               <a:t>3</a:t>
             </a:fld>
             <a:endParaRPr lang="en-US"/>
@@ -6882,9 +6216,11 @@
       <p:sp>
         <p:nvSpPr>
           <p:cNvPr id="2" name="Text 1"/>
-          <p:cNvSpPr/>
+          <p:cNvSpPr>
+            <a:spLocks noGrp="1"/>
+          </p:cNvSpPr>
           <p:nvPr>
-            <p:ph idx="101" type="title" hasCustomPrompt="1"/>
+            <p:ph type="title" idx="101" hasCustomPrompt="1"/>
           </p:nvPr>
         </p:nvSpPr>
         <p:spPr>
@@ -6902,7 +6238,7 @@
           <a:bodyPr wrap="square" lIns="0" tIns="0" rIns="0" bIns="0" rtlCol="0" anchor="ctr"/>
           <a:lstStyle/>
           <a:p>
-            <a:pPr algn="l" indent="0" marL="0">
+            <a:pPr marL="0" indent="0" algn="l">
               <a:buNone/>
             </a:pPr>
             <a:r>
@@ -6942,245 +6278,7 @@
       </p:sp>
       <p:pic>
         <p:nvPicPr>
-          <p:cNvPr id="4" name="Register at home icon" descr="preencoded.png">    </p:cNvPr>
-          <p:cNvPicPr>
-            <a:picLocks noChangeAspect="1"/>
-          </p:cNvPicPr>
-          <p:nvPr/>
-        </p:nvPicPr>
-        <p:blipFill>
-          <a:blip r:embed="rId1"/>
-          <a:stretch>
-            <a:fillRect/>
-          </a:stretch>
-        </p:blipFill>
-        <p:spPr>
-          <a:xfrm>
-            <a:off x="690372" y="1741932"/>
-            <a:ext cx="283464" cy="283464"/>
-          </a:xfrm>
-          <a:prstGeom prst="rect">
-            <a:avLst/>
-          </a:prstGeom>
-        </p:spPr>
-      </p:pic>
-      <p:sp>
-        <p:nvSpPr>
-          <p:cNvPr id="5" name="Text 2"/>
-          <p:cNvSpPr txBox="1"/>
-          <p:nvPr/>
-        </p:nvSpPr>
-        <p:spPr>
-          <a:xfrm>
-            <a:off x="1280160" y="1581912"/>
-            <a:ext cx="3291840" cy="384048"/>
-          </a:xfrm>
-          <a:prstGeom prst="rect">
-            <a:avLst/>
-          </a:prstGeom>
-          <a:noFill/>
-          <a:ln/>
-        </p:spPr>
-        <p:txBody>
-          <a:bodyPr wrap="square" lIns="0" tIns="0" rIns="0" bIns="0" rtlCol="0" anchor="t"/>
-          <a:lstStyle/>
-          <a:p>
-            <a:pPr indent="0" marL="0">
-              <a:buNone/>
-            </a:pPr>
-            <a:r>
-              <a:rPr lang="en-US" sz="1800" b="1" dirty="0">
-                <a:solidFill>
-                  <a:schemeClr val="tx2"/>
-                </a:solidFill>
-                <a:latin typeface="+mj-lt" pitchFamily="34" charset="0"/>
-                <a:ea typeface="+mj-lt" pitchFamily="34" charset="-122"/>
-                <a:cs typeface="+mj-lt" pitchFamily="34" charset="-120"/>
-              </a:rPr>
-              <a:t>Register at home</a:t>
-            </a:r>
-            <a:endParaRPr lang="en-US" sz="1800" dirty="0"/>
-          </a:p>
-        </p:txBody>
-      </p:sp>
-      <p:sp>
-        <p:nvSpPr>
-          <p:cNvPr id="6" name="Text 3"/>
-          <p:cNvSpPr txBox="1"/>
-          <p:nvPr/>
-        </p:nvSpPr>
-        <p:spPr>
-          <a:xfrm>
-            <a:off x="1280160" y="1984248"/>
-            <a:ext cx="3291840" cy="868680"/>
-          </a:xfrm>
-          <a:prstGeom prst="rect">
-            <a:avLst/>
-          </a:prstGeom>
-          <a:noFill/>
-          <a:ln/>
-        </p:spPr>
-        <p:txBody>
-          <a:bodyPr wrap="square" lIns="0" tIns="0" rIns="0" bIns="0" rtlCol="0" anchor="t"/>
-          <a:lstStyle/>
-          <a:p>
-            <a:pPr indent="0" marL="0">
-              <a:buNone/>
-            </a:pPr>
-            <a:r>
-              <a:rPr lang="en-US" sz="1500" dirty="0">
-                <a:solidFill>
-                  <a:schemeClr val="tx1"/>
-                </a:solidFill>
-              </a:rPr>
-              <a:t>Five short steps. The family gets a reference number at once and can check its status.</a:t>
-            </a:r>
-            <a:endParaRPr lang="en-US" sz="1500" dirty="0"/>
-          </a:p>
-        </p:txBody>
-      </p:sp>
-      <p:sp>
-        <p:nvSpPr>
-          <p:cNvPr id="7" name="Update during the census circle"/>
-          <p:cNvSpPr/>
-          <p:nvPr/>
-        </p:nvSpPr>
-        <p:spPr>
-          <a:xfrm>
-            <a:off x="548640" y="2971800"/>
-            <a:ext cx="566928" cy="566928"/>
-          </a:xfrm>
-          <a:prstGeom prst="ellipse">
-            <a:avLst/>
-          </a:prstGeom>
-          <a:solidFill>
-            <a:schemeClr val="accent1"/>
-          </a:solidFill>
-          <a:ln/>
-        </p:spPr>
-      </p:sp>
-      <p:pic>
-        <p:nvPicPr>
-          <p:cNvPr id="8" name="Update during the census icon" descr="preencoded.png">    </p:cNvPr>
-          <p:cNvPicPr>
-            <a:picLocks noChangeAspect="1"/>
-          </p:cNvPicPr>
-          <p:nvPr/>
-        </p:nvPicPr>
-        <p:blipFill>
-          <a:blip r:embed="rId2"/>
-          <a:stretch>
-            <a:fillRect/>
-          </a:stretch>
-        </p:blipFill>
-        <p:spPr>
-          <a:xfrm>
-            <a:off x="690372" y="3113532"/>
-            <a:ext cx="283464" cy="283464"/>
-          </a:xfrm>
-          <a:prstGeom prst="rect">
-            <a:avLst/>
-          </a:prstGeom>
-        </p:spPr>
-      </p:pic>
-      <p:sp>
-        <p:nvSpPr>
-          <p:cNvPr id="9" name="Text 5"/>
-          <p:cNvSpPr txBox="1"/>
-          <p:nvPr/>
-        </p:nvSpPr>
-        <p:spPr>
-          <a:xfrm>
-            <a:off x="1280160" y="2953512"/>
-            <a:ext cx="3291840" cy="384048"/>
-          </a:xfrm>
-          <a:prstGeom prst="rect">
-            <a:avLst/>
-          </a:prstGeom>
-          <a:noFill/>
-          <a:ln/>
-        </p:spPr>
-        <p:txBody>
-          <a:bodyPr wrap="square" lIns="0" tIns="0" rIns="0" bIns="0" rtlCol="0" anchor="t"/>
-          <a:lstStyle/>
-          <a:p>
-            <a:pPr indent="0" marL="0">
-              <a:buNone/>
-            </a:pPr>
-            <a:r>
-              <a:rPr lang="en-US" sz="1800" b="1" dirty="0">
-                <a:solidFill>
-                  <a:schemeClr val="tx2"/>
-                </a:solidFill>
-                <a:latin typeface="+mj-lt" pitchFamily="34" charset="0"/>
-                <a:ea typeface="+mj-lt" pitchFamily="34" charset="-122"/>
-                <a:cs typeface="+mj-lt" pitchFamily="34" charset="-120"/>
-              </a:rPr>
-              <a:t>Update during the census</a:t>
-            </a:r>
-            <a:endParaRPr lang="en-US" sz="1800" dirty="0"/>
-          </a:p>
-        </p:txBody>
-      </p:sp>
-      <p:sp>
-        <p:nvSpPr>
-          <p:cNvPr id="10" name="Text 6"/>
-          <p:cNvSpPr txBox="1"/>
-          <p:nvPr/>
-        </p:nvSpPr>
-        <p:spPr>
-          <a:xfrm>
-            <a:off x="1280160" y="3355848"/>
-            <a:ext cx="3291840" cy="868680"/>
-          </a:xfrm>
-          <a:prstGeom prst="rect">
-            <a:avLst/>
-          </a:prstGeom>
-          <a:noFill/>
-          <a:ln/>
-        </p:spPr>
-        <p:txBody>
-          <a:bodyPr wrap="square" lIns="0" tIns="0" rIns="0" bIns="0" rtlCol="0" anchor="t"/>
-          <a:lstStyle/>
-          <a:p>
-            <a:pPr indent="0" marL="0">
-              <a:buNone/>
-            </a:pPr>
-            <a:r>
-              <a:rPr lang="en-US" sz="1500" dirty="0">
-                <a:solidFill>
-                  <a:schemeClr val="tx1"/>
-                </a:solidFill>
-              </a:rPr>
-              <a:t>With the reference number and code on their census form. No trip to the office.</a:t>
-            </a:r>
-            <a:endParaRPr lang="en-US" sz="1500" dirty="0"/>
-          </a:p>
-        </p:txBody>
-      </p:sp>
-      <p:sp>
-        <p:nvSpPr>
-          <p:cNvPr id="11" name="Ask the parish circle"/>
-          <p:cNvSpPr/>
-          <p:nvPr/>
-        </p:nvSpPr>
-        <p:spPr>
-          <a:xfrm>
-            <a:off x="548640" y="4343400"/>
-            <a:ext cx="566928" cy="566928"/>
-          </a:xfrm>
-          <a:prstGeom prst="ellipse">
-            <a:avLst/>
-          </a:prstGeom>
-          <a:solidFill>
-            <a:schemeClr val="accent1"/>
-          </a:solidFill>
-          <a:ln/>
-        </p:spPr>
-      </p:sp>
-      <p:pic>
-        <p:nvPicPr>
-          <p:cNvPr id="12" name="Ask the parish icon" descr="preencoded.png">    </p:cNvPr>
+          <p:cNvPr id="4" name="Register at home icon" descr="preencoded.png"/>
           <p:cNvPicPr>
             <a:picLocks noChangeAspect="1"/>
           </p:cNvPicPr>
@@ -7194,7 +6292,7 @@
         </p:blipFill>
         <p:spPr>
           <a:xfrm>
-            <a:off x="690372" y="4485132"/>
+            <a:off x="690372" y="1741932"/>
             <a:ext cx="283464" cy="283464"/>
           </a:xfrm>
           <a:prstGeom prst="rect">
@@ -7204,13 +6302,13 @@
       </p:pic>
       <p:sp>
         <p:nvSpPr>
-          <p:cNvPr id="13" name="Text 8"/>
+          <p:cNvPr id="5" name="Text 2"/>
           <p:cNvSpPr txBox="1"/>
           <p:nvPr/>
         </p:nvSpPr>
         <p:spPr>
           <a:xfrm>
-            <a:off x="1280160" y="4325112"/>
+            <a:off x="1280160" y="1581912"/>
             <a:ext cx="3291840" cy="384048"/>
           </a:xfrm>
           <a:prstGeom prst="rect">
@@ -7223,7 +6321,7 @@
           <a:bodyPr wrap="square" lIns="0" tIns="0" rIns="0" bIns="0" rtlCol="0" anchor="t"/>
           <a:lstStyle/>
           <a:p>
-            <a:pPr indent="0" marL="0">
+            <a:pPr marL="0" indent="0">
               <a:buNone/>
             </a:pPr>
             <a:r>
@@ -7235,7 +6333,7 @@
                 <a:ea typeface="+mj-lt" pitchFamily="34" charset="-122"/>
                 <a:cs typeface="+mj-lt" pitchFamily="34" charset="-120"/>
               </a:rPr>
-              <a:t>Ask the parish</a:t>
+              <a:t>Register at home</a:t>
             </a:r>
             <a:endParaRPr lang="en-US" sz="1800" dirty="0"/>
           </a:p>
@@ -7243,13 +6341,13 @@
       </p:sp>
       <p:sp>
         <p:nvSpPr>
-          <p:cNvPr id="14" name="Text 9"/>
+          <p:cNvPr id="6" name="Text 3"/>
           <p:cNvSpPr txBox="1"/>
           <p:nvPr/>
         </p:nvSpPr>
         <p:spPr>
           <a:xfrm>
-            <a:off x="1280160" y="4727448"/>
+            <a:off x="1280160" y="1984248"/>
             <a:ext cx="3291840" cy="868680"/>
           </a:xfrm>
           <a:prstGeom prst="rect">
@@ -7262,7 +6360,7 @@
           <a:bodyPr wrap="square" lIns="0" tIns="0" rIns="0" bIns="0" rtlCol="0" anchor="t"/>
           <a:lstStyle/>
           <a:p>
-            <a:pPr indent="0" marL="0">
+            <a:pPr marL="0" indent="0">
               <a:buNone/>
             </a:pPr>
             <a:r>
@@ -7271,15 +6369,35 @@
                   <a:schemeClr val="tx1"/>
                 </a:solidFill>
               </a:rPr>
-              <a:t>Certificates, the Anointing of the Sick, OCIA, blood donors and prayer requests.</a:t>
+              <a:t>Five short steps. The family gets a reference number at once and can check its status.</a:t>
             </a:r>
             <a:endParaRPr lang="en-US" sz="1500" dirty="0"/>
           </a:p>
         </p:txBody>
+      </p:sp>
+      <p:sp>
+        <p:nvSpPr>
+          <p:cNvPr id="7" name="Update during the census circle"/>
+          <p:cNvSpPr/>
+          <p:nvPr/>
+        </p:nvSpPr>
+        <p:spPr>
+          <a:xfrm>
+            <a:off x="548640" y="2971800"/>
+            <a:ext cx="566928" cy="566928"/>
+          </a:xfrm>
+          <a:prstGeom prst="ellipse">
+            <a:avLst/>
+          </a:prstGeom>
+          <a:solidFill>
+            <a:schemeClr val="accent1"/>
+          </a:solidFill>
+          <a:ln/>
+        </p:spPr>
       </p:sp>
       <p:pic>
         <p:nvPicPr>
-          <p:cNvPr id="15" name="Phone: Home page" descr="C:\Users\Dave\AppData\Local\Temp\claude\E--DEVELOPER--WEB--PARISH-MEMBERS-REGISTRY\9cfa56b2-76b0-4da3-8bb7-a6a7d55b9d8c\scratchpad\img\phone-mob-home.png">    </p:cNvPr>
+          <p:cNvPr id="8" name="Update during the census icon" descr="preencoded.png"/>
           <p:cNvPicPr>
             <a:picLocks noChangeAspect="1"/>
           </p:cNvPicPr>
@@ -7293,8 +6411,8 @@
         </p:blipFill>
         <p:spPr>
           <a:xfrm>
-            <a:off x="5105286" y="1463040"/>
-            <a:ext cx="1947608" cy="4114800"/>
+            <a:off x="690372" y="3113532"/>
+            <a:ext cx="283464" cy="283464"/>
           </a:xfrm>
           <a:prstGeom prst="rect">
             <a:avLst/>
@@ -7303,14 +6421,14 @@
       </p:pic>
       <p:sp>
         <p:nvSpPr>
-          <p:cNvPr id="16" name="Text 10"/>
+          <p:cNvPr id="9" name="Text 5"/>
           <p:cNvSpPr txBox="1"/>
           <p:nvPr/>
         </p:nvSpPr>
         <p:spPr>
           <a:xfrm>
-            <a:off x="4922406" y="5650992"/>
-            <a:ext cx="2313368" cy="274320"/>
+            <a:off x="1280160" y="2953512"/>
+            <a:ext cx="3291840" cy="384048"/>
           </a:xfrm>
           <a:prstGeom prst="rect">
             <a:avLst/>
@@ -7322,24 +6440,83 @@
           <a:bodyPr wrap="square" lIns="0" tIns="0" rIns="0" bIns="0" rtlCol="0" anchor="t"/>
           <a:lstStyle/>
           <a:p>
-            <a:pPr algn="ctr" indent="0" marL="0">
-              <a:buNone/>
-            </a:pPr>
-            <a:r>
-              <a:rPr lang="en-US" sz="1200" b="1" dirty="0">
+            <a:pPr marL="0" indent="0">
+              <a:buNone/>
+            </a:pPr>
+            <a:r>
+              <a:rPr lang="en-US" sz="1800" b="1" dirty="0">
                 <a:solidFill>
                   <a:schemeClr val="tx2"/>
                 </a:solidFill>
-              </a:rPr>
-              <a:t>Home page</a:t>
-            </a:r>
-            <a:endParaRPr lang="en-US" sz="1200" dirty="0"/>
-          </a:p>
-        </p:txBody>
+                <a:latin typeface="+mj-lt" pitchFamily="34" charset="0"/>
+                <a:ea typeface="+mj-lt" pitchFamily="34" charset="-122"/>
+                <a:cs typeface="+mj-lt" pitchFamily="34" charset="-120"/>
+              </a:rPr>
+              <a:t>Update during the census</a:t>
+            </a:r>
+            <a:endParaRPr lang="en-US" sz="1800" dirty="0"/>
+          </a:p>
+        </p:txBody>
+      </p:sp>
+      <p:sp>
+        <p:nvSpPr>
+          <p:cNvPr id="10" name="Text 6"/>
+          <p:cNvSpPr txBox="1"/>
+          <p:nvPr/>
+        </p:nvSpPr>
+        <p:spPr>
+          <a:xfrm>
+            <a:off x="1280160" y="3355848"/>
+            <a:ext cx="3291840" cy="868680"/>
+          </a:xfrm>
+          <a:prstGeom prst="rect">
+            <a:avLst/>
+          </a:prstGeom>
+          <a:noFill/>
+          <a:ln/>
+        </p:spPr>
+        <p:txBody>
+          <a:bodyPr wrap="square" lIns="0" tIns="0" rIns="0" bIns="0" rtlCol="0" anchor="t"/>
+          <a:lstStyle/>
+          <a:p>
+            <a:pPr marL="0" indent="0">
+              <a:buNone/>
+            </a:pPr>
+            <a:r>
+              <a:rPr lang="en-US" sz="1500" dirty="0">
+                <a:solidFill>
+                  <a:schemeClr val="tx1"/>
+                </a:solidFill>
+              </a:rPr>
+              <a:t>With the reference number and code on their census form. No trip to the office.</a:t>
+            </a:r>
+            <a:endParaRPr lang="en-US" sz="1500" dirty="0"/>
+          </a:p>
+        </p:txBody>
+      </p:sp>
+      <p:sp>
+        <p:nvSpPr>
+          <p:cNvPr id="11" name="Ask the parish circle"/>
+          <p:cNvSpPr/>
+          <p:nvPr/>
+        </p:nvSpPr>
+        <p:spPr>
+          <a:xfrm>
+            <a:off x="548640" y="4343400"/>
+            <a:ext cx="566928" cy="566928"/>
+          </a:xfrm>
+          <a:prstGeom prst="ellipse">
+            <a:avLst/>
+          </a:prstGeom>
+          <a:solidFill>
+            <a:schemeClr val="accent1"/>
+          </a:solidFill>
+          <a:ln/>
+        </p:spPr>
       </p:sp>
       <p:pic>
         <p:nvPicPr>
-          <p:cNvPr id="17" name="Phone: Registration, step 1 of 5" descr="C:\Users\Dave\AppData\Local\Temp\claude\E--DEVELOPER--WEB--PARISH-MEMBERS-REGISTRY\9cfa56b2-76b0-4da3-8bb7-a6a7d55b9d8c\scratchpad\img\phone-mob-register.png">    </p:cNvPr>
+          <p:cNvPr id="12" name="Ask the parish icon" descr="preencoded.png"/>
           <p:cNvPicPr>
             <a:picLocks noChangeAspect="1"/>
           </p:cNvPicPr>
@@ -7353,8 +6530,8 @@
         </p:blipFill>
         <p:spPr>
           <a:xfrm>
-            <a:off x="7400366" y="1463040"/>
-            <a:ext cx="1947608" cy="4114800"/>
+            <a:off x="690372" y="4485132"/>
+            <a:ext cx="283464" cy="283464"/>
           </a:xfrm>
           <a:prstGeom prst="rect">
             <a:avLst/>
@@ -7363,14 +6540,14 @@
       </p:pic>
       <p:sp>
         <p:nvSpPr>
-          <p:cNvPr id="18" name="Text 11"/>
+          <p:cNvPr id="13" name="Text 8"/>
           <p:cNvSpPr txBox="1"/>
           <p:nvPr/>
         </p:nvSpPr>
         <p:spPr>
           <a:xfrm>
-            <a:off x="7217486" y="5650992"/>
-            <a:ext cx="2313368" cy="274320"/>
+            <a:off x="1280160" y="4325112"/>
+            <a:ext cx="3291840" cy="384048"/>
           </a:xfrm>
           <a:prstGeom prst="rect">
             <a:avLst/>
@@ -7382,24 +6559,63 @@
           <a:bodyPr wrap="square" lIns="0" tIns="0" rIns="0" bIns="0" rtlCol="0" anchor="t"/>
           <a:lstStyle/>
           <a:p>
-            <a:pPr algn="ctr" indent="0" marL="0">
-              <a:buNone/>
-            </a:pPr>
-            <a:r>
-              <a:rPr lang="en-US" sz="1200" b="1" dirty="0">
+            <a:pPr marL="0" indent="0">
+              <a:buNone/>
+            </a:pPr>
+            <a:r>
+              <a:rPr lang="en-US" sz="1800" b="1" dirty="0">
                 <a:solidFill>
                   <a:schemeClr val="tx2"/>
                 </a:solidFill>
-              </a:rPr>
-              <a:t>Registration, step 1 of 5</a:t>
-            </a:r>
-            <a:endParaRPr lang="en-US" sz="1200" dirty="0"/>
+                <a:latin typeface="+mj-lt" pitchFamily="34" charset="0"/>
+                <a:ea typeface="+mj-lt" pitchFamily="34" charset="-122"/>
+                <a:cs typeface="+mj-lt" pitchFamily="34" charset="-120"/>
+              </a:rPr>
+              <a:t>Ask the parish</a:t>
+            </a:r>
+            <a:endParaRPr lang="en-US" sz="1800" dirty="0"/>
+          </a:p>
+        </p:txBody>
+      </p:sp>
+      <p:sp>
+        <p:nvSpPr>
+          <p:cNvPr id="14" name="Text 9"/>
+          <p:cNvSpPr txBox="1"/>
+          <p:nvPr/>
+        </p:nvSpPr>
+        <p:spPr>
+          <a:xfrm>
+            <a:off x="1280160" y="4727448"/>
+            <a:ext cx="3291840" cy="868680"/>
+          </a:xfrm>
+          <a:prstGeom prst="rect">
+            <a:avLst/>
+          </a:prstGeom>
+          <a:noFill/>
+          <a:ln/>
+        </p:spPr>
+        <p:txBody>
+          <a:bodyPr wrap="square" lIns="0" tIns="0" rIns="0" bIns="0" rtlCol="0" anchor="t"/>
+          <a:lstStyle/>
+          <a:p>
+            <a:pPr marL="0" indent="0">
+              <a:buNone/>
+            </a:pPr>
+            <a:r>
+              <a:rPr lang="en-US" sz="1500" dirty="0">
+                <a:solidFill>
+                  <a:schemeClr val="tx1"/>
+                </a:solidFill>
+              </a:rPr>
+              <a:t>Certificates, the Anointing of the Sick, OCIA, blood donors and prayer requests.</a:t>
+            </a:r>
+            <a:endParaRPr lang="en-US" sz="1500" dirty="0"/>
           </a:p>
         </p:txBody>
       </p:sp>
       <p:pic>
         <p:nvPicPr>
-          <p:cNvPr id="19" name="Phone: Census update" descr="C:\Users\Dave\AppData\Local\Temp\claude\E--DEVELOPER--WEB--PARISH-MEMBERS-REGISTRY\9cfa56b2-76b0-4da3-8bb7-a6a7d55b9d8c\scratchpad\img\phone-mob-census.png">    </p:cNvPr>
+          <p:cNvPr id="15" name="Phone: Home page" descr="C:\Users\Dave\AppData\Local\Temp\claude\E--DEVELOPER--WEB--PARISH-MEMBERS-REGISTRY\9cfa56b2-76b0-4da3-8bb7-a6a7d55b9d8c\scratchpad\img\phone-mob-home.png"/>
           <p:cNvPicPr>
             <a:picLocks noChangeAspect="1"/>
           </p:cNvPicPr>
@@ -7413,6 +6629,126 @@
         </p:blipFill>
         <p:spPr>
           <a:xfrm>
+            <a:off x="5105286" y="1463040"/>
+            <a:ext cx="1947608" cy="4114800"/>
+          </a:xfrm>
+          <a:prstGeom prst="rect">
+            <a:avLst/>
+          </a:prstGeom>
+        </p:spPr>
+      </p:pic>
+      <p:sp>
+        <p:nvSpPr>
+          <p:cNvPr id="16" name="Text 10"/>
+          <p:cNvSpPr txBox="1"/>
+          <p:nvPr/>
+        </p:nvSpPr>
+        <p:spPr>
+          <a:xfrm>
+            <a:off x="4922406" y="5650992"/>
+            <a:ext cx="2313368" cy="274320"/>
+          </a:xfrm>
+          <a:prstGeom prst="rect">
+            <a:avLst/>
+          </a:prstGeom>
+          <a:noFill/>
+          <a:ln/>
+        </p:spPr>
+        <p:txBody>
+          <a:bodyPr wrap="square" lIns="0" tIns="0" rIns="0" bIns="0" rtlCol="0" anchor="t"/>
+          <a:lstStyle/>
+          <a:p>
+            <a:pPr marL="0" indent="0" algn="ctr">
+              <a:buNone/>
+            </a:pPr>
+            <a:r>
+              <a:rPr lang="en-US" sz="1200" b="1" dirty="0">
+                <a:solidFill>
+                  <a:schemeClr val="tx2"/>
+                </a:solidFill>
+              </a:rPr>
+              <a:t>Home page</a:t>
+            </a:r>
+            <a:endParaRPr lang="en-US" sz="1200" dirty="0"/>
+          </a:p>
+        </p:txBody>
+      </p:sp>
+      <p:pic>
+        <p:nvPicPr>
+          <p:cNvPr id="17" name="Phone: Registration, step 1 of 5" descr="C:\Users\Dave\AppData\Local\Temp\claude\E--DEVELOPER--WEB--PARISH-MEMBERS-REGISTRY\9cfa56b2-76b0-4da3-8bb7-a6a7d55b9d8c\scratchpad\img\phone-mob-register.png"/>
+          <p:cNvPicPr>
+            <a:picLocks noChangeAspect="1"/>
+          </p:cNvPicPr>
+          <p:nvPr/>
+        </p:nvPicPr>
+        <p:blipFill>
+          <a:blip r:embed="rId7"/>
+          <a:stretch>
+            <a:fillRect/>
+          </a:stretch>
+        </p:blipFill>
+        <p:spPr>
+          <a:xfrm>
+            <a:off x="7400366" y="1463040"/>
+            <a:ext cx="1947608" cy="4114800"/>
+          </a:xfrm>
+          <a:prstGeom prst="rect">
+            <a:avLst/>
+          </a:prstGeom>
+        </p:spPr>
+      </p:pic>
+      <p:sp>
+        <p:nvSpPr>
+          <p:cNvPr id="18" name="Text 11"/>
+          <p:cNvSpPr txBox="1"/>
+          <p:nvPr/>
+        </p:nvSpPr>
+        <p:spPr>
+          <a:xfrm>
+            <a:off x="7217486" y="5650992"/>
+            <a:ext cx="2313368" cy="274320"/>
+          </a:xfrm>
+          <a:prstGeom prst="rect">
+            <a:avLst/>
+          </a:prstGeom>
+          <a:noFill/>
+          <a:ln/>
+        </p:spPr>
+        <p:txBody>
+          <a:bodyPr wrap="square" lIns="0" tIns="0" rIns="0" bIns="0" rtlCol="0" anchor="t"/>
+          <a:lstStyle/>
+          <a:p>
+            <a:pPr marL="0" indent="0" algn="ctr">
+              <a:buNone/>
+            </a:pPr>
+            <a:r>
+              <a:rPr lang="en-US" sz="1200" b="1" dirty="0">
+                <a:solidFill>
+                  <a:schemeClr val="tx2"/>
+                </a:solidFill>
+              </a:rPr>
+              <a:t>Registration, step 1 of 5</a:t>
+            </a:r>
+            <a:endParaRPr lang="en-US" sz="1200" dirty="0"/>
+          </a:p>
+        </p:txBody>
+      </p:sp>
+      <p:pic>
+        <p:nvPicPr>
+          <p:cNvPr id="19" name="Phone: Census update" descr="C:\Users\Dave\AppData\Local\Temp\claude\E--DEVELOPER--WEB--PARISH-MEMBERS-REGISTRY\9cfa56b2-76b0-4da3-8bb7-a6a7d55b9d8c\scratchpad\img\phone-mob-census.png"/>
+          <p:cNvPicPr>
+            <a:picLocks noChangeAspect="1"/>
+          </p:cNvPicPr>
+          <p:nvPr/>
+        </p:nvPicPr>
+        <p:blipFill>
+          <a:blip r:embed="rId8"/>
+          <a:stretch>
+            <a:fillRect/>
+          </a:stretch>
+        </p:blipFill>
+        <p:spPr>
+          <a:xfrm>
             <a:off x="9695447" y="1463040"/>
             <a:ext cx="1947608" cy="4114800"/>
           </a:xfrm>
@@ -7442,7 +6778,7 @@
           <a:bodyPr wrap="square" lIns="0" tIns="0" rIns="0" bIns="0" rtlCol="0" anchor="t"/>
           <a:lstStyle/>
           <a:p>
-            <a:pPr algn="ctr" indent="0" marL="0">
+            <a:pPr marL="0" indent="0" algn="ctr">
               <a:buNone/>
             </a:pPr>
             <a:r>
@@ -7478,7 +6814,7 @@
           <a:bodyPr wrap="square" lIns="0" tIns="0" rIns="0" bIns="0" rtlCol="0" anchor="t"/>
           <a:lstStyle/>
           <a:p>
-            <a:pPr algn="ctr" indent="0" marL="0">
+            <a:pPr marL="0" indent="0" algn="ctr">
               <a:buNone/>
             </a:pPr>
             <a:r>
@@ -7513,7 +6849,7 @@
           </a:prstGeom>
           <a:extLst>
             <a:ext uri="{C572A759-6A51-4108-AA02-DFA0A04FC94B}">
-              <ma14:wrappingTextBoxFlag xmlns:ma14="http://schemas.microsoft.com/office/mac/drawingml/2011/main" val="0"/>
+              <ma14:wrappingTextBoxFlag xmlns:ma14="http://schemas.microsoft.com/office/mac/drawingml/2011/main" xmlns="" val="0"/>
             </a:ext>
           </a:extLst>
         </p:spPr>
@@ -7531,7 +6867,7 @@
           <a:p>
             <a:pPr algn="r"/>
             <a:fld id="{F7021451-1387-4CA6-816F-3879F97B5CBC}" type="slidenum">
-              <a:rPr b="0" lang="en-US"/>
+              <a:rPr lang="en-US" b="0"/>
               <a:t>4</a:t>
             </a:fld>
             <a:endParaRPr lang="en-US"/>
@@ -7566,9 +6902,11 @@
       <p:sp>
         <p:nvSpPr>
           <p:cNvPr id="2" name="Text 1"/>
-          <p:cNvSpPr/>
+          <p:cNvSpPr>
+            <a:spLocks noGrp="1"/>
+          </p:cNvSpPr>
           <p:nvPr>
-            <p:ph idx="101" type="title" hasCustomPrompt="1"/>
+            <p:ph type="title" idx="101" hasCustomPrompt="1"/>
           </p:nvPr>
         </p:nvSpPr>
         <p:spPr>
@@ -7586,7 +6924,7 @@
           <a:bodyPr wrap="square" lIns="0" tIns="0" rIns="0" bIns="0" rtlCol="0" anchor="ctr"/>
           <a:lstStyle/>
           <a:p>
-            <a:pPr algn="l" indent="0" marL="0">
+            <a:pPr marL="0" indent="0" algn="l">
               <a:buNone/>
             </a:pPr>
             <a:r>
@@ -7606,203 +6944,7 @@
       </p:sp>
       <p:pic>
         <p:nvPicPr>
-          <p:cNvPr id="3" name="Requests page" descr="C:\Users\Dave\AppData\Local\Temp\claude\E--DEVELOPER--WEB--PARISH-MEMBERS-REGISTRY\9cfa56b2-76b0-4da3-8bb7-a6a7d55b9d8c\scratchpad\img\browser-adm-requests.png">    </p:cNvPr>
-          <p:cNvPicPr>
-            <a:picLocks noChangeAspect="1"/>
-          </p:cNvPicPr>
-          <p:nvPr/>
-        </p:nvPicPr>
-        <p:blipFill>
-          <a:blip r:embed="rId1"/>
-          <a:stretch>
-            <a:fillRect/>
-          </a:stretch>
-        </p:blipFill>
-        <p:spPr>
-          <a:xfrm>
-            <a:off x="548640" y="1463040"/>
-            <a:ext cx="5949193" cy="4526280"/>
-          </a:xfrm>
-          <a:prstGeom prst="rect">
-            <a:avLst/>
-          </a:prstGeom>
-        </p:spPr>
-      </p:pic>
-      <p:sp>
-        <p:nvSpPr>
-          <p:cNvPr id="4" name="Text 1"/>
-          <p:cNvSpPr txBox="1"/>
-          <p:nvPr/>
-        </p:nvSpPr>
-        <p:spPr>
-          <a:xfrm>
-            <a:off x="548640" y="6035040"/>
-            <a:ext cx="5949193" cy="256032"/>
-          </a:xfrm>
-          <a:prstGeom prst="rect">
-            <a:avLst/>
-          </a:prstGeom>
-          <a:noFill/>
-          <a:ln/>
-        </p:spPr>
-        <p:txBody>
-          <a:bodyPr wrap="square" lIns="0" tIns="0" rIns="0" bIns="0" rtlCol="0" anchor="t"/>
-          <a:lstStyle/>
-          <a:p>
-            <a:pPr algn="l" indent="0" marL="0">
-              <a:buNone/>
-            </a:pPr>
-            <a:r>
-              <a:rPr lang="en-US" sz="1000" i="1" dirty="0">
-                <a:solidFill>
-                  <a:schemeClr val="accent5"/>
-                </a:solidFill>
-              </a:rPr>
-              <a:t>Requests page on the demo site, with sample data</a:t>
-            </a:r>
-            <a:endParaRPr lang="en-US" sz="1000" dirty="0"/>
-          </a:p>
-        </p:txBody>
-      </p:sp>
-      <p:sp>
-        <p:nvSpPr>
-          <p:cNvPr id="5" name="New families wait to be verified circle"/>
-          <p:cNvSpPr/>
-          <p:nvPr/>
-        </p:nvSpPr>
-        <p:spPr>
-          <a:xfrm>
-            <a:off x="6909313" y="1481328"/>
-            <a:ext cx="475488" cy="475488"/>
-          </a:xfrm>
-          <a:prstGeom prst="ellipse">
-            <a:avLst/>
-          </a:prstGeom>
-          <a:solidFill>
-            <a:schemeClr val="accent1"/>
-          </a:solidFill>
-          <a:ln/>
-        </p:spPr>
-      </p:sp>
-      <p:pic>
-        <p:nvPicPr>
-          <p:cNvPr id="6" name="New families wait to be verified icon" descr="preencoded.png">    </p:cNvPr>
-          <p:cNvPicPr>
-            <a:picLocks noChangeAspect="1"/>
-          </p:cNvPicPr>
-          <p:nvPr/>
-        </p:nvPicPr>
-        <p:blipFill>
-          <a:blip r:embed="rId2"/>
-          <a:stretch>
-            <a:fillRect/>
-          </a:stretch>
-        </p:blipFill>
-        <p:spPr>
-          <a:xfrm>
-            <a:off x="7028185" y="1600200"/>
-            <a:ext cx="237744" cy="237744"/>
-          </a:xfrm>
-          <a:prstGeom prst="rect">
-            <a:avLst/>
-          </a:prstGeom>
-        </p:spPr>
-      </p:pic>
-      <p:sp>
-        <p:nvSpPr>
-          <p:cNvPr id="7" name="Text 3"/>
-          <p:cNvSpPr txBox="1"/>
-          <p:nvPr/>
-        </p:nvSpPr>
-        <p:spPr>
-          <a:xfrm>
-            <a:off x="7549393" y="1444752"/>
-            <a:ext cx="4093662" cy="329184"/>
-          </a:xfrm>
-          <a:prstGeom prst="rect">
-            <a:avLst/>
-          </a:prstGeom>
-          <a:noFill/>
-          <a:ln/>
-        </p:spPr>
-        <p:txBody>
-          <a:bodyPr wrap="square" lIns="0" tIns="0" rIns="0" bIns="0" rtlCol="0" anchor="t"/>
-          <a:lstStyle/>
-          <a:p>
-            <a:pPr indent="0" marL="0">
-              <a:buNone/>
-            </a:pPr>
-            <a:r>
-              <a:rPr lang="en-US" sz="1600" b="1" dirty="0">
-                <a:solidFill>
-                  <a:schemeClr val="tx2"/>
-                </a:solidFill>
-              </a:rPr>
-              <a:t>New families wait to be verified</a:t>
-            </a:r>
-            <a:endParaRPr lang="en-US" sz="1600" dirty="0"/>
-          </a:p>
-        </p:txBody>
-      </p:sp>
-      <p:sp>
-        <p:nvSpPr>
-          <p:cNvPr id="8" name="Text 4"/>
-          <p:cNvSpPr txBox="1"/>
-          <p:nvPr/>
-        </p:nvSpPr>
-        <p:spPr>
-          <a:xfrm>
-            <a:off x="7549393" y="1783080"/>
-            <a:ext cx="4093662" cy="502920"/>
-          </a:xfrm>
-          <a:prstGeom prst="rect">
-            <a:avLst/>
-          </a:prstGeom>
-          <a:noFill/>
-          <a:ln/>
-        </p:spPr>
-        <p:txBody>
-          <a:bodyPr wrap="square" lIns="0" tIns="0" rIns="0" bIns="0" rtlCol="0" anchor="t"/>
-          <a:lstStyle/>
-          <a:p>
-            <a:pPr indent="0" marL="0">
-              <a:buNone/>
-            </a:pPr>
-            <a:r>
-              <a:rPr lang="en-US" sz="1400" dirty="0">
-                <a:solidFill>
-                  <a:schemeClr val="tx1"/>
-                </a:solidFill>
-              </a:rPr>
-              <a:t>Staff check each one; who verified it is recorded.</a:t>
-            </a:r>
-            <a:endParaRPr lang="en-US" sz="1400" dirty="0"/>
-          </a:p>
-        </p:txBody>
-      </p:sp>
-      <p:sp>
-        <p:nvSpPr>
-          <p:cNvPr id="9" name="Duplicates are flagged circle"/>
-          <p:cNvSpPr/>
-          <p:nvPr/>
-        </p:nvSpPr>
-        <p:spPr>
-          <a:xfrm>
-            <a:off x="6909313" y="2395728"/>
-            <a:ext cx="475488" cy="475488"/>
-          </a:xfrm>
-          <a:prstGeom prst="ellipse">
-            <a:avLst/>
-          </a:prstGeom>
-          <a:solidFill>
-            <a:schemeClr val="accent1"/>
-          </a:solidFill>
-          <a:ln/>
-        </p:spPr>
-      </p:sp>
-      <p:pic>
-        <p:nvPicPr>
-          <p:cNvPr id="10" name="Duplicates are flagged icon" descr="preencoded.png">    </p:cNvPr>
+          <p:cNvPr id="3" name="Requests page" descr="C:\Users\Dave\AppData\Local\Temp\claude\E--DEVELOPER--WEB--PARISH-MEMBERS-REGISTRY\9cfa56b2-76b0-4da3-8bb7-a6a7d55b9d8c\scratchpad\img\browser-adm-requests.png"/>
           <p:cNvPicPr>
             <a:picLocks noChangeAspect="1"/>
           </p:cNvPicPr>
@@ -7816,8 +6958,8 @@
         </p:blipFill>
         <p:spPr>
           <a:xfrm>
-            <a:off x="7028185" y="2514600"/>
-            <a:ext cx="237744" cy="237744"/>
+            <a:off x="548640" y="1463040"/>
+            <a:ext cx="5949193" cy="4526280"/>
           </a:xfrm>
           <a:prstGeom prst="rect">
             <a:avLst/>
@@ -7826,14 +6968,14 @@
       </p:pic>
       <p:sp>
         <p:nvSpPr>
-          <p:cNvPr id="11" name="Text 6"/>
+          <p:cNvPr id="4" name="Text 1"/>
           <p:cNvSpPr txBox="1"/>
           <p:nvPr/>
         </p:nvSpPr>
         <p:spPr>
           <a:xfrm>
-            <a:off x="7549393" y="2359152"/>
-            <a:ext cx="4093662" cy="329184"/>
+            <a:off x="548640" y="6035040"/>
+            <a:ext cx="5949193" cy="256032"/>
           </a:xfrm>
           <a:prstGeom prst="rect">
             <a:avLst/>
@@ -7845,66 +6987,30 @@
           <a:bodyPr wrap="square" lIns="0" tIns="0" rIns="0" bIns="0" rtlCol="0" anchor="t"/>
           <a:lstStyle/>
           <a:p>
-            <a:pPr indent="0" marL="0">
-              <a:buNone/>
-            </a:pPr>
-            <a:r>
-              <a:rPr lang="en-US" sz="1600" b="1" dirty="0">
-                <a:solidFill>
-                  <a:schemeClr val="tx2"/>
-                </a:solidFill>
-              </a:rPr>
-              <a:t>Duplicates are flagged</a:t>
-            </a:r>
-            <a:endParaRPr lang="en-US" sz="1600" dirty="0"/>
-          </a:p>
-        </p:txBody>
-      </p:sp>
-      <p:sp>
-        <p:nvSpPr>
-          <p:cNvPr id="12" name="Text 7"/>
-          <p:cNvSpPr txBox="1"/>
-          <p:nvPr/>
-        </p:nvSpPr>
-        <p:spPr>
-          <a:xfrm>
-            <a:off x="7549393" y="2697480"/>
-            <a:ext cx="4093662" cy="502920"/>
-          </a:xfrm>
-          <a:prstGeom prst="rect">
-            <a:avLst/>
-          </a:prstGeom>
-          <a:noFill/>
-          <a:ln/>
-        </p:spPr>
-        <p:txBody>
-          <a:bodyPr wrap="square" lIns="0" tIns="0" rIns="0" bIns="0" rtlCol="0" anchor="t"/>
-          <a:lstStyle/>
-          <a:p>
-            <a:pPr indent="0" marL="0">
-              <a:buNone/>
-            </a:pPr>
-            <a:r>
-              <a:rPr lang="en-US" sz="1400" dirty="0">
-                <a:solidFill>
-                  <a:schemeClr val="tx1"/>
-                </a:solidFill>
-              </a:rPr>
-              <a:t>The same person or house registered twice is caught.</a:t>
-            </a:r>
-            <a:endParaRPr lang="en-US" sz="1400" dirty="0"/>
-          </a:p>
-        </p:txBody>
-      </p:sp>
-      <p:sp>
-        <p:nvSpPr>
-          <p:cNvPr id="13" name="Every request is tracked circle"/>
+            <a:pPr marL="0" indent="0" algn="l">
+              <a:buNone/>
+            </a:pPr>
+            <a:r>
+              <a:rPr lang="en-US" sz="1000" i="1" dirty="0">
+                <a:solidFill>
+                  <a:schemeClr val="accent5"/>
+                </a:solidFill>
+              </a:rPr>
+              <a:t>Requests page on the demo site, with sample data</a:t>
+            </a:r>
+            <a:endParaRPr lang="en-US" sz="1000" dirty="0"/>
+          </a:p>
+        </p:txBody>
+      </p:sp>
+      <p:sp>
+        <p:nvSpPr>
+          <p:cNvPr id="5" name="New families wait to be verified circle"/>
           <p:cNvSpPr/>
           <p:nvPr/>
         </p:nvSpPr>
         <p:spPr>
           <a:xfrm>
-            <a:off x="6909313" y="3310128"/>
+            <a:off x="6909313" y="1481328"/>
             <a:ext cx="475488" cy="475488"/>
           </a:xfrm>
           <a:prstGeom prst="ellipse">
@@ -7918,7 +7024,7 @@
       </p:sp>
       <p:pic>
         <p:nvPicPr>
-          <p:cNvPr id="14" name="Every request is tracked icon" descr="preencoded.png">    </p:cNvPr>
+          <p:cNvPr id="6" name="New families wait to be verified icon" descr="preencoded.png"/>
           <p:cNvPicPr>
             <a:picLocks noChangeAspect="1"/>
           </p:cNvPicPr>
@@ -7932,7 +7038,7 @@
         </p:blipFill>
         <p:spPr>
           <a:xfrm>
-            <a:off x="7028185" y="3429000"/>
+            <a:off x="7028185" y="1600200"/>
             <a:ext cx="237744" cy="237744"/>
           </a:xfrm>
           <a:prstGeom prst="rect">
@@ -7942,13 +7048,13 @@
       </p:pic>
       <p:sp>
         <p:nvSpPr>
-          <p:cNvPr id="15" name="Text 9"/>
+          <p:cNvPr id="7" name="Text 3"/>
           <p:cNvSpPr txBox="1"/>
           <p:nvPr/>
         </p:nvSpPr>
         <p:spPr>
           <a:xfrm>
-            <a:off x="7549393" y="3273552"/>
+            <a:off x="7549393" y="1444752"/>
             <a:ext cx="4093662" cy="329184"/>
           </a:xfrm>
           <a:prstGeom prst="rect">
@@ -7961,7 +7067,7 @@
           <a:bodyPr wrap="square" lIns="0" tIns="0" rIns="0" bIns="0" rtlCol="0" anchor="t"/>
           <a:lstStyle/>
           <a:p>
-            <a:pPr indent="0" marL="0">
+            <a:pPr marL="0" indent="0">
               <a:buNone/>
             </a:pPr>
             <a:r>
@@ -7970,7 +7076,7 @@
                   <a:schemeClr val="tx2"/>
                 </a:solidFill>
               </a:rPr>
-              <a:t>Every request is tracked</a:t>
+              <a:t>New families wait to be verified</a:t>
             </a:r>
             <a:endParaRPr lang="en-US" sz="1600" dirty="0"/>
           </a:p>
@@ -7978,13 +7084,13 @@
       </p:sp>
       <p:sp>
         <p:nvSpPr>
-          <p:cNvPr id="16" name="Text 10"/>
+          <p:cNvPr id="8" name="Text 4"/>
           <p:cNvSpPr txBox="1"/>
           <p:nvPr/>
         </p:nvSpPr>
         <p:spPr>
           <a:xfrm>
-            <a:off x="7549393" y="3611880"/>
+            <a:off x="7549393" y="1783080"/>
             <a:ext cx="4093662" cy="502920"/>
           </a:xfrm>
           <a:prstGeom prst="rect">
@@ -7997,7 +7103,7 @@
           <a:bodyPr wrap="square" lIns="0" tIns="0" rIns="0" bIns="0" rtlCol="0" anchor="t"/>
           <a:lstStyle/>
           <a:p>
-            <a:pPr indent="0" marL="0">
+            <a:pPr marL="0" indent="0">
               <a:buNone/>
             </a:pPr>
             <a:r>
@@ -8006,7 +7112,7 @@
                   <a:schemeClr val="tx1"/>
                 </a:solidFill>
               </a:rPr>
-              <a:t>From Received to Released, with a reference number.</a:t>
+              <a:t>Staff check each one; who verified it is recorded.</a:t>
             </a:r>
             <a:endParaRPr lang="en-US" sz="1400" dirty="0"/>
           </a:p>
@@ -8014,13 +7120,13 @@
       </p:sp>
       <p:sp>
         <p:nvSpPr>
-          <p:cNvPr id="17" name="Phone alerts for new requests circle"/>
+          <p:cNvPr id="9" name="Duplicates are flagged circle"/>
           <p:cNvSpPr/>
           <p:nvPr/>
         </p:nvSpPr>
         <p:spPr>
           <a:xfrm>
-            <a:off x="6909313" y="4224528"/>
+            <a:off x="6909313" y="2395728"/>
             <a:ext cx="475488" cy="475488"/>
           </a:xfrm>
           <a:prstGeom prst="ellipse">
@@ -8034,7 +7140,7 @@
       </p:sp>
       <p:pic>
         <p:nvPicPr>
-          <p:cNvPr id="18" name="Phone alerts for new requests icon" descr="preencoded.png">    </p:cNvPr>
+          <p:cNvPr id="10" name="Duplicates are flagged icon" descr="preencoded.png"/>
           <p:cNvPicPr>
             <a:picLocks noChangeAspect="1"/>
           </p:cNvPicPr>
@@ -8048,7 +7154,7 @@
         </p:blipFill>
         <p:spPr>
           <a:xfrm>
-            <a:off x="7028185" y="4343400"/>
+            <a:off x="7028185" y="2514600"/>
             <a:ext cx="237744" cy="237744"/>
           </a:xfrm>
           <a:prstGeom prst="rect">
@@ -8058,13 +7164,13 @@
       </p:pic>
       <p:sp>
         <p:nvSpPr>
-          <p:cNvPr id="19" name="Text 12"/>
+          <p:cNvPr id="11" name="Text 6"/>
           <p:cNvSpPr txBox="1"/>
           <p:nvPr/>
         </p:nvSpPr>
         <p:spPr>
           <a:xfrm>
-            <a:off x="7549393" y="4187952"/>
+            <a:off x="7549393" y="2359152"/>
             <a:ext cx="4093662" cy="329184"/>
           </a:xfrm>
           <a:prstGeom prst="rect">
@@ -8077,7 +7183,7 @@
           <a:bodyPr wrap="square" lIns="0" tIns="0" rIns="0" bIns="0" rtlCol="0" anchor="t"/>
           <a:lstStyle/>
           <a:p>
-            <a:pPr indent="0" marL="0">
+            <a:pPr marL="0" indent="0">
               <a:buNone/>
             </a:pPr>
             <a:r>
@@ -8086,7 +7192,7 @@
                   <a:schemeClr val="tx2"/>
                 </a:solidFill>
               </a:rPr>
-              <a:t>Phone alerts for new requests</a:t>
+              <a:t>Duplicates are flagged</a:t>
             </a:r>
             <a:endParaRPr lang="en-US" sz="1600" dirty="0"/>
           </a:p>
@@ -8094,13 +7200,13 @@
       </p:sp>
       <p:sp>
         <p:nvSpPr>
-          <p:cNvPr id="20" name="Text 13"/>
+          <p:cNvPr id="12" name="Text 7"/>
           <p:cNvSpPr txBox="1"/>
           <p:nvPr/>
         </p:nvSpPr>
         <p:spPr>
           <a:xfrm>
-            <a:off x="7549393" y="4526280"/>
+            <a:off x="7549393" y="2697480"/>
             <a:ext cx="4093662" cy="502920"/>
           </a:xfrm>
           <a:prstGeom prst="rect">
@@ -8113,7 +7219,7 @@
           <a:bodyPr wrap="square" lIns="0" tIns="0" rIns="0" bIns="0" rtlCol="0" anchor="t"/>
           <a:lstStyle/>
           <a:p>
-            <a:pPr indent="0" marL="0">
+            <a:pPr marL="0" indent="0">
               <a:buNone/>
             </a:pPr>
             <a:r>
@@ -8122,7 +7228,7 @@
                   <a:schemeClr val="tx1"/>
                 </a:solidFill>
               </a:rPr>
-              <a:t>Plus a 7:00 AM summary of what is still waiting.</a:t>
+              <a:t>The same person or house registered twice is caught.</a:t>
             </a:r>
             <a:endParaRPr lang="en-US" sz="1400" dirty="0"/>
           </a:p>
@@ -8130,13 +7236,13 @@
       </p:sp>
       <p:sp>
         <p:nvSpPr>
-          <p:cNvPr id="21" name="Nothing lost by mistake circle"/>
+          <p:cNvPr id="13" name="Every request is tracked circle"/>
           <p:cNvSpPr/>
           <p:nvPr/>
         </p:nvSpPr>
         <p:spPr>
           <a:xfrm>
-            <a:off x="6909313" y="5138928"/>
+            <a:off x="6909313" y="3310128"/>
             <a:ext cx="475488" cy="475488"/>
           </a:xfrm>
           <a:prstGeom prst="ellipse">
@@ -8150,7 +7256,7 @@
       </p:sp>
       <p:pic>
         <p:nvPicPr>
-          <p:cNvPr id="22" name="Nothing lost by mistake icon" descr="preencoded.png">    </p:cNvPr>
+          <p:cNvPr id="14" name="Every request is tracked icon" descr="preencoded.png"/>
           <p:cNvPicPr>
             <a:picLocks noChangeAspect="1"/>
           </p:cNvPicPr>
@@ -8164,6 +7270,238 @@
         </p:blipFill>
         <p:spPr>
           <a:xfrm>
+            <a:off x="7028185" y="3429000"/>
+            <a:ext cx="237744" cy="237744"/>
+          </a:xfrm>
+          <a:prstGeom prst="rect">
+            <a:avLst/>
+          </a:prstGeom>
+        </p:spPr>
+      </p:pic>
+      <p:sp>
+        <p:nvSpPr>
+          <p:cNvPr id="15" name="Text 9"/>
+          <p:cNvSpPr txBox="1"/>
+          <p:nvPr/>
+        </p:nvSpPr>
+        <p:spPr>
+          <a:xfrm>
+            <a:off x="7549393" y="3273552"/>
+            <a:ext cx="4093662" cy="329184"/>
+          </a:xfrm>
+          <a:prstGeom prst="rect">
+            <a:avLst/>
+          </a:prstGeom>
+          <a:noFill/>
+          <a:ln/>
+        </p:spPr>
+        <p:txBody>
+          <a:bodyPr wrap="square" lIns="0" tIns="0" rIns="0" bIns="0" rtlCol="0" anchor="t"/>
+          <a:lstStyle/>
+          <a:p>
+            <a:pPr marL="0" indent="0">
+              <a:buNone/>
+            </a:pPr>
+            <a:r>
+              <a:rPr lang="en-US" sz="1600" b="1" dirty="0">
+                <a:solidFill>
+                  <a:schemeClr val="tx2"/>
+                </a:solidFill>
+              </a:rPr>
+              <a:t>Every request is tracked</a:t>
+            </a:r>
+            <a:endParaRPr lang="en-US" sz="1600" dirty="0"/>
+          </a:p>
+        </p:txBody>
+      </p:sp>
+      <p:sp>
+        <p:nvSpPr>
+          <p:cNvPr id="16" name="Text 10"/>
+          <p:cNvSpPr txBox="1"/>
+          <p:nvPr/>
+        </p:nvSpPr>
+        <p:spPr>
+          <a:xfrm>
+            <a:off x="7549393" y="3611880"/>
+            <a:ext cx="4093662" cy="502920"/>
+          </a:xfrm>
+          <a:prstGeom prst="rect">
+            <a:avLst/>
+          </a:prstGeom>
+          <a:noFill/>
+          <a:ln/>
+        </p:spPr>
+        <p:txBody>
+          <a:bodyPr wrap="square" lIns="0" tIns="0" rIns="0" bIns="0" rtlCol="0" anchor="t"/>
+          <a:lstStyle/>
+          <a:p>
+            <a:pPr marL="0" indent="0">
+              <a:buNone/>
+            </a:pPr>
+            <a:r>
+              <a:rPr lang="en-US" sz="1400" dirty="0">
+                <a:solidFill>
+                  <a:schemeClr val="tx1"/>
+                </a:solidFill>
+              </a:rPr>
+              <a:t>From Received to Released, with a reference number.</a:t>
+            </a:r>
+            <a:endParaRPr lang="en-US" sz="1400" dirty="0"/>
+          </a:p>
+        </p:txBody>
+      </p:sp>
+      <p:sp>
+        <p:nvSpPr>
+          <p:cNvPr id="17" name="Phone alerts for new requests circle"/>
+          <p:cNvSpPr/>
+          <p:nvPr/>
+        </p:nvSpPr>
+        <p:spPr>
+          <a:xfrm>
+            <a:off x="6909313" y="4224528"/>
+            <a:ext cx="475488" cy="475488"/>
+          </a:xfrm>
+          <a:prstGeom prst="ellipse">
+            <a:avLst/>
+          </a:prstGeom>
+          <a:solidFill>
+            <a:schemeClr val="accent1"/>
+          </a:solidFill>
+          <a:ln/>
+        </p:spPr>
+      </p:sp>
+      <p:pic>
+        <p:nvPicPr>
+          <p:cNvPr id="18" name="Phone alerts for new requests icon" descr="preencoded.png"/>
+          <p:cNvPicPr>
+            <a:picLocks noChangeAspect="1"/>
+          </p:cNvPicPr>
+          <p:nvPr/>
+        </p:nvPicPr>
+        <p:blipFill>
+          <a:blip r:embed="rId7"/>
+          <a:stretch>
+            <a:fillRect/>
+          </a:stretch>
+        </p:blipFill>
+        <p:spPr>
+          <a:xfrm>
+            <a:off x="7028185" y="4343400"/>
+            <a:ext cx="237744" cy="237744"/>
+          </a:xfrm>
+          <a:prstGeom prst="rect">
+            <a:avLst/>
+          </a:prstGeom>
+        </p:spPr>
+      </p:pic>
+      <p:sp>
+        <p:nvSpPr>
+          <p:cNvPr id="19" name="Text 12"/>
+          <p:cNvSpPr txBox="1"/>
+          <p:nvPr/>
+        </p:nvSpPr>
+        <p:spPr>
+          <a:xfrm>
+            <a:off x="7549393" y="4187952"/>
+            <a:ext cx="4093662" cy="329184"/>
+          </a:xfrm>
+          <a:prstGeom prst="rect">
+            <a:avLst/>
+          </a:prstGeom>
+          <a:noFill/>
+          <a:ln/>
+        </p:spPr>
+        <p:txBody>
+          <a:bodyPr wrap="square" lIns="0" tIns="0" rIns="0" bIns="0" rtlCol="0" anchor="t"/>
+          <a:lstStyle/>
+          <a:p>
+            <a:pPr marL="0" indent="0">
+              <a:buNone/>
+            </a:pPr>
+            <a:r>
+              <a:rPr lang="en-US" sz="1600" b="1" dirty="0">
+                <a:solidFill>
+                  <a:schemeClr val="tx2"/>
+                </a:solidFill>
+              </a:rPr>
+              <a:t>Phone alerts for new requests</a:t>
+            </a:r>
+            <a:endParaRPr lang="en-US" sz="1600" dirty="0"/>
+          </a:p>
+        </p:txBody>
+      </p:sp>
+      <p:sp>
+        <p:nvSpPr>
+          <p:cNvPr id="20" name="Text 13"/>
+          <p:cNvSpPr txBox="1"/>
+          <p:nvPr/>
+        </p:nvSpPr>
+        <p:spPr>
+          <a:xfrm>
+            <a:off x="7549393" y="4526280"/>
+            <a:ext cx="4093662" cy="502920"/>
+          </a:xfrm>
+          <a:prstGeom prst="rect">
+            <a:avLst/>
+          </a:prstGeom>
+          <a:noFill/>
+          <a:ln/>
+        </p:spPr>
+        <p:txBody>
+          <a:bodyPr wrap="square" lIns="0" tIns="0" rIns="0" bIns="0" rtlCol="0" anchor="t"/>
+          <a:lstStyle/>
+          <a:p>
+            <a:pPr marL="0" indent="0">
+              <a:buNone/>
+            </a:pPr>
+            <a:r>
+              <a:rPr lang="en-US" sz="1400" dirty="0">
+                <a:solidFill>
+                  <a:schemeClr val="tx1"/>
+                </a:solidFill>
+              </a:rPr>
+              <a:t>Plus a 7:00 AM summary of what is still waiting.</a:t>
+            </a:r>
+            <a:endParaRPr lang="en-US" sz="1400" dirty="0"/>
+          </a:p>
+        </p:txBody>
+      </p:sp>
+      <p:sp>
+        <p:nvSpPr>
+          <p:cNvPr id="21" name="Nothing lost by mistake circle"/>
+          <p:cNvSpPr/>
+          <p:nvPr/>
+        </p:nvSpPr>
+        <p:spPr>
+          <a:xfrm>
+            <a:off x="6909313" y="5138928"/>
+            <a:ext cx="475488" cy="475488"/>
+          </a:xfrm>
+          <a:prstGeom prst="ellipse">
+            <a:avLst/>
+          </a:prstGeom>
+          <a:solidFill>
+            <a:schemeClr val="accent1"/>
+          </a:solidFill>
+          <a:ln/>
+        </p:spPr>
+      </p:sp>
+      <p:pic>
+        <p:nvPicPr>
+          <p:cNvPr id="22" name="Nothing lost by mistake icon" descr="preencoded.png"/>
+          <p:cNvPicPr>
+            <a:picLocks noChangeAspect="1"/>
+          </p:cNvPicPr>
+          <p:nvPr/>
+        </p:nvPicPr>
+        <p:blipFill>
+          <a:blip r:embed="rId8"/>
+          <a:stretch>
+            <a:fillRect/>
+          </a:stretch>
+        </p:blipFill>
+        <p:spPr>
+          <a:xfrm>
             <a:off x="7028185" y="5257800"/>
             <a:ext cx="237744" cy="237744"/>
           </a:xfrm>
@@ -8193,7 +7531,7 @@
           <a:bodyPr wrap="square" lIns="0" tIns="0" rIns="0" bIns="0" rtlCol="0" anchor="t"/>
           <a:lstStyle/>
           <a:p>
-            <a:pPr indent="0" marL="0">
+            <a:pPr marL="0" indent="0">
               <a:buNone/>
             </a:pPr>
             <a:r>
@@ -8229,7 +7567,7 @@
           <a:bodyPr wrap="square" lIns="0" tIns="0" rIns="0" bIns="0" rtlCol="0" anchor="t"/>
           <a:lstStyle/>
           <a:p>
-            <a:pPr indent="0" marL="0">
+            <a:pPr marL="0" indent="0">
               <a:buNone/>
             </a:pPr>
             <a:r>
@@ -8264,7 +7602,7 @@
           </a:prstGeom>
           <a:extLst>
             <a:ext uri="{C572A759-6A51-4108-AA02-DFA0A04FC94B}">
-              <ma14:wrappingTextBoxFlag xmlns:ma14="http://schemas.microsoft.com/office/mac/drawingml/2011/main" val="0"/>
+              <ma14:wrappingTextBoxFlag xmlns:ma14="http://schemas.microsoft.com/office/mac/drawingml/2011/main" xmlns="" val="0"/>
             </a:ext>
           </a:extLst>
         </p:spPr>
@@ -8282,7 +7620,7 @@
           <a:p>
             <a:pPr algn="r"/>
             <a:fld id="{F7021451-1387-4CA6-816F-3879F97B5CBC}" type="slidenum">
-              <a:rPr b="0" lang="en-US"/>
+              <a:rPr lang="en-US" b="0"/>
               <a:t>5</a:t>
             </a:fld>
             <a:endParaRPr lang="en-US"/>
@@ -8317,9 +7655,11 @@
       <p:sp>
         <p:nvSpPr>
           <p:cNvPr id="2" name="Text 1"/>
-          <p:cNvSpPr/>
+          <p:cNvSpPr>
+            <a:spLocks noGrp="1"/>
+          </p:cNvSpPr>
           <p:nvPr>
-            <p:ph idx="101" type="title" hasCustomPrompt="1"/>
+            <p:ph type="title" idx="101" hasCustomPrompt="1"/>
           </p:nvPr>
         </p:nvSpPr>
         <p:spPr>
@@ -8337,7 +7677,7 @@
           <a:bodyPr wrap="square" lIns="0" tIns="0" rIns="0" bIns="0" rtlCol="0" anchor="ctr"/>
           <a:lstStyle/>
           <a:p>
-            <a:pPr algn="l" indent="0" marL="0">
+            <a:pPr marL="0" indent="0" algn="l">
               <a:buNone/>
             </a:pPr>
             <a:r>
@@ -8357,203 +7697,7 @@
       </p:sp>
       <p:pic>
         <p:nvPicPr>
-          <p:cNvPr id="3" name="Census page" descr="C:\Users\Dave\AppData\Local\Temp\claude\E--DEVELOPER--WEB--PARISH-MEMBERS-REGISTRY\9cfa56b2-76b0-4da3-8bb7-a6a7d55b9d8c\scratchpad\img\browser-adm-census.png">    </p:cNvPr>
-          <p:cNvPicPr>
-            <a:picLocks noChangeAspect="1"/>
-          </p:cNvPicPr>
-          <p:nvPr/>
-        </p:nvPicPr>
-        <p:blipFill>
-          <a:blip r:embed="rId1"/>
-          <a:stretch>
-            <a:fillRect/>
-          </a:stretch>
-        </p:blipFill>
-        <p:spPr>
-          <a:xfrm>
-            <a:off x="5693862" y="1463040"/>
-            <a:ext cx="5949193" cy="4526280"/>
-          </a:xfrm>
-          <a:prstGeom prst="rect">
-            <a:avLst/>
-          </a:prstGeom>
-        </p:spPr>
-      </p:pic>
-      <p:sp>
-        <p:nvSpPr>
-          <p:cNvPr id="4" name="Text 1"/>
-          <p:cNvSpPr txBox="1"/>
-          <p:nvPr/>
-        </p:nvSpPr>
-        <p:spPr>
-          <a:xfrm>
-            <a:off x="5693862" y="6035040"/>
-            <a:ext cx="5949193" cy="256032"/>
-          </a:xfrm>
-          <a:prstGeom prst="rect">
-            <a:avLst/>
-          </a:prstGeom>
-          <a:noFill/>
-          <a:ln/>
-        </p:spPr>
-        <p:txBody>
-          <a:bodyPr wrap="square" lIns="0" tIns="0" rIns="0" bIns="0" rtlCol="0" anchor="t"/>
-          <a:lstStyle/>
-          <a:p>
-            <a:pPr algn="l" indent="0" marL="0">
-              <a:buNone/>
-            </a:pPr>
-            <a:r>
-              <a:rPr lang="en-US" sz="1000" i="1" dirty="0">
-                <a:solidFill>
-                  <a:schemeClr val="accent5"/>
-                </a:solidFill>
-              </a:rPr>
-              <a:t>Census page on the demo site, with sample data</a:t>
-            </a:r>
-            <a:endParaRPr lang="en-US" sz="1000" dirty="0"/>
-          </a:p>
-        </p:txBody>
-      </p:sp>
-      <p:sp>
-        <p:nvSpPr>
-          <p:cNvPr id="5" name="Only their own GKK circle"/>
-          <p:cNvSpPr/>
-          <p:nvPr/>
-        </p:nvSpPr>
-        <p:spPr>
-          <a:xfrm>
-            <a:off x="548640" y="1572768"/>
-            <a:ext cx="512064" cy="512064"/>
-          </a:xfrm>
-          <a:prstGeom prst="ellipse">
-            <a:avLst/>
-          </a:prstGeom>
-          <a:solidFill>
-            <a:schemeClr val="accent1"/>
-          </a:solidFill>
-          <a:ln/>
-        </p:spPr>
-      </p:sp>
-      <p:pic>
-        <p:nvPicPr>
-          <p:cNvPr id="6" name="Only their own GKK icon" descr="preencoded.png">    </p:cNvPr>
-          <p:cNvPicPr>
-            <a:picLocks noChangeAspect="1"/>
-          </p:cNvPicPr>
-          <p:nvPr/>
-        </p:nvPicPr>
-        <p:blipFill>
-          <a:blip r:embed="rId2"/>
-          <a:stretch>
-            <a:fillRect/>
-          </a:stretch>
-        </p:blipFill>
-        <p:spPr>
-          <a:xfrm>
-            <a:off x="676656" y="1700784"/>
-            <a:ext cx="256032" cy="256032"/>
-          </a:xfrm>
-          <a:prstGeom prst="rect">
-            <a:avLst/>
-          </a:prstGeom>
-        </p:spPr>
-      </p:pic>
-      <p:sp>
-        <p:nvSpPr>
-          <p:cNvPr id="7" name="Text 3"/>
-          <p:cNvSpPr txBox="1"/>
-          <p:nvPr/>
-        </p:nvSpPr>
-        <p:spPr>
-          <a:xfrm>
-            <a:off x="1234440" y="1545336"/>
-            <a:ext cx="4002222" cy="347472"/>
-          </a:xfrm>
-          <a:prstGeom prst="rect">
-            <a:avLst/>
-          </a:prstGeom>
-          <a:noFill/>
-          <a:ln/>
-        </p:spPr>
-        <p:txBody>
-          <a:bodyPr wrap="square" lIns="0" tIns="0" rIns="0" bIns="0" rtlCol="0" anchor="t"/>
-          <a:lstStyle/>
-          <a:p>
-            <a:pPr indent="0" marL="0">
-              <a:buNone/>
-            </a:pPr>
-            <a:r>
-              <a:rPr lang="en-US" sz="1700" b="1" dirty="0">
-                <a:solidFill>
-                  <a:schemeClr val="tx2"/>
-                </a:solidFill>
-              </a:rPr>
-              <a:t>Only their own GKK</a:t>
-            </a:r>
-            <a:endParaRPr lang="en-US" sz="1700" dirty="0"/>
-          </a:p>
-        </p:txBody>
-      </p:sp>
-      <p:sp>
-        <p:nvSpPr>
-          <p:cNvPr id="8" name="Text 4"/>
-          <p:cNvSpPr txBox="1"/>
-          <p:nvPr/>
-        </p:nvSpPr>
-        <p:spPr>
-          <a:xfrm>
-            <a:off x="1234440" y="1911096"/>
-            <a:ext cx="4002222" cy="640080"/>
-          </a:xfrm>
-          <a:prstGeom prst="rect">
-            <a:avLst/>
-          </a:prstGeom>
-          <a:noFill/>
-          <a:ln/>
-        </p:spPr>
-        <p:txBody>
-          <a:bodyPr wrap="square" lIns="0" tIns="0" rIns="0" bIns="0" rtlCol="0" anchor="t"/>
-          <a:lstStyle/>
-          <a:p>
-            <a:pPr indent="0" marL="0">
-              <a:buNone/>
-            </a:pPr>
-            <a:r>
-              <a:rPr lang="en-US" sz="1400" dirty="0">
-                <a:solidFill>
-                  <a:schemeClr val="tx1"/>
-                </a:solidFill>
-              </a:rPr>
-              <a:t>They see their own families and members, and no one else’s.</a:t>
-            </a:r>
-            <a:endParaRPr lang="en-US" sz="1400" dirty="0"/>
-          </a:p>
-        </p:txBody>
-      </p:sp>
-      <p:sp>
-        <p:nvSpPr>
-          <p:cNvPr id="9" name="Last year’s list, ticked off circle"/>
-          <p:cNvSpPr/>
-          <p:nvPr/>
-        </p:nvSpPr>
-        <p:spPr>
-          <a:xfrm>
-            <a:off x="548640" y="2688336"/>
-            <a:ext cx="512064" cy="512064"/>
-          </a:xfrm>
-          <a:prstGeom prst="ellipse">
-            <a:avLst/>
-          </a:prstGeom>
-          <a:solidFill>
-            <a:schemeClr val="accent1"/>
-          </a:solidFill>
-          <a:ln/>
-        </p:spPr>
-      </p:sp>
-      <p:pic>
-        <p:nvPicPr>
-          <p:cNvPr id="10" name="Last year’s list, ticked off icon" descr="preencoded.png">    </p:cNvPr>
+          <p:cNvPr id="3" name="Census page" descr="C:\Users\Dave\AppData\Local\Temp\claude\E--DEVELOPER--WEB--PARISH-MEMBERS-REGISTRY\9cfa56b2-76b0-4da3-8bb7-a6a7d55b9d8c\scratchpad\img\browser-adm-census.png"/>
           <p:cNvPicPr>
             <a:picLocks noChangeAspect="1"/>
           </p:cNvPicPr>
@@ -8567,8 +7711,8 @@
         </p:blipFill>
         <p:spPr>
           <a:xfrm>
-            <a:off x="676656" y="2816352"/>
-            <a:ext cx="256032" cy="256032"/>
+            <a:off x="5693862" y="1463040"/>
+            <a:ext cx="5949193" cy="4526280"/>
           </a:xfrm>
           <a:prstGeom prst="rect">
             <a:avLst/>
@@ -8577,14 +7721,14 @@
       </p:pic>
       <p:sp>
         <p:nvSpPr>
-          <p:cNvPr id="11" name="Text 6"/>
+          <p:cNvPr id="4" name="Text 1"/>
           <p:cNvSpPr txBox="1"/>
           <p:nvPr/>
         </p:nvSpPr>
         <p:spPr>
           <a:xfrm>
-            <a:off x="1234440" y="2660904"/>
-            <a:ext cx="4002222" cy="347472"/>
+            <a:off x="5693862" y="6035040"/>
+            <a:ext cx="5949193" cy="256032"/>
           </a:xfrm>
           <a:prstGeom prst="rect">
             <a:avLst/>
@@ -8596,66 +7740,30 @@
           <a:bodyPr wrap="square" lIns="0" tIns="0" rIns="0" bIns="0" rtlCol="0" anchor="t"/>
           <a:lstStyle/>
           <a:p>
-            <a:pPr indent="0" marL="0">
-              <a:buNone/>
-            </a:pPr>
-            <a:r>
-              <a:rPr lang="en-US" sz="1700" b="1" dirty="0">
-                <a:solidFill>
-                  <a:schemeClr val="tx2"/>
-                </a:solidFill>
-              </a:rPr>
-              <a:t>Last year’s list, ticked off</a:t>
-            </a:r>
-            <a:endParaRPr lang="en-US" sz="1700" dirty="0"/>
-          </a:p>
-        </p:txBody>
-      </p:sp>
-      <p:sp>
-        <p:nvSpPr>
-          <p:cNvPr id="12" name="Text 7"/>
-          <p:cNvSpPr txBox="1"/>
-          <p:nvPr/>
-        </p:nvSpPr>
-        <p:spPr>
-          <a:xfrm>
-            <a:off x="1234440" y="3026664"/>
-            <a:ext cx="4002222" cy="640080"/>
-          </a:xfrm>
-          <a:prstGeom prst="rect">
-            <a:avLst/>
-          </a:prstGeom>
-          <a:noFill/>
-          <a:ln/>
-        </p:spPr>
-        <p:txBody>
-          <a:bodyPr wrap="square" lIns="0" tIns="0" rIns="0" bIns="0" rtlCol="0" anchor="t"/>
-          <a:lstStyle/>
-          <a:p>
-            <a:pPr indent="0" marL="0">
-              <a:buNone/>
-            </a:pPr>
-            <a:r>
-              <a:rPr lang="en-US" sz="1400" dirty="0">
-                <a:solidFill>
-                  <a:schemeClr val="tx1"/>
-                </a:solidFill>
-              </a:rPr>
-              <a:t>Families still to register are clear at a glance.</a:t>
-            </a:r>
-            <a:endParaRPr lang="en-US" sz="1400" dirty="0"/>
-          </a:p>
-        </p:txBody>
-      </p:sp>
-      <p:sp>
-        <p:nvSpPr>
-          <p:cNvPr id="13" name="Online first, paper last circle"/>
+            <a:pPr marL="0" indent="0" algn="l">
+              <a:buNone/>
+            </a:pPr>
+            <a:r>
+              <a:rPr lang="en-US" sz="1000" i="1" dirty="0">
+                <a:solidFill>
+                  <a:schemeClr val="accent5"/>
+                </a:solidFill>
+              </a:rPr>
+              <a:t>Census page on the demo site, with sample data</a:t>
+            </a:r>
+            <a:endParaRPr lang="en-US" sz="1000" dirty="0"/>
+          </a:p>
+        </p:txBody>
+      </p:sp>
+      <p:sp>
+        <p:nvSpPr>
+          <p:cNvPr id="5" name="Only their own GKK circle"/>
           <p:cNvSpPr/>
           <p:nvPr/>
         </p:nvSpPr>
         <p:spPr>
           <a:xfrm>
-            <a:off x="548640" y="3803904"/>
+            <a:off x="548640" y="1572768"/>
             <a:ext cx="512064" cy="512064"/>
           </a:xfrm>
           <a:prstGeom prst="ellipse">
@@ -8669,7 +7777,7 @@
       </p:sp>
       <p:pic>
         <p:nvPicPr>
-          <p:cNvPr id="14" name="Online first, paper last icon" descr="preencoded.png">    </p:cNvPr>
+          <p:cNvPr id="6" name="Only their own GKK icon" descr="preencoded.png"/>
           <p:cNvPicPr>
             <a:picLocks noChangeAspect="1"/>
           </p:cNvPicPr>
@@ -8683,7 +7791,7 @@
         </p:blipFill>
         <p:spPr>
           <a:xfrm>
-            <a:off x="676656" y="3931920"/>
+            <a:off x="676656" y="1700784"/>
             <a:ext cx="256032" cy="256032"/>
           </a:xfrm>
           <a:prstGeom prst="rect">
@@ -8693,13 +7801,13 @@
       </p:pic>
       <p:sp>
         <p:nvSpPr>
-          <p:cNvPr id="15" name="Text 9"/>
+          <p:cNvPr id="7" name="Text 3"/>
           <p:cNvSpPr txBox="1"/>
           <p:nvPr/>
         </p:nvSpPr>
         <p:spPr>
           <a:xfrm>
-            <a:off x="1234440" y="3776472"/>
+            <a:off x="1234440" y="1545336"/>
             <a:ext cx="4002222" cy="347472"/>
           </a:xfrm>
           <a:prstGeom prst="rect">
@@ -8712,7 +7820,7 @@
           <a:bodyPr wrap="square" lIns="0" tIns="0" rIns="0" bIns="0" rtlCol="0" anchor="t"/>
           <a:lstStyle/>
           <a:p>
-            <a:pPr indent="0" marL="0">
+            <a:pPr marL="0" indent="0">
               <a:buNone/>
             </a:pPr>
             <a:r>
@@ -8721,7 +7829,7 @@
                   <a:schemeClr val="tx2"/>
                 </a:solidFill>
               </a:rPr>
-              <a:t>Online first, paper last</a:t>
+              <a:t>Only their own GKK</a:t>
             </a:r>
             <a:endParaRPr lang="en-US" sz="1700" dirty="0"/>
           </a:p>
@@ -8729,13 +7837,13 @@
       </p:sp>
       <p:sp>
         <p:nvSpPr>
-          <p:cNvPr id="16" name="Text 10"/>
+          <p:cNvPr id="8" name="Text 4"/>
           <p:cNvSpPr txBox="1"/>
           <p:nvPr/>
         </p:nvSpPr>
         <p:spPr>
           <a:xfrm>
-            <a:off x="1234440" y="4142232"/>
+            <a:off x="1234440" y="1911096"/>
             <a:ext cx="4002222" cy="640080"/>
           </a:xfrm>
           <a:prstGeom prst="rect">
@@ -8748,7 +7856,7 @@
           <a:bodyPr wrap="square" lIns="0" tIns="0" rIns="0" bIns="0" rtlCol="0" anchor="t"/>
           <a:lstStyle/>
           <a:p>
-            <a:pPr indent="0" marL="0">
+            <a:pPr marL="0" indent="0">
               <a:buNone/>
             </a:pPr>
             <a:r>
@@ -8757,7 +7865,7 @@
                   <a:schemeClr val="tx1"/>
                 </a:solidFill>
               </a:rPr>
-              <a:t>They help families update by phone, and print forms only when needed.</a:t>
+              <a:t>They see their own families and members, and no one else’s.</a:t>
             </a:r>
             <a:endParaRPr lang="en-US" sz="1400" dirty="0"/>
           </a:p>
@@ -8765,13 +7873,13 @@
       </p:sp>
       <p:sp>
         <p:nvSpPr>
-          <p:cNvPr id="17" name="Their GKK on the website circle"/>
+          <p:cNvPr id="9" name="Last year’s list, ticked off circle"/>
           <p:cNvSpPr/>
           <p:nvPr/>
         </p:nvSpPr>
         <p:spPr>
           <a:xfrm>
-            <a:off x="548640" y="4919472"/>
+            <a:off x="548640" y="2688336"/>
             <a:ext cx="512064" cy="512064"/>
           </a:xfrm>
           <a:prstGeom prst="ellipse">
@@ -8785,7 +7893,7 @@
       </p:sp>
       <p:pic>
         <p:nvPicPr>
-          <p:cNvPr id="18" name="Their GKK on the website icon" descr="preencoded.png">    </p:cNvPr>
+          <p:cNvPr id="10" name="Last year’s list, ticked off icon" descr="preencoded.png"/>
           <p:cNvPicPr>
             <a:picLocks noChangeAspect="1"/>
           </p:cNvPicPr>
@@ -8799,6 +7907,238 @@
         </p:blipFill>
         <p:spPr>
           <a:xfrm>
+            <a:off x="676656" y="2816352"/>
+            <a:ext cx="256032" cy="256032"/>
+          </a:xfrm>
+          <a:prstGeom prst="rect">
+            <a:avLst/>
+          </a:prstGeom>
+        </p:spPr>
+      </p:pic>
+      <p:sp>
+        <p:nvSpPr>
+          <p:cNvPr id="11" name="Text 6"/>
+          <p:cNvSpPr txBox="1"/>
+          <p:nvPr/>
+        </p:nvSpPr>
+        <p:spPr>
+          <a:xfrm>
+            <a:off x="1234440" y="2660904"/>
+            <a:ext cx="4002222" cy="347472"/>
+          </a:xfrm>
+          <a:prstGeom prst="rect">
+            <a:avLst/>
+          </a:prstGeom>
+          <a:noFill/>
+          <a:ln/>
+        </p:spPr>
+        <p:txBody>
+          <a:bodyPr wrap="square" lIns="0" tIns="0" rIns="0" bIns="0" rtlCol="0" anchor="t"/>
+          <a:lstStyle/>
+          <a:p>
+            <a:pPr marL="0" indent="0">
+              <a:buNone/>
+            </a:pPr>
+            <a:r>
+              <a:rPr lang="en-US" sz="1700" b="1" dirty="0">
+                <a:solidFill>
+                  <a:schemeClr val="tx2"/>
+                </a:solidFill>
+              </a:rPr>
+              <a:t>Last year’s list, ticked off</a:t>
+            </a:r>
+            <a:endParaRPr lang="en-US" sz="1700" dirty="0"/>
+          </a:p>
+        </p:txBody>
+      </p:sp>
+      <p:sp>
+        <p:nvSpPr>
+          <p:cNvPr id="12" name="Text 7"/>
+          <p:cNvSpPr txBox="1"/>
+          <p:nvPr/>
+        </p:nvSpPr>
+        <p:spPr>
+          <a:xfrm>
+            <a:off x="1234440" y="3026664"/>
+            <a:ext cx="4002222" cy="640080"/>
+          </a:xfrm>
+          <a:prstGeom prst="rect">
+            <a:avLst/>
+          </a:prstGeom>
+          <a:noFill/>
+          <a:ln/>
+        </p:spPr>
+        <p:txBody>
+          <a:bodyPr wrap="square" lIns="0" tIns="0" rIns="0" bIns="0" rtlCol="0" anchor="t"/>
+          <a:lstStyle/>
+          <a:p>
+            <a:pPr marL="0" indent="0">
+              <a:buNone/>
+            </a:pPr>
+            <a:r>
+              <a:rPr lang="en-US" sz="1400" dirty="0">
+                <a:solidFill>
+                  <a:schemeClr val="tx1"/>
+                </a:solidFill>
+              </a:rPr>
+              <a:t>Families still to register are clear at a glance.</a:t>
+            </a:r>
+            <a:endParaRPr lang="en-US" sz="1400" dirty="0"/>
+          </a:p>
+        </p:txBody>
+      </p:sp>
+      <p:sp>
+        <p:nvSpPr>
+          <p:cNvPr id="13" name="Online first, paper last circle"/>
+          <p:cNvSpPr/>
+          <p:nvPr/>
+        </p:nvSpPr>
+        <p:spPr>
+          <a:xfrm>
+            <a:off x="548640" y="3803904"/>
+            <a:ext cx="512064" cy="512064"/>
+          </a:xfrm>
+          <a:prstGeom prst="ellipse">
+            <a:avLst/>
+          </a:prstGeom>
+          <a:solidFill>
+            <a:schemeClr val="accent1"/>
+          </a:solidFill>
+          <a:ln/>
+        </p:spPr>
+      </p:sp>
+      <p:pic>
+        <p:nvPicPr>
+          <p:cNvPr id="14" name="Online first, paper last icon" descr="preencoded.png"/>
+          <p:cNvPicPr>
+            <a:picLocks noChangeAspect="1"/>
+          </p:cNvPicPr>
+          <p:nvPr/>
+        </p:nvPicPr>
+        <p:blipFill>
+          <a:blip r:embed="rId6"/>
+          <a:stretch>
+            <a:fillRect/>
+          </a:stretch>
+        </p:blipFill>
+        <p:spPr>
+          <a:xfrm>
+            <a:off x="676656" y="3931920"/>
+            <a:ext cx="256032" cy="256032"/>
+          </a:xfrm>
+          <a:prstGeom prst="rect">
+            <a:avLst/>
+          </a:prstGeom>
+        </p:spPr>
+      </p:pic>
+      <p:sp>
+        <p:nvSpPr>
+          <p:cNvPr id="15" name="Text 9"/>
+          <p:cNvSpPr txBox="1"/>
+          <p:nvPr/>
+        </p:nvSpPr>
+        <p:spPr>
+          <a:xfrm>
+            <a:off x="1234440" y="3776472"/>
+            <a:ext cx="4002222" cy="347472"/>
+          </a:xfrm>
+          <a:prstGeom prst="rect">
+            <a:avLst/>
+          </a:prstGeom>
+          <a:noFill/>
+          <a:ln/>
+        </p:spPr>
+        <p:txBody>
+          <a:bodyPr wrap="square" lIns="0" tIns="0" rIns="0" bIns="0" rtlCol="0" anchor="t"/>
+          <a:lstStyle/>
+          <a:p>
+            <a:pPr marL="0" indent="0">
+              <a:buNone/>
+            </a:pPr>
+            <a:r>
+              <a:rPr lang="en-US" sz="1700" b="1" dirty="0">
+                <a:solidFill>
+                  <a:schemeClr val="tx2"/>
+                </a:solidFill>
+              </a:rPr>
+              <a:t>Online first, paper last</a:t>
+            </a:r>
+            <a:endParaRPr lang="en-US" sz="1700" dirty="0"/>
+          </a:p>
+        </p:txBody>
+      </p:sp>
+      <p:sp>
+        <p:nvSpPr>
+          <p:cNvPr id="16" name="Text 10"/>
+          <p:cNvSpPr txBox="1"/>
+          <p:nvPr/>
+        </p:nvSpPr>
+        <p:spPr>
+          <a:xfrm>
+            <a:off x="1234440" y="4142232"/>
+            <a:ext cx="4002222" cy="640080"/>
+          </a:xfrm>
+          <a:prstGeom prst="rect">
+            <a:avLst/>
+          </a:prstGeom>
+          <a:noFill/>
+          <a:ln/>
+        </p:spPr>
+        <p:txBody>
+          <a:bodyPr wrap="square" lIns="0" tIns="0" rIns="0" bIns="0" rtlCol="0" anchor="t"/>
+          <a:lstStyle/>
+          <a:p>
+            <a:pPr marL="0" indent="0">
+              <a:buNone/>
+            </a:pPr>
+            <a:r>
+              <a:rPr lang="en-US" sz="1400" dirty="0">
+                <a:solidFill>
+                  <a:schemeClr val="tx1"/>
+                </a:solidFill>
+              </a:rPr>
+              <a:t>They help families update by phone, and print forms only when needed.</a:t>
+            </a:r>
+            <a:endParaRPr lang="en-US" sz="1400" dirty="0"/>
+          </a:p>
+        </p:txBody>
+      </p:sp>
+      <p:sp>
+        <p:nvSpPr>
+          <p:cNvPr id="17" name="Their GKK on the website circle"/>
+          <p:cNvSpPr/>
+          <p:nvPr/>
+        </p:nvSpPr>
+        <p:spPr>
+          <a:xfrm>
+            <a:off x="548640" y="4919472"/>
+            <a:ext cx="512064" cy="512064"/>
+          </a:xfrm>
+          <a:prstGeom prst="ellipse">
+            <a:avLst/>
+          </a:prstGeom>
+          <a:solidFill>
+            <a:schemeClr val="accent1"/>
+          </a:solidFill>
+          <a:ln/>
+        </p:spPr>
+      </p:sp>
+      <p:pic>
+        <p:nvPicPr>
+          <p:cNvPr id="18" name="Their GKK on the website icon" descr="preencoded.png"/>
+          <p:cNvPicPr>
+            <a:picLocks noChangeAspect="1"/>
+          </p:cNvPicPr>
+          <p:nvPr/>
+        </p:nvPicPr>
+        <p:blipFill>
+          <a:blip r:embed="rId7"/>
+          <a:stretch>
+            <a:fillRect/>
+          </a:stretch>
+        </p:blipFill>
+        <p:spPr>
+          <a:xfrm>
             <a:off x="676656" y="5047488"/>
             <a:ext cx="256032" cy="256032"/>
           </a:xfrm>
@@ -8828,7 +8168,7 @@
           <a:bodyPr wrap="square" lIns="0" tIns="0" rIns="0" bIns="0" rtlCol="0" anchor="t"/>
           <a:lstStyle/>
           <a:p>
-            <a:pPr indent="0" marL="0">
+            <a:pPr marL="0" indent="0">
               <a:buNone/>
             </a:pPr>
             <a:r>
@@ -8864,7 +8204,7 @@
           <a:bodyPr wrap="square" lIns="0" tIns="0" rIns="0" bIns="0" rtlCol="0" anchor="t"/>
           <a:lstStyle/>
           <a:p>
-            <a:pPr indent="0" marL="0">
+            <a:pPr marL="0" indent="0">
               <a:buNone/>
             </a:pPr>
             <a:r>
@@ -8899,7 +8239,7 @@
           </a:prstGeom>
           <a:extLst>
             <a:ext uri="{C572A759-6A51-4108-AA02-DFA0A04FC94B}">
-              <ma14:wrappingTextBoxFlag xmlns:ma14="http://schemas.microsoft.com/office/mac/drawingml/2011/main" val="0"/>
+              <ma14:wrappingTextBoxFlag xmlns:ma14="http://schemas.microsoft.com/office/mac/drawingml/2011/main" xmlns="" val="0"/>
             </a:ext>
           </a:extLst>
         </p:spPr>
@@ -8917,7 +8257,7 @@
           <a:p>
             <a:pPr algn="r"/>
             <a:fld id="{F7021451-1387-4CA6-816F-3879F97B5CBC}" type="slidenum">
-              <a:rPr b="0" lang="en-US"/>
+              <a:rPr lang="en-US" b="0"/>
               <a:t>6</a:t>
             </a:fld>
             <a:endParaRPr lang="en-US"/>
@@ -8952,9 +8292,11 @@
       <p:sp>
         <p:nvSpPr>
           <p:cNvPr id="2" name="Text 1"/>
-          <p:cNvSpPr/>
+          <p:cNvSpPr>
+            <a:spLocks noGrp="1"/>
+          </p:cNvSpPr>
           <p:nvPr>
-            <p:ph idx="101" type="title" hasCustomPrompt="1"/>
+            <p:ph type="title" idx="101" hasCustomPrompt="1"/>
           </p:nvPr>
         </p:nvSpPr>
         <p:spPr>
@@ -8972,7 +8314,7 @@
           <a:bodyPr wrap="square" lIns="0" tIns="0" rIns="0" bIns="0" rtlCol="0" anchor="ctr"/>
           <a:lstStyle/>
           <a:p>
-            <a:pPr algn="l" indent="0" marL="0">
+            <a:pPr marL="0" indent="0" algn="l">
               <a:buNone/>
             </a:pPr>
             <a:r>
@@ -9011,7 +8353,7 @@
           <a:bodyPr wrap="square" lIns="0" tIns="0" rIns="0" bIns="0" rtlCol="0" anchor="t"/>
           <a:lstStyle/>
           <a:p>
-            <a:pPr indent="0" marL="0">
+            <a:pPr marL="0" indent="0">
               <a:buNone/>
             </a:pPr>
             <a:r>
@@ -9071,7 +8413,7 @@
           <a:bodyPr wrap="square" lIns="0" tIns="0" rIns="0" bIns="0" rtlCol="0" anchor="ctr"/>
           <a:lstStyle/>
           <a:p>
-            <a:pPr algn="ctr" indent="0" marL="0">
+            <a:pPr marL="0" indent="0" algn="ctr">
               <a:buNone/>
             </a:pPr>
             <a:r>
@@ -9110,7 +8452,7 @@
           <a:bodyPr wrap="square" lIns="0" tIns="0" rIns="0" bIns="0" rtlCol="0" anchor="ctr"/>
           <a:lstStyle/>
           <a:p>
-            <a:pPr indent="0" marL="0">
+            <a:pPr marL="0" indent="0">
               <a:buNone/>
             </a:pPr>
             <a:r>
@@ -9170,7 +8512,7 @@
           <a:bodyPr wrap="square" lIns="0" tIns="0" rIns="0" bIns="0" rtlCol="0" anchor="ctr"/>
           <a:lstStyle/>
           <a:p>
-            <a:pPr algn="ctr" indent="0" marL="0">
+            <a:pPr marL="0" indent="0" algn="ctr">
               <a:buNone/>
             </a:pPr>
             <a:r>
@@ -9209,7 +8551,7 @@
           <a:bodyPr wrap="square" lIns="0" tIns="0" rIns="0" bIns="0" rtlCol="0" anchor="ctr"/>
           <a:lstStyle/>
           <a:p>
-            <a:pPr indent="0" marL="0">
+            <a:pPr marL="0" indent="0">
               <a:buNone/>
             </a:pPr>
             <a:r>
@@ -9269,7 +8611,7 @@
           <a:bodyPr wrap="square" lIns="0" tIns="0" rIns="0" bIns="0" rtlCol="0" anchor="ctr"/>
           <a:lstStyle/>
           <a:p>
-            <a:pPr algn="ctr" indent="0" marL="0">
+            <a:pPr marL="0" indent="0" algn="ctr">
               <a:buNone/>
             </a:pPr>
             <a:r>
@@ -9308,7 +8650,7 @@
           <a:bodyPr wrap="square" lIns="0" tIns="0" rIns="0" bIns="0" rtlCol="0" anchor="ctr"/>
           <a:lstStyle/>
           <a:p>
-            <a:pPr indent="0" marL="0">
+            <a:pPr marL="0" indent="0">
               <a:buNone/>
             </a:pPr>
             <a:r>
@@ -9368,7 +8710,7 @@
           <a:bodyPr wrap="square" lIns="0" tIns="0" rIns="0" bIns="0" rtlCol="0" anchor="ctr"/>
           <a:lstStyle/>
           <a:p>
-            <a:pPr algn="ctr" indent="0" marL="0">
+            <a:pPr marL="0" indent="0" algn="ctr">
               <a:buNone/>
             </a:pPr>
             <a:r>
@@ -9407,7 +8749,7 @@
           <a:bodyPr wrap="square" lIns="0" tIns="0" rIns="0" bIns="0" rtlCol="0" anchor="ctr"/>
           <a:lstStyle/>
           <a:p>
-            <a:pPr indent="0" marL="0">
+            <a:pPr marL="0" indent="0">
               <a:buNone/>
             </a:pPr>
             <a:r>
@@ -9424,14 +8766,14 @@
       </p:sp>
       <p:pic>
         <p:nvPicPr>
-          <p:cNvPr id="16" name="Dashboard charts" descr="C:\Users\Dave\AppData\Local\Temp\claude\E--DEVELOPER--WEB--PARISH-MEMBERS-REGISTRY\9cfa56b2-76b0-4da3-8bb7-a6a7d55b9d8c\scratchpad\img\browser-adm-dashboard2.png">    </p:cNvPr>
+          <p:cNvPr id="16" name="Dashboard charts" descr="C:\Users\Dave\AppData\Local\Temp\claude\E--DEVELOPER--WEB--PARISH-MEMBERS-REGISTRY\9cfa56b2-76b0-4da3-8bb7-a6a7d55b9d8c\scratchpad\img\browser-adm-dashboard2.png"/>
           <p:cNvPicPr>
             <a:picLocks noChangeAspect="1"/>
           </p:cNvPicPr>
           <p:nvPr/>
         </p:nvPicPr>
         <p:blipFill>
-          <a:blip r:embed="rId1"/>
+          <a:blip r:embed="rId3"/>
           <a:stretch>
             <a:fillRect/>
           </a:stretch>
@@ -9467,7 +8809,7 @@
           <a:bodyPr wrap="square" lIns="0" tIns="0" rIns="0" bIns="0" rtlCol="0" anchor="t"/>
           <a:lstStyle/>
           <a:p>
-            <a:pPr algn="l" indent="0" marL="0">
+            <a:pPr marL="0" indent="0" algn="l">
               <a:buNone/>
             </a:pPr>
             <a:r>
@@ -9502,7 +8844,7 @@
           </a:prstGeom>
           <a:extLst>
             <a:ext uri="{C572A759-6A51-4108-AA02-DFA0A04FC94B}">
-              <ma14:wrappingTextBoxFlag xmlns:ma14="http://schemas.microsoft.com/office/mac/drawingml/2011/main" val="0"/>
+              <ma14:wrappingTextBoxFlag xmlns:ma14="http://schemas.microsoft.com/office/mac/drawingml/2011/main" xmlns="" val="0"/>
             </a:ext>
           </a:extLst>
         </p:spPr>
@@ -9520,7 +8862,7 @@
           <a:p>
             <a:pPr algn="r"/>
             <a:fld id="{F7021451-1387-4CA6-816F-3879F97B5CBC}" type="slidenum">
-              <a:rPr b="0" lang="en-US"/>
+              <a:rPr lang="en-US" b="0"/>
               <a:t>7</a:t>
             </a:fld>
             <a:endParaRPr lang="en-US"/>
@@ -9555,9 +8897,11 @@
       <p:sp>
         <p:nvSpPr>
           <p:cNvPr id="2" name="Text 1"/>
-          <p:cNvSpPr/>
+          <p:cNvSpPr>
+            <a:spLocks noGrp="1"/>
+          </p:cNvSpPr>
           <p:nvPr>
-            <p:ph idx="101" type="title" hasCustomPrompt="1"/>
+            <p:ph type="title" idx="101" hasCustomPrompt="1"/>
           </p:nvPr>
         </p:nvSpPr>
         <p:spPr>
@@ -9575,7 +8919,7 @@
           <a:bodyPr wrap="square" lIns="0" tIns="0" rIns="0" bIns="0" rtlCol="0" anchor="ctr"/>
           <a:lstStyle/>
           <a:p>
-            <a:pPr algn="l" indent="0" marL="0">
+            <a:pPr marL="0" indent="0" algn="l">
               <a:buNone/>
             </a:pPr>
             <a:r>
@@ -9638,7 +8982,7 @@
           <a:bodyPr wrap="square" lIns="0" tIns="0" rIns="0" bIns="0" rtlCol="0" anchor="ctr"/>
           <a:lstStyle/>
           <a:p>
-            <a:pPr algn="ctr" indent="0" marL="0">
+            <a:pPr marL="0" indent="0" algn="ctr">
               <a:buNone/>
             </a:pPr>
             <a:r>
@@ -9677,7 +9021,7 @@
           <a:bodyPr wrap="square" lIns="0" tIns="0" rIns="0" bIns="0" rtlCol="0" anchor="t"/>
           <a:lstStyle/>
           <a:p>
-            <a:pPr indent="0" marL="0">
+            <a:pPr marL="0" indent="0">
               <a:buNone/>
             </a:pPr>
             <a:r>
@@ -9716,7 +9060,7 @@
           <a:bodyPr wrap="square" lIns="0" tIns="0" rIns="0" bIns="0" rtlCol="0" anchor="t"/>
           <a:lstStyle/>
           <a:p>
-            <a:pPr indent="0" marL="0">
+            <a:pPr marL="0" indent="0">
               <a:buNone/>
             </a:pPr>
             <a:r>
@@ -9733,331 +9077,7 @@
       </p:sp>
       <p:pic>
         <p:nvPicPr>
-          <p:cNvPr id="7" name="Step arrow 1" descr="preencoded.png">    </p:cNvPr>
-          <p:cNvPicPr>
-            <a:picLocks noChangeAspect="1"/>
-          </p:cNvPicPr>
-          <p:nvPr/>
-        </p:nvPicPr>
-        <p:blipFill>
-          <a:blip r:embed="rId1"/>
-          <a:stretch>
-            <a:fillRect/>
-          </a:stretch>
-        </p:blipFill>
-        <p:spPr>
-          <a:xfrm>
-            <a:off x="3099816" y="1856232"/>
-            <a:ext cx="320040" cy="274320"/>
-          </a:xfrm>
-          <a:prstGeom prst="rect">
-            <a:avLst/>
-          </a:prstGeom>
-        </p:spPr>
-      </p:pic>
-      <p:sp>
-        <p:nvSpPr>
-          <p:cNvPr id="8" name="Step 2"/>
-          <p:cNvSpPr/>
-          <p:nvPr/>
-        </p:nvSpPr>
-        <p:spPr>
-          <a:xfrm>
-            <a:off x="3383280" y="1463040"/>
-            <a:ext cx="2587752" cy="2743200"/>
-          </a:xfrm>
-          <a:prstGeom prst="roundRect">
-            <a:avLst>
-              <a:gd name="adj" fmla="val 4240"/>
-            </a:avLst>
-          </a:prstGeom>
-          <a:solidFill>
-            <a:schemeClr val="bg2"/>
-          </a:solidFill>
-          <a:ln/>
-        </p:spPr>
-      </p:sp>
-      <p:sp>
-        <p:nvSpPr>
-          <p:cNvPr id="9" name="Text 6"/>
-          <p:cNvSpPr/>
-          <p:nvPr/>
-        </p:nvSpPr>
-        <p:spPr>
-          <a:xfrm>
-            <a:off x="3657600" y="1691640"/>
-            <a:ext cx="603504" cy="603504"/>
-          </a:xfrm>
-          <a:prstGeom prst="ellipse">
-            <a:avLst/>
-          </a:prstGeom>
-          <a:solidFill>
-            <a:schemeClr val="accent2"/>
-          </a:solidFill>
-          <a:ln/>
-        </p:spPr>
-        <p:txBody>
-          <a:bodyPr wrap="square" lIns="0" tIns="0" rIns="0" bIns="0" rtlCol="0" anchor="ctr"/>
-          <a:lstStyle/>
-          <a:p>
-            <a:pPr algn="ctr" indent="0" marL="0">
-              <a:buNone/>
-            </a:pPr>
-            <a:r>
-              <a:rPr lang="en-US" sz="1800" b="1" dirty="0">
-                <a:solidFill>
-                  <a:schemeClr val="tx2"/>
-                </a:solidFill>
-                <a:latin typeface="+mj-lt" pitchFamily="34" charset="0"/>
-                <a:ea typeface="+mj-lt" pitchFamily="34" charset="-122"/>
-                <a:cs typeface="+mj-lt" pitchFamily="34" charset="-120"/>
-              </a:rPr>
-              <a:t>2</a:t>
-            </a:r>
-            <a:endParaRPr lang="en-US" sz="1800" dirty="0"/>
-          </a:p>
-        </p:txBody>
-      </p:sp>
-      <p:sp>
-        <p:nvSpPr>
-          <p:cNvPr id="10" name="Text 7"/>
-          <p:cNvSpPr txBox="1"/>
-          <p:nvPr/>
-        </p:nvSpPr>
-        <p:spPr>
-          <a:xfrm>
-            <a:off x="3657600" y="2468880"/>
-            <a:ext cx="2130552" cy="685800"/>
-          </a:xfrm>
-          <a:prstGeom prst="rect">
-            <a:avLst/>
-          </a:prstGeom>
-          <a:noFill/>
-          <a:ln/>
-        </p:spPr>
-        <p:txBody>
-          <a:bodyPr wrap="square" lIns="0" tIns="0" rIns="0" bIns="0" rtlCol="0" anchor="t"/>
-          <a:lstStyle/>
-          <a:p>
-            <a:pPr indent="0" marL="0">
-              <a:buNone/>
-            </a:pPr>
-            <a:r>
-              <a:rPr lang="en-US" sz="1700" b="1" dirty="0">
-                <a:solidFill>
-                  <a:schemeClr val="tx2"/>
-                </a:solidFill>
-                <a:latin typeface="+mj-lt" pitchFamily="34" charset="0"/>
-                <a:ea typeface="+mj-lt" pitchFamily="34" charset="-122"/>
-                <a:cs typeface="+mj-lt" pitchFamily="34" charset="-120"/>
-              </a:rPr>
-              <a:t>Families update online</a:t>
-            </a:r>
-            <a:endParaRPr lang="en-US" sz="1700" dirty="0"/>
-          </a:p>
-        </p:txBody>
-      </p:sp>
-      <p:sp>
-        <p:nvSpPr>
-          <p:cNvPr id="11" name="Text 8"/>
-          <p:cNvSpPr txBox="1"/>
-          <p:nvPr/>
-        </p:nvSpPr>
-        <p:spPr>
-          <a:xfrm>
-            <a:off x="3657600" y="3200400"/>
-            <a:ext cx="2084832" cy="914400"/>
-          </a:xfrm>
-          <a:prstGeom prst="rect">
-            <a:avLst/>
-          </a:prstGeom>
-          <a:noFill/>
-          <a:ln/>
-        </p:spPr>
-        <p:txBody>
-          <a:bodyPr wrap="square" lIns="0" tIns="0" rIns="0" bIns="0" rtlCol="0" anchor="t"/>
-          <a:lstStyle/>
-          <a:p>
-            <a:pPr indent="0" marL="0">
-              <a:buNone/>
-            </a:pPr>
-            <a:r>
-              <a:rPr lang="en-US" sz="1400" dirty="0">
-                <a:solidFill>
-                  <a:schemeClr val="tx1"/>
-                </a:solidFill>
-              </a:rPr>
-              <a:t>With the reference number and code on their form. GKK leaders help.</a:t>
-            </a:r>
-            <a:endParaRPr lang="en-US" sz="1400" dirty="0"/>
-          </a:p>
-        </p:txBody>
-      </p:sp>
-      <p:pic>
-        <p:nvPicPr>
-          <p:cNvPr id="12" name="Step arrow 2" descr="preencoded.png">    </p:cNvPr>
-          <p:cNvPicPr>
-            <a:picLocks noChangeAspect="1"/>
-          </p:cNvPicPr>
-          <p:nvPr/>
-        </p:nvPicPr>
-        <p:blipFill>
-          <a:blip r:embed="rId2"/>
-          <a:stretch>
-            <a:fillRect/>
-          </a:stretch>
-        </p:blipFill>
-        <p:spPr>
-          <a:xfrm>
-            <a:off x="5934456" y="1856232"/>
-            <a:ext cx="320040" cy="274320"/>
-          </a:xfrm>
-          <a:prstGeom prst="rect">
-            <a:avLst/>
-          </a:prstGeom>
-        </p:spPr>
-      </p:pic>
-      <p:sp>
-        <p:nvSpPr>
-          <p:cNvPr id="13" name="Step 3"/>
-          <p:cNvSpPr/>
-          <p:nvPr/>
-        </p:nvSpPr>
-        <p:spPr>
-          <a:xfrm>
-            <a:off x="6217920" y="1463040"/>
-            <a:ext cx="2587752" cy="2743200"/>
-          </a:xfrm>
-          <a:prstGeom prst="roundRect">
-            <a:avLst>
-              <a:gd name="adj" fmla="val 4240"/>
-            </a:avLst>
-          </a:prstGeom>
-          <a:solidFill>
-            <a:schemeClr val="bg2"/>
-          </a:solidFill>
-          <a:ln/>
-        </p:spPr>
-      </p:sp>
-      <p:sp>
-        <p:nvSpPr>
-          <p:cNvPr id="14" name="Text 10"/>
-          <p:cNvSpPr/>
-          <p:nvPr/>
-        </p:nvSpPr>
-        <p:spPr>
-          <a:xfrm>
-            <a:off x="6492240" y="1691640"/>
-            <a:ext cx="603504" cy="603504"/>
-          </a:xfrm>
-          <a:prstGeom prst="ellipse">
-            <a:avLst/>
-          </a:prstGeom>
-          <a:solidFill>
-            <a:schemeClr val="accent2"/>
-          </a:solidFill>
-          <a:ln/>
-        </p:spPr>
-        <p:txBody>
-          <a:bodyPr wrap="square" lIns="0" tIns="0" rIns="0" bIns="0" rtlCol="0" anchor="ctr"/>
-          <a:lstStyle/>
-          <a:p>
-            <a:pPr algn="ctr" indent="0" marL="0">
-              <a:buNone/>
-            </a:pPr>
-            <a:r>
-              <a:rPr lang="en-US" sz="1800" b="1" dirty="0">
-                <a:solidFill>
-                  <a:schemeClr val="tx2"/>
-                </a:solidFill>
-                <a:latin typeface="+mj-lt" pitchFamily="34" charset="0"/>
-                <a:ea typeface="+mj-lt" pitchFamily="34" charset="-122"/>
-                <a:cs typeface="+mj-lt" pitchFamily="34" charset="-120"/>
-              </a:rPr>
-              <a:t>3</a:t>
-            </a:r>
-            <a:endParaRPr lang="en-US" sz="1800" dirty="0"/>
-          </a:p>
-        </p:txBody>
-      </p:sp>
-      <p:sp>
-        <p:nvSpPr>
-          <p:cNvPr id="15" name="Text 11"/>
-          <p:cNvSpPr txBox="1"/>
-          <p:nvPr/>
-        </p:nvSpPr>
-        <p:spPr>
-          <a:xfrm>
-            <a:off x="6492240" y="2468880"/>
-            <a:ext cx="2130552" cy="685800"/>
-          </a:xfrm>
-          <a:prstGeom prst="rect">
-            <a:avLst/>
-          </a:prstGeom>
-          <a:noFill/>
-          <a:ln/>
-        </p:spPr>
-        <p:txBody>
-          <a:bodyPr wrap="square" lIns="0" tIns="0" rIns="0" bIns="0" rtlCol="0" anchor="t"/>
-          <a:lstStyle/>
-          <a:p>
-            <a:pPr indent="0" marL="0">
-              <a:buNone/>
-            </a:pPr>
-            <a:r>
-              <a:rPr lang="en-US" sz="1700" b="1" dirty="0">
-                <a:solidFill>
-                  <a:schemeClr val="tx2"/>
-                </a:solidFill>
-                <a:latin typeface="+mj-lt" pitchFamily="34" charset="0"/>
-                <a:ea typeface="+mj-lt" pitchFamily="34" charset="-122"/>
-                <a:cs typeface="+mj-lt" pitchFamily="34" charset="-120"/>
-              </a:rPr>
-              <a:t>Paper as a last resort</a:t>
-            </a:r>
-            <a:endParaRPr lang="en-US" sz="1700" dirty="0"/>
-          </a:p>
-        </p:txBody>
-      </p:sp>
-      <p:sp>
-        <p:nvSpPr>
-          <p:cNvPr id="16" name="Text 12"/>
-          <p:cNvSpPr txBox="1"/>
-          <p:nvPr/>
-        </p:nvSpPr>
-        <p:spPr>
-          <a:xfrm>
-            <a:off x="6492240" y="3200400"/>
-            <a:ext cx="2084832" cy="914400"/>
-          </a:xfrm>
-          <a:prstGeom prst="rect">
-            <a:avLst/>
-          </a:prstGeom>
-          <a:noFill/>
-          <a:ln/>
-        </p:spPr>
-        <p:txBody>
-          <a:bodyPr wrap="square" lIns="0" tIns="0" rIns="0" bIns="0" rtlCol="0" anchor="t"/>
-          <a:lstStyle/>
-          <a:p>
-            <a:pPr indent="0" marL="0">
-              <a:buNone/>
-            </a:pPr>
-            <a:r>
-              <a:rPr lang="en-US" sz="1400" dirty="0">
-                <a:solidFill>
-                  <a:schemeClr val="tx1"/>
-                </a:solidFill>
-              </a:rPr>
-              <a:t>Pre-filled forms by GKK; staff type in the answers that come back.</a:t>
-            </a:r>
-            <a:endParaRPr lang="en-US" sz="1400" dirty="0"/>
-          </a:p>
-        </p:txBody>
-      </p:sp>
-      <p:pic>
-        <p:nvPicPr>
-          <p:cNvPr id="17" name="Step arrow 3" descr="preencoded.png">    </p:cNvPr>
+          <p:cNvPr id="7" name="Step arrow 1" descr="preencoded.png"/>
           <p:cNvPicPr>
             <a:picLocks noChangeAspect="1"/>
           </p:cNvPicPr>
@@ -10071,7 +9091,7 @@
         </p:blipFill>
         <p:spPr>
           <a:xfrm>
-            <a:off x="8769096" y="1856232"/>
+            <a:off x="3099816" y="1856232"/>
             <a:ext cx="320040" cy="274320"/>
           </a:xfrm>
           <a:prstGeom prst="rect">
@@ -10081,13 +9101,13 @@
       </p:pic>
       <p:sp>
         <p:nvSpPr>
-          <p:cNvPr id="18" name="Step 4"/>
+          <p:cNvPr id="8" name="Step 2"/>
           <p:cNvSpPr/>
           <p:nvPr/>
         </p:nvSpPr>
         <p:spPr>
           <a:xfrm>
-            <a:off x="9052560" y="1463040"/>
+            <a:off x="3383280" y="1463040"/>
             <a:ext cx="2587752" cy="2743200"/>
           </a:xfrm>
           <a:prstGeom prst="roundRect">
@@ -10103,13 +9123,13 @@
       </p:sp>
       <p:sp>
         <p:nvSpPr>
-          <p:cNvPr id="19" name="Text 14"/>
+          <p:cNvPr id="9" name="Text 6"/>
           <p:cNvSpPr/>
           <p:nvPr/>
         </p:nvSpPr>
         <p:spPr>
           <a:xfrm>
-            <a:off x="9326880" y="1691640"/>
+            <a:off x="3657600" y="1691640"/>
             <a:ext cx="603504" cy="603504"/>
           </a:xfrm>
           <a:prstGeom prst="ellipse">
@@ -10124,7 +9144,7 @@
           <a:bodyPr wrap="square" lIns="0" tIns="0" rIns="0" bIns="0" rtlCol="0" anchor="ctr"/>
           <a:lstStyle/>
           <a:p>
-            <a:pPr algn="ctr" indent="0" marL="0">
+            <a:pPr marL="0" indent="0" algn="ctr">
               <a:buNone/>
             </a:pPr>
             <a:r>
@@ -10136,7 +9156,7 @@
                 <a:ea typeface="+mj-lt" pitchFamily="34" charset="-122"/>
                 <a:cs typeface="+mj-lt" pitchFamily="34" charset="-120"/>
               </a:rPr>
-              <a:t>4</a:t>
+              <a:t>2</a:t>
             </a:r>
             <a:endParaRPr lang="en-US" sz="1800" dirty="0"/>
           </a:p>
@@ -10144,13 +9164,13 @@
       </p:sp>
       <p:sp>
         <p:nvSpPr>
-          <p:cNvPr id="20" name="Text 15"/>
+          <p:cNvPr id="10" name="Text 7"/>
           <p:cNvSpPr txBox="1"/>
           <p:nvPr/>
         </p:nvSpPr>
         <p:spPr>
           <a:xfrm>
-            <a:off x="9326880" y="2468880"/>
+            <a:off x="3657600" y="2468880"/>
             <a:ext cx="2130552" cy="685800"/>
           </a:xfrm>
           <a:prstGeom prst="rect">
@@ -10163,7 +9183,7 @@
           <a:bodyPr wrap="square" lIns="0" tIns="0" rIns="0" bIns="0" rtlCol="0" anchor="t"/>
           <a:lstStyle/>
           <a:p>
-            <a:pPr indent="0" marL="0">
+            <a:pPr marL="0" indent="0">
               <a:buNone/>
             </a:pPr>
             <a:r>
@@ -10175,6 +9195,330 @@
                 <a:ea typeface="+mj-lt" pitchFamily="34" charset="-122"/>
                 <a:cs typeface="+mj-lt" pitchFamily="34" charset="-120"/>
               </a:rPr>
+              <a:t>Families update online</a:t>
+            </a:r>
+            <a:endParaRPr lang="en-US" sz="1700" dirty="0"/>
+          </a:p>
+        </p:txBody>
+      </p:sp>
+      <p:sp>
+        <p:nvSpPr>
+          <p:cNvPr id="11" name="Text 8"/>
+          <p:cNvSpPr txBox="1"/>
+          <p:nvPr/>
+        </p:nvSpPr>
+        <p:spPr>
+          <a:xfrm>
+            <a:off x="3657600" y="3200400"/>
+            <a:ext cx="2084832" cy="914400"/>
+          </a:xfrm>
+          <a:prstGeom prst="rect">
+            <a:avLst/>
+          </a:prstGeom>
+          <a:noFill/>
+          <a:ln/>
+        </p:spPr>
+        <p:txBody>
+          <a:bodyPr wrap="square" lIns="0" tIns="0" rIns="0" bIns="0" rtlCol="0" anchor="t"/>
+          <a:lstStyle/>
+          <a:p>
+            <a:pPr marL="0" indent="0">
+              <a:buNone/>
+            </a:pPr>
+            <a:r>
+              <a:rPr lang="en-US" sz="1400" dirty="0">
+                <a:solidFill>
+                  <a:schemeClr val="tx1"/>
+                </a:solidFill>
+              </a:rPr>
+              <a:t>With the reference number and code on their form. GKK leaders help.</a:t>
+            </a:r>
+            <a:endParaRPr lang="en-US" sz="1400" dirty="0"/>
+          </a:p>
+        </p:txBody>
+      </p:sp>
+      <p:pic>
+        <p:nvPicPr>
+          <p:cNvPr id="12" name="Step arrow 2" descr="preencoded.png"/>
+          <p:cNvPicPr>
+            <a:picLocks noChangeAspect="1"/>
+          </p:cNvPicPr>
+          <p:nvPr/>
+        </p:nvPicPr>
+        <p:blipFill>
+          <a:blip r:embed="rId3"/>
+          <a:stretch>
+            <a:fillRect/>
+          </a:stretch>
+        </p:blipFill>
+        <p:spPr>
+          <a:xfrm>
+            <a:off x="5934456" y="1856232"/>
+            <a:ext cx="320040" cy="274320"/>
+          </a:xfrm>
+          <a:prstGeom prst="rect">
+            <a:avLst/>
+          </a:prstGeom>
+        </p:spPr>
+      </p:pic>
+      <p:sp>
+        <p:nvSpPr>
+          <p:cNvPr id="13" name="Step 3"/>
+          <p:cNvSpPr/>
+          <p:nvPr/>
+        </p:nvSpPr>
+        <p:spPr>
+          <a:xfrm>
+            <a:off x="6217920" y="1463040"/>
+            <a:ext cx="2587752" cy="2743200"/>
+          </a:xfrm>
+          <a:prstGeom prst="roundRect">
+            <a:avLst>
+              <a:gd name="adj" fmla="val 4240"/>
+            </a:avLst>
+          </a:prstGeom>
+          <a:solidFill>
+            <a:schemeClr val="bg2"/>
+          </a:solidFill>
+          <a:ln/>
+        </p:spPr>
+      </p:sp>
+      <p:sp>
+        <p:nvSpPr>
+          <p:cNvPr id="14" name="Text 10"/>
+          <p:cNvSpPr/>
+          <p:nvPr/>
+        </p:nvSpPr>
+        <p:spPr>
+          <a:xfrm>
+            <a:off x="6492240" y="1691640"/>
+            <a:ext cx="603504" cy="603504"/>
+          </a:xfrm>
+          <a:prstGeom prst="ellipse">
+            <a:avLst/>
+          </a:prstGeom>
+          <a:solidFill>
+            <a:schemeClr val="accent2"/>
+          </a:solidFill>
+          <a:ln/>
+        </p:spPr>
+        <p:txBody>
+          <a:bodyPr wrap="square" lIns="0" tIns="0" rIns="0" bIns="0" rtlCol="0" anchor="ctr"/>
+          <a:lstStyle/>
+          <a:p>
+            <a:pPr marL="0" indent="0" algn="ctr">
+              <a:buNone/>
+            </a:pPr>
+            <a:r>
+              <a:rPr lang="en-US" sz="1800" b="1" dirty="0">
+                <a:solidFill>
+                  <a:schemeClr val="tx2"/>
+                </a:solidFill>
+                <a:latin typeface="+mj-lt" pitchFamily="34" charset="0"/>
+                <a:ea typeface="+mj-lt" pitchFamily="34" charset="-122"/>
+                <a:cs typeface="+mj-lt" pitchFamily="34" charset="-120"/>
+              </a:rPr>
+              <a:t>3</a:t>
+            </a:r>
+            <a:endParaRPr lang="en-US" sz="1800" dirty="0"/>
+          </a:p>
+        </p:txBody>
+      </p:sp>
+      <p:sp>
+        <p:nvSpPr>
+          <p:cNvPr id="15" name="Text 11"/>
+          <p:cNvSpPr txBox="1"/>
+          <p:nvPr/>
+        </p:nvSpPr>
+        <p:spPr>
+          <a:xfrm>
+            <a:off x="6492240" y="2468880"/>
+            <a:ext cx="2130552" cy="685800"/>
+          </a:xfrm>
+          <a:prstGeom prst="rect">
+            <a:avLst/>
+          </a:prstGeom>
+          <a:noFill/>
+          <a:ln/>
+        </p:spPr>
+        <p:txBody>
+          <a:bodyPr wrap="square" lIns="0" tIns="0" rIns="0" bIns="0" rtlCol="0" anchor="t"/>
+          <a:lstStyle/>
+          <a:p>
+            <a:pPr marL="0" indent="0">
+              <a:buNone/>
+            </a:pPr>
+            <a:r>
+              <a:rPr lang="en-US" sz="1700" b="1" dirty="0">
+                <a:solidFill>
+                  <a:schemeClr val="tx2"/>
+                </a:solidFill>
+                <a:latin typeface="+mj-lt" pitchFamily="34" charset="0"/>
+                <a:ea typeface="+mj-lt" pitchFamily="34" charset="-122"/>
+                <a:cs typeface="+mj-lt" pitchFamily="34" charset="-120"/>
+              </a:rPr>
+              <a:t>Paper as a last resort</a:t>
+            </a:r>
+            <a:endParaRPr lang="en-US" sz="1700" dirty="0"/>
+          </a:p>
+        </p:txBody>
+      </p:sp>
+      <p:sp>
+        <p:nvSpPr>
+          <p:cNvPr id="16" name="Text 12"/>
+          <p:cNvSpPr txBox="1"/>
+          <p:nvPr/>
+        </p:nvSpPr>
+        <p:spPr>
+          <a:xfrm>
+            <a:off x="6492240" y="3200400"/>
+            <a:ext cx="2084832" cy="914400"/>
+          </a:xfrm>
+          <a:prstGeom prst="rect">
+            <a:avLst/>
+          </a:prstGeom>
+          <a:noFill/>
+          <a:ln/>
+        </p:spPr>
+        <p:txBody>
+          <a:bodyPr wrap="square" lIns="0" tIns="0" rIns="0" bIns="0" rtlCol="0" anchor="t"/>
+          <a:lstStyle/>
+          <a:p>
+            <a:pPr marL="0" indent="0">
+              <a:buNone/>
+            </a:pPr>
+            <a:r>
+              <a:rPr lang="en-US" sz="1400" dirty="0">
+                <a:solidFill>
+                  <a:schemeClr val="tx1"/>
+                </a:solidFill>
+              </a:rPr>
+              <a:t>Pre-filled forms by GKK; staff type in the answers that come back.</a:t>
+            </a:r>
+            <a:endParaRPr lang="en-US" sz="1400" dirty="0"/>
+          </a:p>
+        </p:txBody>
+      </p:sp>
+      <p:pic>
+        <p:nvPicPr>
+          <p:cNvPr id="17" name="Step arrow 3" descr="preencoded.png"/>
+          <p:cNvPicPr>
+            <a:picLocks noChangeAspect="1"/>
+          </p:cNvPicPr>
+          <p:nvPr/>
+        </p:nvPicPr>
+        <p:blipFill>
+          <a:blip r:embed="rId3"/>
+          <a:stretch>
+            <a:fillRect/>
+          </a:stretch>
+        </p:blipFill>
+        <p:spPr>
+          <a:xfrm>
+            <a:off x="8769096" y="1856232"/>
+            <a:ext cx="320040" cy="274320"/>
+          </a:xfrm>
+          <a:prstGeom prst="rect">
+            <a:avLst/>
+          </a:prstGeom>
+        </p:spPr>
+      </p:pic>
+      <p:sp>
+        <p:nvSpPr>
+          <p:cNvPr id="18" name="Step 4"/>
+          <p:cNvSpPr/>
+          <p:nvPr/>
+        </p:nvSpPr>
+        <p:spPr>
+          <a:xfrm>
+            <a:off x="9052560" y="1463040"/>
+            <a:ext cx="2587752" cy="2743200"/>
+          </a:xfrm>
+          <a:prstGeom prst="roundRect">
+            <a:avLst>
+              <a:gd name="adj" fmla="val 4240"/>
+            </a:avLst>
+          </a:prstGeom>
+          <a:solidFill>
+            <a:schemeClr val="bg2"/>
+          </a:solidFill>
+          <a:ln/>
+        </p:spPr>
+      </p:sp>
+      <p:sp>
+        <p:nvSpPr>
+          <p:cNvPr id="19" name="Text 14"/>
+          <p:cNvSpPr/>
+          <p:nvPr/>
+        </p:nvSpPr>
+        <p:spPr>
+          <a:xfrm>
+            <a:off x="9326880" y="1691640"/>
+            <a:ext cx="603504" cy="603504"/>
+          </a:xfrm>
+          <a:prstGeom prst="ellipse">
+            <a:avLst/>
+          </a:prstGeom>
+          <a:solidFill>
+            <a:schemeClr val="accent2"/>
+          </a:solidFill>
+          <a:ln/>
+        </p:spPr>
+        <p:txBody>
+          <a:bodyPr wrap="square" lIns="0" tIns="0" rIns="0" bIns="0" rtlCol="0" anchor="ctr"/>
+          <a:lstStyle/>
+          <a:p>
+            <a:pPr marL="0" indent="0" algn="ctr">
+              <a:buNone/>
+            </a:pPr>
+            <a:r>
+              <a:rPr lang="en-US" sz="1800" b="1" dirty="0">
+                <a:solidFill>
+                  <a:schemeClr val="tx2"/>
+                </a:solidFill>
+                <a:latin typeface="+mj-lt" pitchFamily="34" charset="0"/>
+                <a:ea typeface="+mj-lt" pitchFamily="34" charset="-122"/>
+                <a:cs typeface="+mj-lt" pitchFamily="34" charset="-120"/>
+              </a:rPr>
+              <a:t>4</a:t>
+            </a:r>
+            <a:endParaRPr lang="en-US" sz="1800" dirty="0"/>
+          </a:p>
+        </p:txBody>
+      </p:sp>
+      <p:sp>
+        <p:nvSpPr>
+          <p:cNvPr id="20" name="Text 15"/>
+          <p:cNvSpPr txBox="1"/>
+          <p:nvPr/>
+        </p:nvSpPr>
+        <p:spPr>
+          <a:xfrm>
+            <a:off x="9326880" y="2468880"/>
+            <a:ext cx="2130552" cy="685800"/>
+          </a:xfrm>
+          <a:prstGeom prst="rect">
+            <a:avLst/>
+          </a:prstGeom>
+          <a:noFill/>
+          <a:ln/>
+        </p:spPr>
+        <p:txBody>
+          <a:bodyPr wrap="square" lIns="0" tIns="0" rIns="0" bIns="0" rtlCol="0" anchor="t"/>
+          <a:lstStyle/>
+          <a:p>
+            <a:pPr marL="0" indent="0">
+              <a:buNone/>
+            </a:pPr>
+            <a:r>
+              <a:rPr lang="en-US" sz="1700" b="1" dirty="0">
+                <a:solidFill>
+                  <a:schemeClr val="tx2"/>
+                </a:solidFill>
+                <a:latin typeface="+mj-lt" pitchFamily="34" charset="0"/>
+                <a:ea typeface="+mj-lt" pitchFamily="34" charset="-122"/>
+                <a:cs typeface="+mj-lt" pitchFamily="34" charset="-120"/>
+              </a:rPr>
               <a:t>Approve and count</a:t>
             </a:r>
             <a:endParaRPr lang="en-US" sz="1700" dirty="0"/>
@@ -10202,7 +9546,7 @@
           <a:bodyPr wrap="square" lIns="0" tIns="0" rIns="0" bIns="0" rtlCol="0" anchor="t"/>
           <a:lstStyle/>
           <a:p>
-            <a:pPr indent="0" marL="0">
+            <a:pPr marL="0" indent="0">
               <a:buNone/>
             </a:pPr>
             <a:r>
@@ -10238,7 +9582,7 @@
           <a:bodyPr wrap="square" lIns="0" tIns="0" rIns="0" bIns="0" rtlCol="0" anchor="ctr"/>
           <a:lstStyle/>
           <a:p>
-            <a:pPr indent="0" marL="0">
+            <a:pPr marL="0" indent="0">
               <a:buNone/>
             </a:pPr>
             <a:r>
@@ -10278,7 +9622,7 @@
           <a:bodyPr wrap="square" lIns="0" tIns="0" rIns="0" bIns="0" rtlCol="0" anchor="ctr"/>
           <a:lstStyle/>
           <a:p>
-            <a:pPr algn="ctr" indent="0" marL="0">
+            <a:pPr marL="0" indent="0" algn="ctr">
               <a:buNone/>
             </a:pPr>
             <a:r>
@@ -10318,7 +9662,7 @@
           <a:bodyPr wrap="square" lIns="0" tIns="0" rIns="0" bIns="0" rtlCol="0" anchor="ctr"/>
           <a:lstStyle/>
           <a:p>
-            <a:pPr algn="ctr" indent="0" marL="0">
+            <a:pPr marL="0" indent="0" algn="ctr">
               <a:buNone/>
             </a:pPr>
             <a:r>
@@ -10358,7 +9702,7 @@
           <a:bodyPr wrap="square" lIns="0" tIns="0" rIns="0" bIns="0" rtlCol="0" anchor="ctr"/>
           <a:lstStyle/>
           <a:p>
-            <a:pPr algn="ctr" indent="0" marL="0">
+            <a:pPr marL="0" indent="0" algn="ctr">
               <a:buNone/>
             </a:pPr>
             <a:r>
@@ -10398,7 +9742,7 @@
           <a:bodyPr wrap="square" lIns="0" tIns="0" rIns="0" bIns="0" rtlCol="0" anchor="ctr"/>
           <a:lstStyle/>
           <a:p>
-            <a:pPr algn="ctr" indent="0" marL="0">
+            <a:pPr marL="0" indent="0" algn="ctr">
               <a:buNone/>
             </a:pPr>
             <a:r>
@@ -10438,7 +9782,7 @@
           <a:bodyPr wrap="square" lIns="0" tIns="0" rIns="0" bIns="0" rtlCol="0" anchor="ctr"/>
           <a:lstStyle/>
           <a:p>
-            <a:pPr algn="ctr" indent="0" marL="0">
+            <a:pPr marL="0" indent="0" algn="ctr">
               <a:buNone/>
             </a:pPr>
             <a:r>
@@ -10499,7 +9843,7 @@
       </p:sp>
       <p:pic>
         <p:nvPicPr>
-          <p:cNvPr id="30" name="Safeguards icon" descr="preencoded.png">    </p:cNvPr>
+          <p:cNvPr id="30" name="Safeguards icon" descr="preencoded.png"/>
           <p:cNvPicPr>
             <a:picLocks noChangeAspect="1"/>
           </p:cNvPicPr>
@@ -10542,7 +9886,7 @@
           <a:bodyPr wrap="square" lIns="0" tIns="0" rIns="0" bIns="0" rtlCol="0" anchor="ctr"/>
           <a:lstStyle/>
           <a:p>
-            <a:pPr indent="0" marL="0">
+            <a:pPr marL="0" indent="0">
               <a:buNone/>
             </a:pPr>
             <a:r>
@@ -10553,9 +9897,6 @@
               </a:rPr>
               <a:t>Safeguards: </a:t>
             </a:r>
-            <a:pPr indent="0" marL="0">
-              <a:buNone/>
-            </a:pPr>
             <a:r>
               <a:rPr lang="en-US" sz="1500" dirty="0">
                 <a:solidFill>
@@ -10570,7 +9911,7 @@
       </p:sp>
       <p:sp>
         <p:nvSpPr>
-          <p:cNvPr id="25" name="Slide Number Placeholder 0"/>
+          <p:cNvPr id="32" name="Slide Number Placeholder 0"/>
           <p:cNvSpPr>
             <a:spLocks noGrp="1"/>
           </p:cNvSpPr>
@@ -10588,7 +9929,7 @@
           </a:prstGeom>
           <a:extLst>
             <a:ext uri="{C572A759-6A51-4108-AA02-DFA0A04FC94B}">
-              <ma14:wrappingTextBoxFlag xmlns:ma14="http://schemas.microsoft.com/office/mac/drawingml/2011/main" val="0"/>
+              <ma14:wrappingTextBoxFlag xmlns:ma14="http://schemas.microsoft.com/office/mac/drawingml/2011/main" xmlns="" val="0"/>
             </a:ext>
           </a:extLst>
         </p:spPr>
@@ -10606,7 +9947,7 @@
           <a:p>
             <a:pPr algn="r"/>
             <a:fld id="{F7021451-1387-4CA6-816F-3879F97B5CBC}" type="slidenum">
-              <a:rPr b="0" lang="en-US"/>
+              <a:rPr lang="en-US" b="0"/>
               <a:t>8</a:t>
             </a:fld>
             <a:endParaRPr lang="en-US"/>
@@ -10641,9 +9982,11 @@
       <p:sp>
         <p:nvSpPr>
           <p:cNvPr id="2" name="Text 1"/>
-          <p:cNvSpPr/>
+          <p:cNvSpPr>
+            <a:spLocks noGrp="1"/>
+          </p:cNvSpPr>
           <p:nvPr>
-            <p:ph idx="101" type="title" hasCustomPrompt="1"/>
+            <p:ph type="title" idx="101" hasCustomPrompt="1"/>
           </p:nvPr>
         </p:nvSpPr>
         <p:spPr>
@@ -10661,7 +10004,7 @@
           <a:bodyPr wrap="square" lIns="0" tIns="0" rIns="0" bIns="0" rtlCol="0" anchor="ctr"/>
           <a:lstStyle/>
           <a:p>
-            <a:pPr algn="l" indent="0" marL="0">
+            <a:pPr marL="0" indent="0" algn="l">
               <a:buNone/>
             </a:pPr>
             <a:r>
@@ -10723,283 +10066,7 @@
       </p:sp>
       <p:pic>
         <p:nvPicPr>
-          <p:cNvPr id="5" name="Each staff member signs in icon" descr="preencoded.png">    </p:cNvPr>
-          <p:cNvPicPr>
-            <a:picLocks noChangeAspect="1"/>
-          </p:cNvPicPr>
-          <p:nvPr/>
-        </p:nvPicPr>
-        <p:blipFill>
-          <a:blip r:embed="rId1"/>
-          <a:stretch>
-            <a:fillRect/>
-          </a:stretch>
-        </p:blipFill>
-        <p:spPr>
-          <a:xfrm>
-            <a:off x="960120" y="1874520"/>
-            <a:ext cx="274320" cy="274320"/>
-          </a:xfrm>
-          <a:prstGeom prst="rect">
-            <a:avLst/>
-          </a:prstGeom>
-        </p:spPr>
-      </p:pic>
-      <p:sp>
-        <p:nvSpPr>
-          <p:cNvPr id="6" name="Text 3"/>
-          <p:cNvSpPr txBox="1"/>
-          <p:nvPr/>
-        </p:nvSpPr>
-        <p:spPr>
-          <a:xfrm>
-            <a:off x="822960" y="2395728"/>
-            <a:ext cx="2962656" cy="365760"/>
-          </a:xfrm>
-          <a:prstGeom prst="rect">
-            <a:avLst/>
-          </a:prstGeom>
-          <a:noFill/>
-          <a:ln/>
-        </p:spPr>
-        <p:txBody>
-          <a:bodyPr wrap="square" lIns="0" tIns="0" rIns="0" bIns="0" rtlCol="0" anchor="t"/>
-          <a:lstStyle/>
-          <a:p>
-            <a:pPr indent="0" marL="0">
-              <a:buNone/>
-            </a:pPr>
-            <a:r>
-              <a:rPr lang="en-US" sz="1700" b="1" dirty="0">
-                <a:solidFill>
-                  <a:schemeClr val="tx2"/>
-                </a:solidFill>
-              </a:rPr>
-              <a:t>Each staff member signs in</a:t>
-            </a:r>
-            <a:endParaRPr lang="en-US" sz="1700" dirty="0"/>
-          </a:p>
-        </p:txBody>
-      </p:sp>
-      <p:sp>
-        <p:nvSpPr>
-          <p:cNvPr id="7" name="Text 4"/>
-          <p:cNvSpPr txBox="1"/>
-          <p:nvPr/>
-        </p:nvSpPr>
-        <p:spPr>
-          <a:xfrm>
-            <a:off x="822960" y="2770632"/>
-            <a:ext cx="3008376" cy="731520"/>
-          </a:xfrm>
-          <a:prstGeom prst="rect">
-            <a:avLst/>
-          </a:prstGeom>
-          <a:noFill/>
-          <a:ln/>
-        </p:spPr>
-        <p:txBody>
-          <a:bodyPr wrap="square" lIns="0" tIns="0" rIns="0" bIns="0" rtlCol="0" anchor="t"/>
-          <a:lstStyle/>
-          <a:p>
-            <a:pPr indent="0" marL="0">
-              <a:buNone/>
-            </a:pPr>
-            <a:r>
-              <a:rPr lang="en-US" sz="1400" dirty="0">
-                <a:solidFill>
-                  <a:schemeClr val="tx1"/>
-                </a:solidFill>
-              </a:rPr>
-              <a:t>Their own login and access level: full, read only, GKK leader, clergy and more.</a:t>
-            </a:r>
-            <a:endParaRPr lang="en-US" sz="1400" dirty="0"/>
-          </a:p>
-        </p:txBody>
-      </p:sp>
-      <p:sp>
-        <p:nvSpPr>
-          <p:cNvPr id="8" name="GKK leaders see one GKK"/>
-          <p:cNvSpPr/>
-          <p:nvPr/>
-        </p:nvSpPr>
-        <p:spPr>
-          <a:xfrm>
-            <a:off x="4338828" y="1463040"/>
-            <a:ext cx="3511296" cy="2103120"/>
-          </a:xfrm>
-          <a:prstGeom prst="roundRect">
-            <a:avLst>
-              <a:gd name="adj" fmla="val 5217"/>
-            </a:avLst>
-          </a:prstGeom>
-          <a:solidFill>
-            <a:schemeClr val="bg2"/>
-          </a:solidFill>
-          <a:ln/>
-        </p:spPr>
-      </p:sp>
-      <p:sp>
-        <p:nvSpPr>
-          <p:cNvPr id="9" name="GKK leaders see one GKK circle"/>
-          <p:cNvSpPr/>
-          <p:nvPr/>
-        </p:nvSpPr>
-        <p:spPr>
-          <a:xfrm>
-            <a:off x="4613148" y="1737360"/>
-            <a:ext cx="548640" cy="548640"/>
-          </a:xfrm>
-          <a:prstGeom prst="ellipse">
-            <a:avLst/>
-          </a:prstGeom>
-          <a:solidFill>
-            <a:schemeClr val="accent1"/>
-          </a:solidFill>
-          <a:ln/>
-        </p:spPr>
-      </p:sp>
-      <p:pic>
-        <p:nvPicPr>
-          <p:cNvPr id="10" name="GKK leaders see one GKK icon" descr="preencoded.png">    </p:cNvPr>
-          <p:cNvPicPr>
-            <a:picLocks noChangeAspect="1"/>
-          </p:cNvPicPr>
-          <p:nvPr/>
-        </p:nvPicPr>
-        <p:blipFill>
-          <a:blip r:embed="rId2"/>
-          <a:stretch>
-            <a:fillRect/>
-          </a:stretch>
-        </p:blipFill>
-        <p:spPr>
-          <a:xfrm>
-            <a:off x="4750308" y="1874520"/>
-            <a:ext cx="274320" cy="274320"/>
-          </a:xfrm>
-          <a:prstGeom prst="rect">
-            <a:avLst/>
-          </a:prstGeom>
-        </p:spPr>
-      </p:pic>
-      <p:sp>
-        <p:nvSpPr>
-          <p:cNvPr id="11" name="Text 7"/>
-          <p:cNvSpPr txBox="1"/>
-          <p:nvPr/>
-        </p:nvSpPr>
-        <p:spPr>
-          <a:xfrm>
-            <a:off x="4613148" y="2395728"/>
-            <a:ext cx="2962656" cy="365760"/>
-          </a:xfrm>
-          <a:prstGeom prst="rect">
-            <a:avLst/>
-          </a:prstGeom>
-          <a:noFill/>
-          <a:ln/>
-        </p:spPr>
-        <p:txBody>
-          <a:bodyPr wrap="square" lIns="0" tIns="0" rIns="0" bIns="0" rtlCol="0" anchor="t"/>
-          <a:lstStyle/>
-          <a:p>
-            <a:pPr indent="0" marL="0">
-              <a:buNone/>
-            </a:pPr>
-            <a:r>
-              <a:rPr lang="en-US" sz="1700" b="1" dirty="0">
-                <a:solidFill>
-                  <a:schemeClr val="tx2"/>
-                </a:solidFill>
-              </a:rPr>
-              <a:t>GKK leaders see one GKK</a:t>
-            </a:r>
-            <a:endParaRPr lang="en-US" sz="1700" dirty="0"/>
-          </a:p>
-        </p:txBody>
-      </p:sp>
-      <p:sp>
-        <p:nvSpPr>
-          <p:cNvPr id="12" name="Text 8"/>
-          <p:cNvSpPr txBox="1"/>
-          <p:nvPr/>
-        </p:nvSpPr>
-        <p:spPr>
-          <a:xfrm>
-            <a:off x="4613148" y="2770632"/>
-            <a:ext cx="3008376" cy="731520"/>
-          </a:xfrm>
-          <a:prstGeom prst="rect">
-            <a:avLst/>
-          </a:prstGeom>
-          <a:noFill/>
-          <a:ln/>
-        </p:spPr>
-        <p:txBody>
-          <a:bodyPr wrap="square" lIns="0" tIns="0" rIns="0" bIns="0" rtlCol="0" anchor="t"/>
-          <a:lstStyle/>
-          <a:p>
-            <a:pPr indent="0" marL="0">
-              <a:buNone/>
-            </a:pPr>
-            <a:r>
-              <a:rPr lang="en-US" sz="1400" dirty="0">
-                <a:solidFill>
-                  <a:schemeClr val="tx1"/>
-                </a:solidFill>
-              </a:rPr>
-              <a:t>Their own families only. The database itself enforces it.</a:t>
-            </a:r>
-            <a:endParaRPr lang="en-US" sz="1400" dirty="0"/>
-          </a:p>
-        </p:txBody>
-      </p:sp>
-      <p:sp>
-        <p:nvSpPr>
-          <p:cNvPr id="13" name="Nothing private goes public"/>
-          <p:cNvSpPr/>
-          <p:nvPr/>
-        </p:nvSpPr>
-        <p:spPr>
-          <a:xfrm>
-            <a:off x="8129016" y="1463040"/>
-            <a:ext cx="3511296" cy="2103120"/>
-          </a:xfrm>
-          <a:prstGeom prst="roundRect">
-            <a:avLst>
-              <a:gd name="adj" fmla="val 5217"/>
-            </a:avLst>
-          </a:prstGeom>
-          <a:solidFill>
-            <a:schemeClr val="bg2"/>
-          </a:solidFill>
-          <a:ln/>
-        </p:spPr>
-      </p:sp>
-      <p:sp>
-        <p:nvSpPr>
-          <p:cNvPr id="14" name="Nothing private goes public circle"/>
-          <p:cNvSpPr/>
-          <p:nvPr/>
-        </p:nvSpPr>
-        <p:spPr>
-          <a:xfrm>
-            <a:off x="8403336" y="1737360"/>
-            <a:ext cx="548640" cy="548640"/>
-          </a:xfrm>
-          <a:prstGeom prst="ellipse">
-            <a:avLst/>
-          </a:prstGeom>
-          <a:solidFill>
-            <a:schemeClr val="accent1"/>
-          </a:solidFill>
-          <a:ln/>
-        </p:spPr>
-      </p:sp>
-      <p:pic>
-        <p:nvPicPr>
-          <p:cNvPr id="15" name="Nothing private goes public icon" descr="preencoded.png">    </p:cNvPr>
+          <p:cNvPr id="5" name="Each staff member signs in icon" descr="preencoded.png"/>
           <p:cNvPicPr>
             <a:picLocks noChangeAspect="1"/>
           </p:cNvPicPr>
@@ -11013,7 +10080,7 @@
         </p:blipFill>
         <p:spPr>
           <a:xfrm>
-            <a:off x="8540496" y="1874520"/>
+            <a:off x="960120" y="1874520"/>
             <a:ext cx="274320" cy="274320"/>
           </a:xfrm>
           <a:prstGeom prst="rect">
@@ -11023,13 +10090,13 @@
       </p:pic>
       <p:sp>
         <p:nvSpPr>
-          <p:cNvPr id="16" name="Text 11"/>
+          <p:cNvPr id="6" name="Text 3"/>
           <p:cNvSpPr txBox="1"/>
           <p:nvPr/>
         </p:nvSpPr>
         <p:spPr>
           <a:xfrm>
-            <a:off x="8403336" y="2395728"/>
+            <a:off x="822960" y="2395728"/>
             <a:ext cx="2962656" cy="365760"/>
           </a:xfrm>
           <a:prstGeom prst="rect">
@@ -11042,7 +10109,7 @@
           <a:bodyPr wrap="square" lIns="0" tIns="0" rIns="0" bIns="0" rtlCol="0" anchor="t"/>
           <a:lstStyle/>
           <a:p>
-            <a:pPr indent="0" marL="0">
+            <a:pPr marL="0" indent="0">
               <a:buNone/>
             </a:pPr>
             <a:r>
@@ -11051,7 +10118,7 @@
                   <a:schemeClr val="tx2"/>
                 </a:solidFill>
               </a:rPr>
-              <a:t>Nothing private goes public</a:t>
+              <a:t>Each staff member signs in</a:t>
             </a:r>
             <a:endParaRPr lang="en-US" sz="1700" dirty="0"/>
           </a:p>
@@ -11059,13 +10126,13 @@
       </p:sp>
       <p:sp>
         <p:nvSpPr>
-          <p:cNvPr id="17" name="Text 12"/>
+          <p:cNvPr id="7" name="Text 4"/>
           <p:cNvSpPr txBox="1"/>
           <p:nvPr/>
         </p:nvSpPr>
         <p:spPr>
           <a:xfrm>
-            <a:off x="8403336" y="2770632"/>
+            <a:off x="822960" y="2770632"/>
             <a:ext cx="3008376" cy="731520"/>
           </a:xfrm>
           <a:prstGeom prst="rect">
@@ -11078,7 +10145,7 @@
           <a:bodyPr wrap="square" lIns="0" tIns="0" rIns="0" bIns="0" rtlCol="0" anchor="t"/>
           <a:lstStyle/>
           <a:p>
-            <a:pPr indent="0" marL="0">
+            <a:pPr marL="0" indent="0">
               <a:buNone/>
             </a:pPr>
             <a:r>
@@ -11087,7 +10154,7 @@
                   <a:schemeClr val="tx1"/>
                 </a:solidFill>
               </a:rPr>
-              <a:t>Phone numbers, birthdays and blood types never show on the website.</a:t>
+              <a:t>Their own login and access level: full, read only, GKK leader, clergy and more.</a:t>
             </a:r>
             <a:endParaRPr lang="en-US" sz="1400" dirty="0"/>
           </a:p>
@@ -11095,13 +10162,13 @@
       </p:sp>
       <p:sp>
         <p:nvSpPr>
-          <p:cNvPr id="18" name="Every change is logged"/>
+          <p:cNvPr id="8" name="GKK leaders see one GKK"/>
           <p:cNvSpPr/>
           <p:nvPr/>
         </p:nvSpPr>
         <p:spPr>
           <a:xfrm>
-            <a:off x="548640" y="3840480"/>
+            <a:off x="4338828" y="1463040"/>
             <a:ext cx="3511296" cy="2103120"/>
           </a:xfrm>
           <a:prstGeom prst="roundRect">
@@ -11117,13 +10184,13 @@
       </p:sp>
       <p:sp>
         <p:nvSpPr>
-          <p:cNvPr id="19" name="Every change is logged circle"/>
+          <p:cNvPr id="9" name="GKK leaders see one GKK circle"/>
           <p:cNvSpPr/>
           <p:nvPr/>
         </p:nvSpPr>
         <p:spPr>
           <a:xfrm>
-            <a:off x="822960" y="4114800"/>
+            <a:off x="4613148" y="1737360"/>
             <a:ext cx="548640" cy="548640"/>
           </a:xfrm>
           <a:prstGeom prst="ellipse">
@@ -11137,7 +10204,7 @@
       </p:sp>
       <p:pic>
         <p:nvPicPr>
-          <p:cNvPr id="20" name="Every change is logged icon" descr="preencoded.png">    </p:cNvPr>
+          <p:cNvPr id="10" name="GKK leaders see one GKK icon" descr="preencoded.png"/>
           <p:cNvPicPr>
             <a:picLocks noChangeAspect="1"/>
           </p:cNvPicPr>
@@ -11151,7 +10218,7 @@
         </p:blipFill>
         <p:spPr>
           <a:xfrm>
-            <a:off x="960120" y="4251960"/>
+            <a:off x="4750308" y="1874520"/>
             <a:ext cx="274320" cy="274320"/>
           </a:xfrm>
           <a:prstGeom prst="rect">
@@ -11161,13 +10228,13 @@
       </p:pic>
       <p:sp>
         <p:nvSpPr>
-          <p:cNvPr id="21" name="Text 15"/>
+          <p:cNvPr id="11" name="Text 7"/>
           <p:cNvSpPr txBox="1"/>
           <p:nvPr/>
         </p:nvSpPr>
         <p:spPr>
           <a:xfrm>
-            <a:off x="822960" y="4773168"/>
+            <a:off x="4613148" y="2395728"/>
             <a:ext cx="2962656" cy="365760"/>
           </a:xfrm>
           <a:prstGeom prst="rect">
@@ -11180,7 +10247,7 @@
           <a:bodyPr wrap="square" lIns="0" tIns="0" rIns="0" bIns="0" rtlCol="0" anchor="t"/>
           <a:lstStyle/>
           <a:p>
-            <a:pPr indent="0" marL="0">
+            <a:pPr marL="0" indent="0">
               <a:buNone/>
             </a:pPr>
             <a:r>
@@ -11189,7 +10256,7 @@
                   <a:schemeClr val="tx2"/>
                 </a:solidFill>
               </a:rPr>
-              <a:t>Every change is logged</a:t>
+              <a:t>GKK leaders see one GKK</a:t>
             </a:r>
             <a:endParaRPr lang="en-US" sz="1700" dirty="0"/>
           </a:p>
@@ -11197,13 +10264,13 @@
       </p:sp>
       <p:sp>
         <p:nvSpPr>
-          <p:cNvPr id="22" name="Text 16"/>
+          <p:cNvPr id="12" name="Text 8"/>
           <p:cNvSpPr txBox="1"/>
           <p:nvPr/>
         </p:nvSpPr>
         <p:spPr>
           <a:xfrm>
-            <a:off x="822960" y="5148072"/>
+            <a:off x="4613148" y="2770632"/>
             <a:ext cx="3008376" cy="731520"/>
           </a:xfrm>
           <a:prstGeom prst="rect">
@@ -11216,7 +10283,7 @@
           <a:bodyPr wrap="square" lIns="0" tIns="0" rIns="0" bIns="0" rtlCol="0" anchor="t"/>
           <a:lstStyle/>
           <a:p>
-            <a:pPr indent="0" marL="0">
+            <a:pPr marL="0" indent="0">
               <a:buNone/>
             </a:pPr>
             <a:r>
@@ -11225,7 +10292,7 @@
                   <a:schemeClr val="tx1"/>
                 </a:solidFill>
               </a:rPr>
-              <a:t>Who changed what, and when. Deleted records can be restored for 30 days.</a:t>
+              <a:t>Their own families only. The database itself enforces it.</a:t>
             </a:r>
             <a:endParaRPr lang="en-US" sz="1400" dirty="0"/>
           </a:p>
@@ -11233,13 +10300,13 @@
       </p:sp>
       <p:sp>
         <p:nvSpPr>
-          <p:cNvPr id="23" name="Weekly encrypted backups"/>
+          <p:cNvPr id="13" name="Nothing private goes public"/>
           <p:cNvSpPr/>
           <p:nvPr/>
         </p:nvSpPr>
         <p:spPr>
           <a:xfrm>
-            <a:off x="4338828" y="3840480"/>
+            <a:off x="8129016" y="1463040"/>
             <a:ext cx="3511296" cy="2103120"/>
           </a:xfrm>
           <a:prstGeom prst="roundRect">
@@ -11255,13 +10322,13 @@
       </p:sp>
       <p:sp>
         <p:nvSpPr>
-          <p:cNvPr id="24" name="Weekly encrypted backups circle"/>
+          <p:cNvPr id="14" name="Nothing private goes public circle"/>
           <p:cNvSpPr/>
           <p:nvPr/>
         </p:nvSpPr>
         <p:spPr>
           <a:xfrm>
-            <a:off x="4613148" y="4114800"/>
+            <a:off x="8403336" y="1737360"/>
             <a:ext cx="548640" cy="548640"/>
           </a:xfrm>
           <a:prstGeom prst="ellipse">
@@ -11275,7 +10342,7 @@
       </p:sp>
       <p:pic>
         <p:nvPicPr>
-          <p:cNvPr id="25" name="Weekly encrypted backups icon" descr="preencoded.png">    </p:cNvPr>
+          <p:cNvPr id="15" name="Nothing private goes public icon" descr="preencoded.png"/>
           <p:cNvPicPr>
             <a:picLocks noChangeAspect="1"/>
           </p:cNvPicPr>
@@ -11289,7 +10356,7 @@
         </p:blipFill>
         <p:spPr>
           <a:xfrm>
-            <a:off x="4750308" y="4251960"/>
+            <a:off x="8540496" y="1874520"/>
             <a:ext cx="274320" cy="274320"/>
           </a:xfrm>
           <a:prstGeom prst="rect">
@@ -11299,13 +10366,13 @@
       </p:pic>
       <p:sp>
         <p:nvSpPr>
-          <p:cNvPr id="26" name="Text 19"/>
+          <p:cNvPr id="16" name="Text 11"/>
           <p:cNvSpPr txBox="1"/>
           <p:nvPr/>
         </p:nvSpPr>
         <p:spPr>
           <a:xfrm>
-            <a:off x="4613148" y="4773168"/>
+            <a:off x="8403336" y="2395728"/>
             <a:ext cx="2962656" cy="365760"/>
           </a:xfrm>
           <a:prstGeom prst="rect">
@@ -11318,7 +10385,7 @@
           <a:bodyPr wrap="square" lIns="0" tIns="0" rIns="0" bIns="0" rtlCol="0" anchor="t"/>
           <a:lstStyle/>
           <a:p>
-            <a:pPr indent="0" marL="0">
+            <a:pPr marL="0" indent="0">
               <a:buNone/>
             </a:pPr>
             <a:r>
@@ -11327,7 +10394,7 @@
                   <a:schemeClr val="tx2"/>
                 </a:solidFill>
               </a:rPr>
-              <a:t>Weekly encrypted backups</a:t>
+              <a:t>Nothing private goes public</a:t>
             </a:r>
             <a:endParaRPr lang="en-US" sz="1700" dirty="0"/>
           </a:p>
@@ -11335,13 +10402,13 @@
       </p:sp>
       <p:sp>
         <p:nvSpPr>
-          <p:cNvPr id="27" name="Text 20"/>
+          <p:cNvPr id="17" name="Text 12"/>
           <p:cNvSpPr txBox="1"/>
           <p:nvPr/>
         </p:nvSpPr>
         <p:spPr>
           <a:xfrm>
-            <a:off x="4613148" y="5148072"/>
+            <a:off x="8403336" y="2770632"/>
             <a:ext cx="3008376" cy="731520"/>
           </a:xfrm>
           <a:prstGeom prst="rect">
@@ -11354,7 +10421,7 @@
           <a:bodyPr wrap="square" lIns="0" tIns="0" rIns="0" bIns="0" rtlCol="0" anchor="t"/>
           <a:lstStyle/>
           <a:p>
-            <a:pPr indent="0" marL="0">
+            <a:pPr marL="0" indent="0">
               <a:buNone/>
             </a:pPr>
             <a:r>
@@ -11363,7 +10430,7 @@
                   <a:schemeClr val="tx1"/>
                 </a:solidFill>
               </a:rPr>
-              <a:t>Locked with a passphrase and kept in the parish’s own storage.</a:t>
+              <a:t>Phone numbers, birthdays and blood types never show on the website.</a:t>
             </a:r>
             <a:endParaRPr lang="en-US" sz="1400" dirty="0"/>
           </a:p>
@@ -11371,13 +10438,13 @@
       </p:sp>
       <p:sp>
         <p:nvSpPr>
-          <p:cNvPr id="28" name="Owned by the parish"/>
+          <p:cNvPr id="18" name="Every change is logged"/>
           <p:cNvSpPr/>
           <p:nvPr/>
         </p:nvSpPr>
         <p:spPr>
           <a:xfrm>
-            <a:off x="8129016" y="3840480"/>
+            <a:off x="548640" y="3840480"/>
             <a:ext cx="3511296" cy="2103120"/>
           </a:xfrm>
           <a:prstGeom prst="roundRect">
@@ -11393,13 +10460,13 @@
       </p:sp>
       <p:sp>
         <p:nvSpPr>
-          <p:cNvPr id="29" name="Owned by the parish circle"/>
+          <p:cNvPr id="19" name="Every change is logged circle"/>
           <p:cNvSpPr/>
           <p:nvPr/>
         </p:nvSpPr>
         <p:spPr>
           <a:xfrm>
-            <a:off x="8403336" y="4114800"/>
+            <a:off x="822960" y="4114800"/>
             <a:ext cx="548640" cy="548640"/>
           </a:xfrm>
           <a:prstGeom prst="ellipse">
@@ -11413,7 +10480,7 @@
       </p:sp>
       <p:pic>
         <p:nvPicPr>
-          <p:cNvPr id="30" name="Owned by the parish icon" descr="preencoded.png">    </p:cNvPr>
+          <p:cNvPr id="20" name="Every change is logged icon" descr="preencoded.png"/>
           <p:cNvPicPr>
             <a:picLocks noChangeAspect="1"/>
           </p:cNvPicPr>
@@ -11427,6 +10494,282 @@
         </p:blipFill>
         <p:spPr>
           <a:xfrm>
+            <a:off x="960120" y="4251960"/>
+            <a:ext cx="274320" cy="274320"/>
+          </a:xfrm>
+          <a:prstGeom prst="rect">
+            <a:avLst/>
+          </a:prstGeom>
+        </p:spPr>
+      </p:pic>
+      <p:sp>
+        <p:nvSpPr>
+          <p:cNvPr id="21" name="Text 15"/>
+          <p:cNvSpPr txBox="1"/>
+          <p:nvPr/>
+        </p:nvSpPr>
+        <p:spPr>
+          <a:xfrm>
+            <a:off x="822960" y="4773168"/>
+            <a:ext cx="2962656" cy="365760"/>
+          </a:xfrm>
+          <a:prstGeom prst="rect">
+            <a:avLst/>
+          </a:prstGeom>
+          <a:noFill/>
+          <a:ln/>
+        </p:spPr>
+        <p:txBody>
+          <a:bodyPr wrap="square" lIns="0" tIns="0" rIns="0" bIns="0" rtlCol="0" anchor="t"/>
+          <a:lstStyle/>
+          <a:p>
+            <a:pPr marL="0" indent="0">
+              <a:buNone/>
+            </a:pPr>
+            <a:r>
+              <a:rPr lang="en-US" sz="1700" b="1" dirty="0">
+                <a:solidFill>
+                  <a:schemeClr val="tx2"/>
+                </a:solidFill>
+              </a:rPr>
+              <a:t>Every change is logged</a:t>
+            </a:r>
+            <a:endParaRPr lang="en-US" sz="1700" dirty="0"/>
+          </a:p>
+        </p:txBody>
+      </p:sp>
+      <p:sp>
+        <p:nvSpPr>
+          <p:cNvPr id="22" name="Text 16"/>
+          <p:cNvSpPr txBox="1"/>
+          <p:nvPr/>
+        </p:nvSpPr>
+        <p:spPr>
+          <a:xfrm>
+            <a:off x="822960" y="5148072"/>
+            <a:ext cx="3008376" cy="731520"/>
+          </a:xfrm>
+          <a:prstGeom prst="rect">
+            <a:avLst/>
+          </a:prstGeom>
+          <a:noFill/>
+          <a:ln/>
+        </p:spPr>
+        <p:txBody>
+          <a:bodyPr wrap="square" lIns="0" tIns="0" rIns="0" bIns="0" rtlCol="0" anchor="t"/>
+          <a:lstStyle/>
+          <a:p>
+            <a:pPr marL="0" indent="0">
+              <a:buNone/>
+            </a:pPr>
+            <a:r>
+              <a:rPr lang="en-US" sz="1400" dirty="0">
+                <a:solidFill>
+                  <a:schemeClr val="tx1"/>
+                </a:solidFill>
+              </a:rPr>
+              <a:t>Who changed what, and when. Deleted records can be restored for 30 days.</a:t>
+            </a:r>
+            <a:endParaRPr lang="en-US" sz="1400" dirty="0"/>
+          </a:p>
+        </p:txBody>
+      </p:sp>
+      <p:sp>
+        <p:nvSpPr>
+          <p:cNvPr id="23" name="Weekly encrypted backups"/>
+          <p:cNvSpPr/>
+          <p:nvPr/>
+        </p:nvSpPr>
+        <p:spPr>
+          <a:xfrm>
+            <a:off x="4338828" y="3840480"/>
+            <a:ext cx="3511296" cy="2103120"/>
+          </a:xfrm>
+          <a:prstGeom prst="roundRect">
+            <a:avLst>
+              <a:gd name="adj" fmla="val 5217"/>
+            </a:avLst>
+          </a:prstGeom>
+          <a:solidFill>
+            <a:schemeClr val="bg2"/>
+          </a:solidFill>
+          <a:ln/>
+        </p:spPr>
+      </p:sp>
+      <p:sp>
+        <p:nvSpPr>
+          <p:cNvPr id="24" name="Weekly encrypted backups circle"/>
+          <p:cNvSpPr/>
+          <p:nvPr/>
+        </p:nvSpPr>
+        <p:spPr>
+          <a:xfrm>
+            <a:off x="4613148" y="4114800"/>
+            <a:ext cx="548640" cy="548640"/>
+          </a:xfrm>
+          <a:prstGeom prst="ellipse">
+            <a:avLst/>
+          </a:prstGeom>
+          <a:solidFill>
+            <a:schemeClr val="accent1"/>
+          </a:solidFill>
+          <a:ln/>
+        </p:spPr>
+      </p:sp>
+      <p:pic>
+        <p:nvPicPr>
+          <p:cNvPr id="25" name="Weekly encrypted backups icon" descr="preencoded.png"/>
+          <p:cNvPicPr>
+            <a:picLocks noChangeAspect="1"/>
+          </p:cNvPicPr>
+          <p:nvPr/>
+        </p:nvPicPr>
+        <p:blipFill>
+          <a:blip r:embed="rId7"/>
+          <a:stretch>
+            <a:fillRect/>
+          </a:stretch>
+        </p:blipFill>
+        <p:spPr>
+          <a:xfrm>
+            <a:off x="4750308" y="4251960"/>
+            <a:ext cx="274320" cy="274320"/>
+          </a:xfrm>
+          <a:prstGeom prst="rect">
+            <a:avLst/>
+          </a:prstGeom>
+        </p:spPr>
+      </p:pic>
+      <p:sp>
+        <p:nvSpPr>
+          <p:cNvPr id="26" name="Text 19"/>
+          <p:cNvSpPr txBox="1"/>
+          <p:nvPr/>
+        </p:nvSpPr>
+        <p:spPr>
+          <a:xfrm>
+            <a:off x="4613148" y="4773168"/>
+            <a:ext cx="2962656" cy="365760"/>
+          </a:xfrm>
+          <a:prstGeom prst="rect">
+            <a:avLst/>
+          </a:prstGeom>
+          <a:noFill/>
+          <a:ln/>
+        </p:spPr>
+        <p:txBody>
+          <a:bodyPr wrap="square" lIns="0" tIns="0" rIns="0" bIns="0" rtlCol="0" anchor="t"/>
+          <a:lstStyle/>
+          <a:p>
+            <a:pPr marL="0" indent="0">
+              <a:buNone/>
+            </a:pPr>
+            <a:r>
+              <a:rPr lang="en-US" sz="1700" b="1" dirty="0">
+                <a:solidFill>
+                  <a:schemeClr val="tx2"/>
+                </a:solidFill>
+              </a:rPr>
+              <a:t>Weekly encrypted backups</a:t>
+            </a:r>
+            <a:endParaRPr lang="en-US" sz="1700" dirty="0"/>
+          </a:p>
+        </p:txBody>
+      </p:sp>
+      <p:sp>
+        <p:nvSpPr>
+          <p:cNvPr id="27" name="Text 20"/>
+          <p:cNvSpPr txBox="1"/>
+          <p:nvPr/>
+        </p:nvSpPr>
+        <p:spPr>
+          <a:xfrm>
+            <a:off x="4613148" y="5148072"/>
+            <a:ext cx="3008376" cy="731520"/>
+          </a:xfrm>
+          <a:prstGeom prst="rect">
+            <a:avLst/>
+          </a:prstGeom>
+          <a:noFill/>
+          <a:ln/>
+        </p:spPr>
+        <p:txBody>
+          <a:bodyPr wrap="square" lIns="0" tIns="0" rIns="0" bIns="0" rtlCol="0" anchor="t"/>
+          <a:lstStyle/>
+          <a:p>
+            <a:pPr marL="0" indent="0">
+              <a:buNone/>
+            </a:pPr>
+            <a:r>
+              <a:rPr lang="en-US" sz="1400" dirty="0">
+                <a:solidFill>
+                  <a:schemeClr val="tx1"/>
+                </a:solidFill>
+              </a:rPr>
+              <a:t>Locked with a passphrase and kept in the parish’s own storage.</a:t>
+            </a:r>
+            <a:endParaRPr lang="en-US" sz="1400" dirty="0"/>
+          </a:p>
+        </p:txBody>
+      </p:sp>
+      <p:sp>
+        <p:nvSpPr>
+          <p:cNvPr id="28" name="Owned by the parish"/>
+          <p:cNvSpPr/>
+          <p:nvPr/>
+        </p:nvSpPr>
+        <p:spPr>
+          <a:xfrm>
+            <a:off x="8129016" y="3840480"/>
+            <a:ext cx="3511296" cy="2103120"/>
+          </a:xfrm>
+          <a:prstGeom prst="roundRect">
+            <a:avLst>
+              <a:gd name="adj" fmla="val 5217"/>
+            </a:avLst>
+          </a:prstGeom>
+          <a:solidFill>
+            <a:schemeClr val="bg2"/>
+          </a:solidFill>
+          <a:ln/>
+        </p:spPr>
+      </p:sp>
+      <p:sp>
+        <p:nvSpPr>
+          <p:cNvPr id="29" name="Owned by the parish circle"/>
+          <p:cNvSpPr/>
+          <p:nvPr/>
+        </p:nvSpPr>
+        <p:spPr>
+          <a:xfrm>
+            <a:off x="8403336" y="4114800"/>
+            <a:ext cx="548640" cy="548640"/>
+          </a:xfrm>
+          <a:prstGeom prst="ellipse">
+            <a:avLst/>
+          </a:prstGeom>
+          <a:solidFill>
+            <a:schemeClr val="accent1"/>
+          </a:solidFill>
+          <a:ln/>
+        </p:spPr>
+      </p:sp>
+      <p:pic>
+        <p:nvPicPr>
+          <p:cNvPr id="30" name="Owned by the parish icon" descr="preencoded.png"/>
+          <p:cNvPicPr>
+            <a:picLocks noChangeAspect="1"/>
+          </p:cNvPicPr>
+          <p:nvPr/>
+        </p:nvPicPr>
+        <p:blipFill>
+          <a:blip r:embed="rId8"/>
+          <a:stretch>
+            <a:fillRect/>
+          </a:stretch>
+        </p:blipFill>
+        <p:spPr>
+          <a:xfrm>
             <a:off x="8540496" y="4251960"/>
             <a:ext cx="274320" cy="274320"/>
           </a:xfrm>
@@ -11456,7 +10799,7 @@
           <a:bodyPr wrap="square" lIns="0" tIns="0" rIns="0" bIns="0" rtlCol="0" anchor="t"/>
           <a:lstStyle/>
           <a:p>
-            <a:pPr indent="0" marL="0">
+            <a:pPr marL="0" indent="0">
               <a:buNone/>
             </a:pPr>
             <a:r>
@@ -11492,7 +10835,7 @@
           <a:bodyPr wrap="square" lIns="0" tIns="0" rIns="0" bIns="0" rtlCol="0" anchor="t"/>
           <a:lstStyle/>
           <a:p>
-            <a:pPr indent="0" marL="0">
+            <a:pPr marL="0" indent="0">
               <a:buNone/>
             </a:pPr>
             <a:r>
@@ -11509,7 +10852,7 @@
       </p:sp>
       <p:sp>
         <p:nvSpPr>
-          <p:cNvPr id="25" name="Slide Number Placeholder 0"/>
+          <p:cNvPr id="33" name="Slide Number Placeholder 0"/>
           <p:cNvSpPr>
             <a:spLocks noGrp="1"/>
           </p:cNvSpPr>
@@ -11527,7 +10870,7 @@
           </a:prstGeom>
           <a:extLst>
             <a:ext uri="{C572A759-6A51-4108-AA02-DFA0A04FC94B}">
-              <ma14:wrappingTextBoxFlag xmlns:ma14="http://schemas.microsoft.com/office/mac/drawingml/2011/main" val="0"/>
+              <ma14:wrappingTextBoxFlag xmlns:ma14="http://schemas.microsoft.com/office/mac/drawingml/2011/main" xmlns="" val="0"/>
             </a:ext>
           </a:extLst>
         </p:spPr>
@@ -11545,7 +10888,7 @@
           <a:p>
             <a:pPr algn="r"/>
             <a:fld id="{F7021451-1387-4CA6-816F-3879F97B5CBC}" type="slidenum">
-              <a:rPr b="0" lang="en-US"/>
+              <a:rPr lang="en-US" b="0"/>
               <a:t>9</a:t>
             </a:fld>
             <a:endParaRPr lang="en-US"/>
@@ -11853,4 +11196,319 @@
     </a:ext>
   </a:extLst>
 </a:theme>
+</file>
+
+<file path=ppt/theme/theme2.xml><?xml version="1.0" encoding="utf-8"?>
+<a:theme xmlns:a="http://schemas.openxmlformats.org/drawingml/2006/main" name="Office Theme">
+  <a:themeElements>
+    <a:clrScheme name="Office">
+      <a:dk1>
+        <a:sysClr val="windowText" lastClr="000000"/>
+      </a:dk1>
+      <a:lt1>
+        <a:sysClr val="window" lastClr="FFFFFF"/>
+      </a:lt1>
+      <a:dk2>
+        <a:srgbClr val="0E2841"/>
+      </a:dk2>
+      <a:lt2>
+        <a:srgbClr val="E8E8E8"/>
+      </a:lt2>
+      <a:accent1>
+        <a:srgbClr val="156082"/>
+      </a:accent1>
+      <a:accent2>
+        <a:srgbClr val="E97132"/>
+      </a:accent2>
+      <a:accent3>
+        <a:srgbClr val="196B24"/>
+      </a:accent3>
+      <a:accent4>
+        <a:srgbClr val="0F9ED5"/>
+      </a:accent4>
+      <a:accent5>
+        <a:srgbClr val="A02B93"/>
+      </a:accent5>
+      <a:accent6>
+        <a:srgbClr val="4EA72E"/>
+      </a:accent6>
+      <a:hlink>
+        <a:srgbClr val="467886"/>
+      </a:hlink>
+      <a:folHlink>
+        <a:srgbClr val="96607D"/>
+      </a:folHlink>
+    </a:clrScheme>
+    <a:fontScheme name="Office">
+      <a:majorFont>
+        <a:latin typeface="Aptos Display" panose="02110004020202020204"/>
+        <a:ea typeface=""/>
+        <a:cs typeface=""/>
+        <a:font script="Jpan" typeface="游ゴシック Light"/>
+        <a:font script="Hang" typeface="맑은 고딕"/>
+        <a:font script="Hans" typeface="等线 Light"/>
+        <a:font script="Hant" typeface="新細明體"/>
+        <a:font script="Arab" typeface="Times New Roman"/>
+        <a:font script="Hebr" typeface="Times New Roman"/>
+        <a:font script="Thai" typeface="Angsana New"/>
+        <a:font script="Ethi" typeface="Nyala"/>
+        <a:font script="Beng" typeface="Vrinda"/>
+        <a:font script="Gujr" typeface="Shruti"/>
+        <a:font script="Khmr" typeface="MoolBoran"/>
+        <a:font script="Knda" typeface="Tunga"/>
+        <a:font script="Guru" typeface="Raavi"/>
+        <a:font script="Cans" typeface="Euphemia"/>
+        <a:font script="Cher" typeface="Plantagenet Cherokee"/>
+        <a:font script="Yiii" typeface="Microsoft Yi Baiti"/>
+        <a:font script="Tibt" typeface="Microsoft Himalaya"/>
+        <a:font script="Thaa" typeface="MV Boli"/>
+        <a:font script="Deva" typeface="Mangal"/>
+        <a:font script="Telu" typeface="Gautami"/>
+        <a:font script="Taml" typeface="Latha"/>
+        <a:font script="Syrc" typeface="Estrangelo Edessa"/>
+        <a:font script="Orya" typeface="Kalinga"/>
+        <a:font script="Mlym" typeface="Kartika"/>
+        <a:font script="Laoo" typeface="DokChampa"/>
+        <a:font script="Sinh" typeface="Iskoola Pota"/>
+        <a:font script="Mong" typeface="Mongolian Baiti"/>
+        <a:font script="Viet" typeface="Times New Roman"/>
+        <a:font script="Uigh" typeface="Microsoft Uighur"/>
+        <a:font script="Geor" typeface="Sylfaen"/>
+        <a:font script="Armn" typeface="Arial"/>
+        <a:font script="Bugi" typeface="Leelawadee UI"/>
+        <a:font script="Bopo" typeface="Microsoft JhengHei"/>
+        <a:font script="Java" typeface="Javanese Text"/>
+        <a:font script="Lisu" typeface="Segoe UI"/>
+        <a:font script="Mymr" typeface="Myanmar Text"/>
+        <a:font script="Nkoo" typeface="Ebrima"/>
+        <a:font script="Olck" typeface="Nirmala UI"/>
+        <a:font script="Osma" typeface="Ebrima"/>
+        <a:font script="Phag" typeface="Phagspa"/>
+        <a:font script="Syrn" typeface="Estrangelo Edessa"/>
+        <a:font script="Syrj" typeface="Estrangelo Edessa"/>
+        <a:font script="Syre" typeface="Estrangelo Edessa"/>
+        <a:font script="Sora" typeface="Nirmala UI"/>
+        <a:font script="Tale" typeface="Microsoft Tai Le"/>
+        <a:font script="Talu" typeface="Microsoft New Tai Lue"/>
+        <a:font script="Tfng" typeface="Ebrima"/>
+      </a:majorFont>
+      <a:minorFont>
+        <a:latin typeface="Aptos" panose="02110004020202020204"/>
+        <a:ea typeface=""/>
+        <a:cs typeface=""/>
+        <a:font script="Jpan" typeface="游ゴシック"/>
+        <a:font script="Hang" typeface="맑은 고딕"/>
+        <a:font script="Hans" typeface="等线"/>
+        <a:font script="Hant" typeface="新細明體"/>
+        <a:font script="Arab" typeface="Arial"/>
+        <a:font script="Hebr" typeface="Arial"/>
+        <a:font script="Thai" typeface="Cordia New"/>
+        <a:font script="Ethi" typeface="Nyala"/>
+        <a:font script="Beng" typeface="Vrinda"/>
+        <a:font script="Gujr" typeface="Shruti"/>
+        <a:font script="Khmr" typeface="DaunPenh"/>
+        <a:font script="Knda" typeface="Tunga"/>
+        <a:font script="Guru" typeface="Raavi"/>
+        <a:font script="Cans" typeface="Euphemia"/>
+        <a:font script="Cher" typeface="Plantagenet Cherokee"/>
+        <a:font script="Yiii" typeface="Microsoft Yi Baiti"/>
+        <a:font script="Tibt" typeface="Microsoft Himalaya"/>
+        <a:font script="Thaa" typeface="MV Boli"/>
+        <a:font script="Deva" typeface="Mangal"/>
+        <a:font script="Telu" typeface="Gautami"/>
+        <a:font script="Taml" typeface="Latha"/>
+        <a:font script="Syrc" typeface="Estrangelo Edessa"/>
+        <a:font script="Orya" typeface="Kalinga"/>
+        <a:font script="Mlym" typeface="Kartika"/>
+        <a:font script="Laoo" typeface="DokChampa"/>
+        <a:font script="Sinh" typeface="Iskoola Pota"/>
+        <a:font script="Mong" typeface="Mongolian Baiti"/>
+        <a:font script="Viet" typeface="Arial"/>
+        <a:font script="Uigh" typeface="Microsoft Uighur"/>
+        <a:font script="Geor" typeface="Sylfaen"/>
+        <a:font script="Armn" typeface="Arial"/>
+        <a:font script="Bugi" typeface="Leelawadee UI"/>
+        <a:font script="Bopo" typeface="Microsoft JhengHei"/>
+        <a:font script="Java" typeface="Javanese Text"/>
+        <a:font script="Lisu" typeface="Segoe UI"/>
+        <a:font script="Mymr" typeface="Myanmar Text"/>
+        <a:font script="Nkoo" typeface="Ebrima"/>
+        <a:font script="Olck" typeface="Nirmala UI"/>
+        <a:font script="Osma" typeface="Ebrima"/>
+        <a:font script="Phag" typeface="Phagspa"/>
+        <a:font script="Syrn" typeface="Estrangelo Edessa"/>
+        <a:font script="Syrj" typeface="Estrangelo Edessa"/>
+        <a:font script="Syre" typeface="Estrangelo Edessa"/>
+        <a:font script="Sora" typeface="Nirmala UI"/>
+        <a:font script="Tale" typeface="Microsoft Tai Le"/>
+        <a:font script="Talu" typeface="Microsoft New Tai Lue"/>
+        <a:font script="Tfng" typeface="Ebrima"/>
+      </a:minorFont>
+    </a:fontScheme>
+    <a:fmtScheme name="Office">
+      <a:fillStyleLst>
+        <a:solidFill>
+          <a:schemeClr val="phClr"/>
+        </a:solidFill>
+        <a:gradFill rotWithShape="1">
+          <a:gsLst>
+            <a:gs pos="0">
+              <a:schemeClr val="phClr">
+                <a:lumMod val="110000"/>
+                <a:satMod val="105000"/>
+                <a:tint val="67000"/>
+              </a:schemeClr>
+            </a:gs>
+            <a:gs pos="50000">
+              <a:schemeClr val="phClr">
+                <a:lumMod val="105000"/>
+                <a:satMod val="103000"/>
+                <a:tint val="73000"/>
+              </a:schemeClr>
+            </a:gs>
+            <a:gs pos="100000">
+              <a:schemeClr val="phClr">
+                <a:lumMod val="105000"/>
+                <a:satMod val="109000"/>
+                <a:tint val="81000"/>
+              </a:schemeClr>
+            </a:gs>
+          </a:gsLst>
+          <a:lin ang="5400000" scaled="0"/>
+        </a:gradFill>
+        <a:gradFill rotWithShape="1">
+          <a:gsLst>
+            <a:gs pos="0">
+              <a:schemeClr val="phClr">
+                <a:satMod val="103000"/>
+                <a:lumMod val="102000"/>
+                <a:tint val="94000"/>
+              </a:schemeClr>
+            </a:gs>
+            <a:gs pos="50000">
+              <a:schemeClr val="phClr">
+                <a:satMod val="110000"/>
+                <a:lumMod val="100000"/>
+                <a:shade val="100000"/>
+              </a:schemeClr>
+            </a:gs>
+            <a:gs pos="100000">
+              <a:schemeClr val="phClr">
+                <a:lumMod val="99000"/>
+                <a:satMod val="120000"/>
+                <a:shade val="78000"/>
+              </a:schemeClr>
+            </a:gs>
+          </a:gsLst>
+          <a:lin ang="5400000" scaled="0"/>
+        </a:gradFill>
+      </a:fillStyleLst>
+      <a:lnStyleLst>
+        <a:ln w="12700" cap="flat" cmpd="sng" algn="ctr">
+          <a:solidFill>
+            <a:schemeClr val="phClr"/>
+          </a:solidFill>
+          <a:prstDash val="solid"/>
+          <a:miter lim="800000"/>
+        </a:ln>
+        <a:ln w="19050" cap="flat" cmpd="sng" algn="ctr">
+          <a:solidFill>
+            <a:schemeClr val="phClr"/>
+          </a:solidFill>
+          <a:prstDash val="solid"/>
+          <a:miter lim="800000"/>
+        </a:ln>
+        <a:ln w="25400" cap="flat" cmpd="sng" algn="ctr">
+          <a:solidFill>
+            <a:schemeClr val="phClr"/>
+          </a:solidFill>
+          <a:prstDash val="solid"/>
+          <a:miter lim="800000"/>
+        </a:ln>
+      </a:lnStyleLst>
+      <a:effectStyleLst>
+        <a:effectStyle>
+          <a:effectLst/>
+        </a:effectStyle>
+        <a:effectStyle>
+          <a:effectLst/>
+        </a:effectStyle>
+        <a:effectStyle>
+          <a:effectLst>
+            <a:outerShdw blurRad="57150" dist="19050" dir="5400000" algn="ctr" rotWithShape="0">
+              <a:srgbClr val="000000">
+                <a:alpha val="63000"/>
+              </a:srgbClr>
+            </a:outerShdw>
+          </a:effectLst>
+        </a:effectStyle>
+      </a:effectStyleLst>
+      <a:bgFillStyleLst>
+        <a:solidFill>
+          <a:schemeClr val="phClr"/>
+        </a:solidFill>
+        <a:solidFill>
+          <a:schemeClr val="phClr">
+            <a:tint val="95000"/>
+            <a:satMod val="170000"/>
+          </a:schemeClr>
+        </a:solidFill>
+        <a:gradFill rotWithShape="1">
+          <a:gsLst>
+            <a:gs pos="0">
+              <a:schemeClr val="phClr">
+                <a:tint val="93000"/>
+                <a:satMod val="150000"/>
+                <a:shade val="98000"/>
+                <a:lumMod val="102000"/>
+              </a:schemeClr>
+            </a:gs>
+            <a:gs pos="50000">
+              <a:schemeClr val="phClr">
+                <a:tint val="98000"/>
+                <a:satMod val="130000"/>
+                <a:shade val="90000"/>
+                <a:lumMod val="103000"/>
+              </a:schemeClr>
+            </a:gs>
+            <a:gs pos="100000">
+              <a:schemeClr val="phClr">
+                <a:shade val="63000"/>
+                <a:satMod val="120000"/>
+              </a:schemeClr>
+            </a:gs>
+          </a:gsLst>
+          <a:lin ang="5400000" scaled="0"/>
+        </a:gradFill>
+      </a:bgFillStyleLst>
+    </a:fmtScheme>
+  </a:themeElements>
+  <a:objectDefaults>
+    <a:lnDef>
+      <a:spPr/>
+      <a:bodyPr/>
+      <a:lstStyle/>
+      <a:style>
+        <a:lnRef idx="2">
+          <a:schemeClr val="accent1"/>
+        </a:lnRef>
+        <a:fillRef idx="0">
+          <a:schemeClr val="accent1"/>
+        </a:fillRef>
+        <a:effectRef idx="1">
+          <a:schemeClr val="accent1"/>
+        </a:effectRef>
+        <a:fontRef idx="minor">
+          <a:schemeClr val="tx1"/>
+        </a:fontRef>
+      </a:style>
+    </a:lnDef>
+  </a:objectDefaults>
+  <a:extraClrSchemeLst/>
+  <a:extLst>
+    <a:ext uri="{05A4C25C-085E-4340-85A3-A5531E510DB2}">
+      <thm15:themeFamily xmlns:thm15="http://schemas.microsoft.com/office/thememl/2012/main" name="Office Theme" id="{2E142A2C-CD16-42D6-873A-C26D2A0506FA}" vid="{1BDDFF52-6CD6-40A5-AB3C-68EB2F1E4D0A}"/>
+    </a:ext>
+  </a:extLst>
+</a:theme>
 </file>